--- a/반도체장비분석프로그래밍_python/천재성.pptx
+++ b/반도체장비분석프로그래밍_python/천재성.pptx
@@ -5,29 +5,31 @@
     <p:sldMasterId id="2147483648" r:id="rId1"/>
   </p:sldMasterIdLst>
   <p:notesMasterIdLst>
-    <p:notesMasterId r:id="rId22"/>
+    <p:notesMasterId r:id="rId24"/>
   </p:notesMasterIdLst>
   <p:sldIdLst>
-    <p:sldId id="256" r:id="rId2"/>
-    <p:sldId id="257" r:id="rId3"/>
-    <p:sldId id="258" r:id="rId4"/>
-    <p:sldId id="259" r:id="rId5"/>
-    <p:sldId id="260" r:id="rId6"/>
-    <p:sldId id="261" r:id="rId7"/>
-    <p:sldId id="262" r:id="rId8"/>
-    <p:sldId id="263" r:id="rId9"/>
-    <p:sldId id="264" r:id="rId10"/>
-    <p:sldId id="265" r:id="rId11"/>
-    <p:sldId id="266" r:id="rId12"/>
-    <p:sldId id="267" r:id="rId13"/>
-    <p:sldId id="268" r:id="rId14"/>
-    <p:sldId id="269" r:id="rId15"/>
-    <p:sldId id="270" r:id="rId16"/>
-    <p:sldId id="271" r:id="rId17"/>
-    <p:sldId id="272" r:id="rId18"/>
-    <p:sldId id="273" r:id="rId19"/>
-    <p:sldId id="274" r:id="rId20"/>
-    <p:sldId id="275" r:id="rId21"/>
+    <p:sldId id="276" r:id="rId2"/>
+    <p:sldId id="256" r:id="rId3"/>
+    <p:sldId id="257" r:id="rId4"/>
+    <p:sldId id="258" r:id="rId5"/>
+    <p:sldId id="259" r:id="rId6"/>
+    <p:sldId id="260" r:id="rId7"/>
+    <p:sldId id="261" r:id="rId8"/>
+    <p:sldId id="262" r:id="rId9"/>
+    <p:sldId id="263" r:id="rId10"/>
+    <p:sldId id="264" r:id="rId11"/>
+    <p:sldId id="265" r:id="rId12"/>
+    <p:sldId id="266" r:id="rId13"/>
+    <p:sldId id="267" r:id="rId14"/>
+    <p:sldId id="268" r:id="rId15"/>
+    <p:sldId id="269" r:id="rId16"/>
+    <p:sldId id="270" r:id="rId17"/>
+    <p:sldId id="271" r:id="rId18"/>
+    <p:sldId id="272" r:id="rId19"/>
+    <p:sldId id="273" r:id="rId20"/>
+    <p:sldId id="274" r:id="rId21"/>
+    <p:sldId id="275" r:id="rId22"/>
+    <p:sldId id="277" r:id="rId23"/>
   </p:sldIdLst>
   <p:sldSz cx="12192000" cy="6858000"/>
   <p:notesSz cx="6858000" cy="9144000"/>
@@ -216,7 +218,7 @@
           <a:p>
             <a:fld id="{DC41D016-C71B-44C3-95FF-C5D58AA38054}" type="datetimeFigureOut">
               <a:rPr lang="ko-KR" altLang="en-US" smtClean="0"/>
-              <a:t>2026-06-11</a:t>
+              <a:t>2026-06-14</a:t>
             </a:fld>
             <a:endParaRPr lang="ko-KR" altLang="en-US"/>
           </a:p>
@@ -630,7 +632,7 @@
           <a:p>
             <a:fld id="{2EF37305-7ADE-4461-BC01-91BFD56C250D}" type="datetimeFigureOut">
               <a:rPr lang="ko-KR" altLang="en-US" smtClean="0"/>
-              <a:t>2026-06-11</a:t>
+              <a:t>2026-06-14</a:t>
             </a:fld>
             <a:endParaRPr lang="ko-KR" altLang="en-US"/>
           </a:p>
@@ -828,7 +830,7 @@
           <a:p>
             <a:fld id="{2EF37305-7ADE-4461-BC01-91BFD56C250D}" type="datetimeFigureOut">
               <a:rPr lang="ko-KR" altLang="en-US" smtClean="0"/>
-              <a:t>2026-06-11</a:t>
+              <a:t>2026-06-14</a:t>
             </a:fld>
             <a:endParaRPr lang="ko-KR" altLang="en-US"/>
           </a:p>
@@ -1036,7 +1038,7 @@
           <a:p>
             <a:fld id="{2EF37305-7ADE-4461-BC01-91BFD56C250D}" type="datetimeFigureOut">
               <a:rPr lang="ko-KR" altLang="en-US" smtClean="0"/>
-              <a:t>2026-06-11</a:t>
+              <a:t>2026-06-14</a:t>
             </a:fld>
             <a:endParaRPr lang="ko-KR" altLang="en-US"/>
           </a:p>
@@ -1234,7 +1236,7 @@
           <a:p>
             <a:fld id="{2EF37305-7ADE-4461-BC01-91BFD56C250D}" type="datetimeFigureOut">
               <a:rPr lang="ko-KR" altLang="en-US" smtClean="0"/>
-              <a:t>2026-06-11</a:t>
+              <a:t>2026-06-14</a:t>
             </a:fld>
             <a:endParaRPr lang="ko-KR" altLang="en-US"/>
           </a:p>
@@ -1509,7 +1511,7 @@
           <a:p>
             <a:fld id="{2EF37305-7ADE-4461-BC01-91BFD56C250D}" type="datetimeFigureOut">
               <a:rPr lang="ko-KR" altLang="en-US" smtClean="0"/>
-              <a:t>2026-06-11</a:t>
+              <a:t>2026-06-14</a:t>
             </a:fld>
             <a:endParaRPr lang="ko-KR" altLang="en-US"/>
           </a:p>
@@ -1774,7 +1776,7 @@
           <a:p>
             <a:fld id="{2EF37305-7ADE-4461-BC01-91BFD56C250D}" type="datetimeFigureOut">
               <a:rPr lang="ko-KR" altLang="en-US" smtClean="0"/>
-              <a:t>2026-06-11</a:t>
+              <a:t>2026-06-14</a:t>
             </a:fld>
             <a:endParaRPr lang="ko-KR" altLang="en-US"/>
           </a:p>
@@ -2186,7 +2188,7 @@
           <a:p>
             <a:fld id="{2EF37305-7ADE-4461-BC01-91BFD56C250D}" type="datetimeFigureOut">
               <a:rPr lang="ko-KR" altLang="en-US" smtClean="0"/>
-              <a:t>2026-06-11</a:t>
+              <a:t>2026-06-14</a:t>
             </a:fld>
             <a:endParaRPr lang="ko-KR" altLang="en-US"/>
           </a:p>
@@ -2327,7 +2329,7 @@
           <a:p>
             <a:fld id="{2EF37305-7ADE-4461-BC01-91BFD56C250D}" type="datetimeFigureOut">
               <a:rPr lang="ko-KR" altLang="en-US" smtClean="0"/>
-              <a:t>2026-06-11</a:t>
+              <a:t>2026-06-14</a:t>
             </a:fld>
             <a:endParaRPr lang="ko-KR" altLang="en-US"/>
           </a:p>
@@ -2440,7 +2442,7 @@
           <a:p>
             <a:fld id="{2EF37305-7ADE-4461-BC01-91BFD56C250D}" type="datetimeFigureOut">
               <a:rPr lang="ko-KR" altLang="en-US" smtClean="0"/>
-              <a:t>2026-06-11</a:t>
+              <a:t>2026-06-14</a:t>
             </a:fld>
             <a:endParaRPr lang="ko-KR" altLang="en-US"/>
           </a:p>
@@ -2751,7 +2753,7 @@
           <a:p>
             <a:fld id="{2EF37305-7ADE-4461-BC01-91BFD56C250D}" type="datetimeFigureOut">
               <a:rPr lang="ko-KR" altLang="en-US" smtClean="0"/>
-              <a:t>2026-06-11</a:t>
+              <a:t>2026-06-14</a:t>
             </a:fld>
             <a:endParaRPr lang="ko-KR" altLang="en-US"/>
           </a:p>
@@ -3039,7 +3041,7 @@
           <a:p>
             <a:fld id="{2EF37305-7ADE-4461-BC01-91BFD56C250D}" type="datetimeFigureOut">
               <a:rPr lang="ko-KR" altLang="en-US" smtClean="0"/>
-              <a:t>2026-06-11</a:t>
+              <a:t>2026-06-14</a:t>
             </a:fld>
             <a:endParaRPr lang="ko-KR" altLang="en-US"/>
           </a:p>
@@ -3280,7 +3282,7 @@
           <a:p>
             <a:fld id="{2EF37305-7ADE-4461-BC01-91BFD56C250D}" type="datetimeFigureOut">
               <a:rPr lang="ko-KR" altLang="en-US" smtClean="0"/>
-              <a:t>2026-06-11</a:t>
+              <a:t>2026-06-14</a:t>
             </a:fld>
             <a:endParaRPr lang="ko-KR" altLang="en-US"/>
           </a:p>
@@ -3697,12 +3699,47 @@
           <a:chExt cx="0" cy="0"/>
         </a:xfrm>
       </p:grpSpPr>
+      <p:pic>
+        <p:nvPicPr>
+          <p:cNvPr id="5" name="내용 개체 틀 4">
+            <a:extLst>
+              <a:ext uri="{FF2B5EF4-FFF2-40B4-BE49-F238E27FC236}">
+                <a16:creationId xmlns:a16="http://schemas.microsoft.com/office/drawing/2014/main" id="{37F4DA6A-ED82-2C6D-F0EE-2BC166CF57FC}"/>
+              </a:ext>
+            </a:extLst>
+          </p:cNvPr>
+          <p:cNvPicPr>
+            <a:picLocks noGrp="1" noChangeAspect="1"/>
+          </p:cNvPicPr>
+          <p:nvPr>
+            <p:ph idx="1"/>
+          </p:nvPr>
+        </p:nvPicPr>
+        <p:blipFill>
+          <a:blip r:embed="rId2">
+            <a:extLst>
+              <a:ext uri="{28A0092B-C50C-407E-A947-70E740481C1C}">
+                <a14:useLocalDpi xmlns:a14="http://schemas.microsoft.com/office/drawing/2010/main" val="0"/>
+              </a:ext>
+            </a:extLst>
+          </a:blip>
+          <a:stretch>
+            <a:fillRect/>
+          </a:stretch>
+        </p:blipFill>
+        <p:spPr>
+          <a:xfrm>
+            <a:off x="297019" y="204946"/>
+            <a:ext cx="1689187" cy="596931"/>
+          </a:xfrm>
+        </p:spPr>
+      </p:pic>
       <p:sp>
         <p:nvSpPr>
-          <p:cNvPr id="4" name="TextBox 3">
+          <p:cNvPr id="6" name="TextBox 5">
             <a:extLst>
               <a:ext uri="{FF2B5EF4-FFF2-40B4-BE49-F238E27FC236}">
-                <a16:creationId xmlns:a16="http://schemas.microsoft.com/office/drawing/2014/main" id="{4C80C73C-400D-EE16-834E-78720F65B16A}"/>
+                <a16:creationId xmlns:a16="http://schemas.microsoft.com/office/drawing/2014/main" id="{AC2ADB9C-8A0C-A4EF-9C8E-7B5F34A6503A}"/>
               </a:ext>
             </a:extLst>
           </p:cNvPr>
@@ -3711,7 +3748,120 @@
         </p:nvSpPr>
         <p:spPr>
           <a:xfrm>
-            <a:off x="1524000" y="796413"/>
+            <a:off x="1174864" y="2876203"/>
+            <a:ext cx="9094124" cy="923330"/>
+          </a:xfrm>
+          <a:prstGeom prst="rect">
+            <a:avLst/>
+          </a:prstGeom>
+          <a:noFill/>
+        </p:spPr>
+        <p:txBody>
+          <a:bodyPr wrap="square" rtlCol="0">
+            <a:spAutoFit/>
+          </a:bodyPr>
+          <a:lstStyle/>
+          <a:p>
+            <a:pPr algn="ctr"/>
+            <a:r>
+              <a:rPr lang="ko-KR" altLang="en-US" sz="5400" dirty="0"/>
+              <a:t>반도체장비분석프로그래밍</a:t>
+            </a:r>
+          </a:p>
+        </p:txBody>
+      </p:sp>
+      <p:sp>
+        <p:nvSpPr>
+          <p:cNvPr id="8" name="TextBox 7">
+            <a:extLst>
+              <a:ext uri="{FF2B5EF4-FFF2-40B4-BE49-F238E27FC236}">
+                <a16:creationId xmlns:a16="http://schemas.microsoft.com/office/drawing/2014/main" id="{77C9045A-6E5E-C1BC-04D9-5A858D33DBEE}"/>
+              </a:ext>
+            </a:extLst>
+          </p:cNvPr>
+          <p:cNvSpPr txBox="1"/>
+          <p:nvPr/>
+        </p:nvSpPr>
+        <p:spPr>
+          <a:xfrm>
+            <a:off x="2194561" y="4089862"/>
+            <a:ext cx="7381702" cy="369332"/>
+          </a:xfrm>
+          <a:prstGeom prst="rect">
+            <a:avLst/>
+          </a:prstGeom>
+          <a:noFill/>
+        </p:spPr>
+        <p:txBody>
+          <a:bodyPr wrap="square" rtlCol="0">
+            <a:spAutoFit/>
+          </a:bodyPr>
+          <a:lstStyle/>
+          <a:p>
+            <a:pPr algn="ctr"/>
+            <a:r>
+              <a:rPr lang="ko-KR" altLang="en-US" dirty="0"/>
+              <a:t>하이테크 반도체장비소프트웨어 학과 </a:t>
+            </a:r>
+            <a:r>
+              <a:rPr lang="ko-KR" altLang="en-US" dirty="0" err="1"/>
+              <a:t>조태섭</a:t>
+            </a:r>
+            <a:endParaRPr lang="ko-KR" altLang="en-US" dirty="0"/>
+          </a:p>
+        </p:txBody>
+      </p:sp>
+    </p:spTree>
+    <p:extLst>
+      <p:ext uri="{BB962C8B-B14F-4D97-AF65-F5344CB8AC3E}">
+        <p14:creationId xmlns:p14="http://schemas.microsoft.com/office/powerpoint/2010/main" val="319490279"/>
+      </p:ext>
+    </p:extLst>
+  </p:cSld>
+  <p:clrMapOvr>
+    <a:masterClrMapping/>
+  </p:clrMapOvr>
+</p:sld>
+</file>
+
+<file path=ppt/slides/slide10.xml><?xml version="1.0" encoding="utf-8"?>
+<p:sld xmlns:a="http://schemas.openxmlformats.org/drawingml/2006/main" xmlns:r="http://schemas.openxmlformats.org/officeDocument/2006/relationships" xmlns:p="http://schemas.openxmlformats.org/presentationml/2006/main">
+  <p:cSld>
+    <p:spTree>
+      <p:nvGrpSpPr>
+        <p:cNvPr id="1" name="">
+          <a:extLst>
+            <a:ext uri="{FF2B5EF4-FFF2-40B4-BE49-F238E27FC236}">
+              <a16:creationId xmlns:a16="http://schemas.microsoft.com/office/drawing/2014/main" id="{2A7CF1ED-66FF-6CA2-72BD-465B398409A9}"/>
+            </a:ext>
+          </a:extLst>
+        </p:cNvPr>
+        <p:cNvGrpSpPr/>
+        <p:nvPr/>
+      </p:nvGrpSpPr>
+      <p:grpSpPr>
+        <a:xfrm>
+          <a:off x="0" y="0"/>
+          <a:ext cx="0" cy="0"/>
+          <a:chOff x="0" y="0"/>
+          <a:chExt cx="0" cy="0"/>
+        </a:xfrm>
+      </p:grpSpPr>
+      <p:sp>
+        <p:nvSpPr>
+          <p:cNvPr id="4" name="TextBox 3">
+            <a:extLst>
+              <a:ext uri="{FF2B5EF4-FFF2-40B4-BE49-F238E27FC236}">
+                <a16:creationId xmlns:a16="http://schemas.microsoft.com/office/drawing/2014/main" id="{4983514F-B59D-5BF0-B369-7963DADF9F48}"/>
+              </a:ext>
+            </a:extLst>
+          </p:cNvPr>
+          <p:cNvSpPr txBox="1"/>
+          <p:nvPr/>
+        </p:nvSpPr>
+        <p:spPr>
+          <a:xfrm>
+            <a:off x="1499061" y="796413"/>
             <a:ext cx="9478297" cy="246221"/>
           </a:xfrm>
           <a:prstGeom prst="rect">
@@ -3731,10 +3881,10 @@
       </p:sp>
       <p:sp>
         <p:nvSpPr>
-          <p:cNvPr id="6" name="TextBox 5">
+          <p:cNvPr id="3" name="TextBox 2">
             <a:extLst>
               <a:ext uri="{FF2B5EF4-FFF2-40B4-BE49-F238E27FC236}">
-                <a16:creationId xmlns:a16="http://schemas.microsoft.com/office/drawing/2014/main" id="{DB3F5348-EB3A-F591-D50E-A0E9BDD0E50E}"/>
+                <a16:creationId xmlns:a16="http://schemas.microsoft.com/office/drawing/2014/main" id="{8293579E-9E90-1226-D546-C95C78935586}"/>
               </a:ext>
             </a:extLst>
           </p:cNvPr>
@@ -3743,8 +3893,8 @@
         </p:nvSpPr>
         <p:spPr>
           <a:xfrm>
-            <a:off x="619432" y="353961"/>
-            <a:ext cx="10933471" cy="5970865"/>
+            <a:off x="1209368" y="1762219"/>
+            <a:ext cx="10284542" cy="3338478"/>
           </a:xfrm>
           <a:prstGeom prst="rect">
             <a:avLst/>
@@ -3752,674 +3902,974 @@
           <a:noFill/>
         </p:spPr>
         <p:txBody>
-          <a:bodyPr wrap="square" rtlCol="0">
+          <a:bodyPr wrap="square">
             <a:spAutoFit/>
           </a:bodyPr>
           <a:lstStyle/>
           <a:p>
-            <a:r>
-              <a:rPr lang="ko-KR" altLang="ko-KR" sz="1200" dirty="0" err="1"/>
-              <a:t>import</a:t>
-            </a:r>
-            <a:r>
-              <a:rPr lang="ko-KR" altLang="ko-KR" sz="1200" dirty="0"/>
-              <a:t> </a:t>
-            </a:r>
-            <a:r>
-              <a:rPr lang="ko-KR" altLang="ko-KR" sz="1200" dirty="0" err="1"/>
-              <a:t>pandas</a:t>
-            </a:r>
-            <a:r>
-              <a:rPr lang="ko-KR" altLang="ko-KR" sz="1200" dirty="0"/>
-              <a:t> </a:t>
-            </a:r>
-            <a:r>
-              <a:rPr lang="ko-KR" altLang="ko-KR" sz="1200" dirty="0" err="1"/>
-              <a:t>as</a:t>
-            </a:r>
-            <a:r>
-              <a:rPr lang="ko-KR" altLang="ko-KR" sz="1200" dirty="0"/>
-              <a:t> </a:t>
-            </a:r>
-            <a:r>
-              <a:rPr lang="ko-KR" altLang="ko-KR" sz="1200" dirty="0" err="1"/>
-              <a:t>pd</a:t>
-            </a:r>
-            <a:endParaRPr lang="ko-KR" altLang="ko-KR" sz="1200" dirty="0"/>
-          </a:p>
-          <a:p>
-            <a:r>
-              <a:rPr lang="ko-KR" altLang="ko-KR" sz="1200" dirty="0" err="1"/>
-              <a:t>import</a:t>
-            </a:r>
-            <a:r>
-              <a:rPr lang="ko-KR" altLang="ko-KR" sz="1200" dirty="0"/>
-              <a:t> </a:t>
-            </a:r>
-            <a:r>
-              <a:rPr lang="ko-KR" altLang="ko-KR" sz="1200" dirty="0" err="1"/>
-              <a:t>numpy</a:t>
-            </a:r>
-            <a:r>
-              <a:rPr lang="ko-KR" altLang="ko-KR" sz="1200" dirty="0"/>
-              <a:t> </a:t>
-            </a:r>
-            <a:r>
-              <a:rPr lang="ko-KR" altLang="ko-KR" sz="1200" dirty="0" err="1"/>
-              <a:t>as</a:t>
-            </a:r>
-            <a:r>
-              <a:rPr lang="ko-KR" altLang="ko-KR" sz="1200" dirty="0"/>
-              <a:t> </a:t>
-            </a:r>
-            <a:r>
-              <a:rPr lang="ko-KR" altLang="ko-KR" sz="1200" dirty="0" err="1"/>
-              <a:t>np</a:t>
-            </a:r>
-            <a:endParaRPr lang="ko-KR" altLang="ko-KR" sz="1200" dirty="0"/>
-          </a:p>
-          <a:p>
+            <a:pPr>
+              <a:lnSpc>
+                <a:spcPts val="1425"/>
+              </a:lnSpc>
+              <a:buNone/>
+            </a:pPr>
+            <a:r>
+              <a:rPr lang="ko-KR" altLang="ko-KR" b="0" dirty="0">
+                <a:solidFill>
+                  <a:srgbClr val="008000"/>
+                </a:solidFill>
+                <a:effectLst/>
+                <a:latin typeface="Consolas" panose="020B0609020204030204" pitchFamily="49" charset="0"/>
+              </a:rPr>
+              <a:t># 평균값으로 채우기</a:t>
+            </a:r>
+            <a:endParaRPr lang="ko-KR" altLang="ko-KR" b="0" dirty="0">
+              <a:solidFill>
+                <a:srgbClr val="000000"/>
+              </a:solidFill>
+              <a:effectLst/>
+              <a:latin typeface="Consolas" panose="020B0609020204030204" pitchFamily="49" charset="0"/>
+            </a:endParaRPr>
+          </a:p>
+          <a:p>
+            <a:pPr>
+              <a:lnSpc>
+                <a:spcPts val="1425"/>
+              </a:lnSpc>
+              <a:buNone/>
+            </a:pPr>
+            <a:r>
+              <a:rPr lang="ko-KR" altLang="ko-KR" b="0" dirty="0" err="1">
+                <a:solidFill>
+                  <a:srgbClr val="000000"/>
+                </a:solidFill>
+                <a:effectLst/>
+                <a:latin typeface="Consolas" panose="020B0609020204030204" pitchFamily="49" charset="0"/>
+              </a:rPr>
+              <a:t>df_mean</a:t>
+            </a:r>
+            <a:r>
+              <a:rPr lang="ko-KR" altLang="ko-KR" b="0" dirty="0">
+                <a:solidFill>
+                  <a:srgbClr val="000000"/>
+                </a:solidFill>
+                <a:effectLst/>
+                <a:latin typeface="Consolas" panose="020B0609020204030204" pitchFamily="49" charset="0"/>
+              </a:rPr>
+              <a:t> = </a:t>
+            </a:r>
+            <a:r>
+              <a:rPr lang="ko-KR" altLang="ko-KR" b="0" dirty="0" err="1">
+                <a:solidFill>
+                  <a:srgbClr val="000000"/>
+                </a:solidFill>
+                <a:effectLst/>
+                <a:latin typeface="Consolas" panose="020B0609020204030204" pitchFamily="49" charset="0"/>
+              </a:rPr>
+              <a:t>df.copy</a:t>
+            </a:r>
+            <a:r>
+              <a:rPr lang="ko-KR" altLang="ko-KR" b="0" dirty="0">
+                <a:solidFill>
+                  <a:srgbClr val="000000"/>
+                </a:solidFill>
+                <a:effectLst/>
+                <a:latin typeface="Consolas" panose="020B0609020204030204" pitchFamily="49" charset="0"/>
+              </a:rPr>
+              <a:t>()</a:t>
+            </a:r>
+          </a:p>
+          <a:p>
+            <a:pPr>
+              <a:lnSpc>
+                <a:spcPts val="1425"/>
+              </a:lnSpc>
+              <a:buNone/>
+            </a:pPr>
+            <a:r>
+              <a:rPr lang="ko-KR" altLang="ko-KR" b="0" dirty="0" err="1">
+                <a:solidFill>
+                  <a:srgbClr val="000000"/>
+                </a:solidFill>
+                <a:effectLst/>
+                <a:latin typeface="Consolas" panose="020B0609020204030204" pitchFamily="49" charset="0"/>
+              </a:rPr>
+              <a:t>df_mean</a:t>
+            </a:r>
+            <a:r>
+              <a:rPr lang="ko-KR" altLang="ko-KR" b="0" dirty="0">
+                <a:solidFill>
+                  <a:srgbClr val="000000"/>
+                </a:solidFill>
+                <a:effectLst/>
+                <a:latin typeface="Consolas" panose="020B0609020204030204" pitchFamily="49" charset="0"/>
+              </a:rPr>
+              <a:t>[</a:t>
+            </a:r>
+            <a:r>
+              <a:rPr lang="ko-KR" altLang="ko-KR" b="0" dirty="0">
+                <a:solidFill>
+                  <a:srgbClr val="A31515"/>
+                </a:solidFill>
+                <a:effectLst/>
+                <a:latin typeface="Consolas" panose="020B0609020204030204" pitchFamily="49" charset="0"/>
+              </a:rPr>
+              <a:t>'</a:t>
+            </a:r>
+            <a:r>
+              <a:rPr lang="ko-KR" altLang="ko-KR" b="0" dirty="0" err="1">
+                <a:solidFill>
+                  <a:srgbClr val="A31515"/>
+                </a:solidFill>
+                <a:effectLst/>
+                <a:latin typeface="Consolas" panose="020B0609020204030204" pitchFamily="49" charset="0"/>
+              </a:rPr>
+              <a:t>humidity_percent</a:t>
+            </a:r>
+            <a:r>
+              <a:rPr lang="ko-KR" altLang="ko-KR" b="0" dirty="0">
+                <a:solidFill>
+                  <a:srgbClr val="A31515"/>
+                </a:solidFill>
+                <a:effectLst/>
+                <a:latin typeface="Consolas" panose="020B0609020204030204" pitchFamily="49" charset="0"/>
+              </a:rPr>
+              <a:t>'</a:t>
+            </a:r>
+            <a:r>
+              <a:rPr lang="ko-KR" altLang="ko-KR" b="0" dirty="0">
+                <a:solidFill>
+                  <a:srgbClr val="000000"/>
+                </a:solidFill>
+                <a:effectLst/>
+                <a:latin typeface="Consolas" panose="020B0609020204030204" pitchFamily="49" charset="0"/>
+              </a:rPr>
+              <a:t>] = </a:t>
+            </a:r>
+            <a:r>
+              <a:rPr lang="ko-KR" altLang="ko-KR" b="0" dirty="0" err="1">
+                <a:solidFill>
+                  <a:srgbClr val="000000"/>
+                </a:solidFill>
+                <a:effectLst/>
+                <a:latin typeface="Consolas" panose="020B0609020204030204" pitchFamily="49" charset="0"/>
+              </a:rPr>
+              <a:t>df_mean</a:t>
+            </a:r>
+            <a:r>
+              <a:rPr lang="ko-KR" altLang="ko-KR" b="0" dirty="0">
+                <a:solidFill>
+                  <a:srgbClr val="000000"/>
+                </a:solidFill>
+                <a:effectLst/>
+                <a:latin typeface="Consolas" panose="020B0609020204030204" pitchFamily="49" charset="0"/>
+              </a:rPr>
+              <a:t>[</a:t>
+            </a:r>
+            <a:r>
+              <a:rPr lang="ko-KR" altLang="ko-KR" b="0" dirty="0">
+                <a:solidFill>
+                  <a:srgbClr val="A31515"/>
+                </a:solidFill>
+                <a:effectLst/>
+                <a:latin typeface="Consolas" panose="020B0609020204030204" pitchFamily="49" charset="0"/>
+              </a:rPr>
+              <a:t>'</a:t>
+            </a:r>
+            <a:r>
+              <a:rPr lang="ko-KR" altLang="ko-KR" b="0" dirty="0" err="1">
+                <a:solidFill>
+                  <a:srgbClr val="A31515"/>
+                </a:solidFill>
+                <a:effectLst/>
+                <a:latin typeface="Consolas" panose="020B0609020204030204" pitchFamily="49" charset="0"/>
+              </a:rPr>
+              <a:t>humidity_percent</a:t>
+            </a:r>
+            <a:r>
+              <a:rPr lang="ko-KR" altLang="ko-KR" b="0" dirty="0">
+                <a:solidFill>
+                  <a:srgbClr val="A31515"/>
+                </a:solidFill>
+                <a:effectLst/>
+                <a:latin typeface="Consolas" panose="020B0609020204030204" pitchFamily="49" charset="0"/>
+              </a:rPr>
+              <a:t>'</a:t>
+            </a:r>
+            <a:r>
+              <a:rPr lang="ko-KR" altLang="ko-KR" b="0" dirty="0">
+                <a:solidFill>
+                  <a:srgbClr val="000000"/>
+                </a:solidFill>
+                <a:effectLst/>
+                <a:latin typeface="Consolas" panose="020B0609020204030204" pitchFamily="49" charset="0"/>
+              </a:rPr>
+              <a:t>].</a:t>
+            </a:r>
+            <a:r>
+              <a:rPr lang="ko-KR" altLang="ko-KR" b="0" dirty="0" err="1">
+                <a:solidFill>
+                  <a:srgbClr val="000000"/>
+                </a:solidFill>
+                <a:effectLst/>
+                <a:latin typeface="Consolas" panose="020B0609020204030204" pitchFamily="49" charset="0"/>
+              </a:rPr>
+              <a:t>fillna</a:t>
+            </a:r>
+            <a:r>
+              <a:rPr lang="ko-KR" altLang="ko-KR" b="0" dirty="0">
+                <a:solidFill>
+                  <a:srgbClr val="000000"/>
+                </a:solidFill>
+                <a:effectLst/>
+                <a:latin typeface="Consolas" panose="020B0609020204030204" pitchFamily="49" charset="0"/>
+              </a:rPr>
+              <a:t>(</a:t>
+            </a:r>
+            <a:r>
+              <a:rPr lang="ko-KR" altLang="ko-KR" b="0" dirty="0" err="1">
+                <a:solidFill>
+                  <a:srgbClr val="000000"/>
+                </a:solidFill>
+                <a:effectLst/>
+                <a:latin typeface="Consolas" panose="020B0609020204030204" pitchFamily="49" charset="0"/>
+              </a:rPr>
+              <a:t>df_mean</a:t>
+            </a:r>
+            <a:r>
+              <a:rPr lang="ko-KR" altLang="ko-KR" b="0" dirty="0">
+                <a:solidFill>
+                  <a:srgbClr val="000000"/>
+                </a:solidFill>
+                <a:effectLst/>
+                <a:latin typeface="Consolas" panose="020B0609020204030204" pitchFamily="49" charset="0"/>
+              </a:rPr>
+              <a:t>[</a:t>
+            </a:r>
+            <a:r>
+              <a:rPr lang="ko-KR" altLang="ko-KR" b="0" dirty="0">
+                <a:solidFill>
+                  <a:srgbClr val="A31515"/>
+                </a:solidFill>
+                <a:effectLst/>
+                <a:latin typeface="Consolas" panose="020B0609020204030204" pitchFamily="49" charset="0"/>
+              </a:rPr>
+              <a:t>'</a:t>
+            </a:r>
+            <a:r>
+              <a:rPr lang="ko-KR" altLang="ko-KR" b="0" dirty="0" err="1">
+                <a:solidFill>
+                  <a:srgbClr val="A31515"/>
+                </a:solidFill>
+                <a:effectLst/>
+                <a:latin typeface="Consolas" panose="020B0609020204030204" pitchFamily="49" charset="0"/>
+              </a:rPr>
+              <a:t>humidity_percent</a:t>
+            </a:r>
+            <a:r>
+              <a:rPr lang="ko-KR" altLang="ko-KR" b="0" dirty="0">
+                <a:solidFill>
+                  <a:srgbClr val="A31515"/>
+                </a:solidFill>
+                <a:effectLst/>
+                <a:latin typeface="Consolas" panose="020B0609020204030204" pitchFamily="49" charset="0"/>
+              </a:rPr>
+              <a:t>'</a:t>
+            </a:r>
+            <a:r>
+              <a:rPr lang="ko-KR" altLang="ko-KR" b="0" dirty="0">
+                <a:solidFill>
+                  <a:srgbClr val="000000"/>
+                </a:solidFill>
+                <a:effectLst/>
+                <a:latin typeface="Consolas" panose="020B0609020204030204" pitchFamily="49" charset="0"/>
+              </a:rPr>
+              <a:t>].</a:t>
+            </a:r>
+            <a:r>
+              <a:rPr lang="ko-KR" altLang="ko-KR" b="0" dirty="0" err="1">
+                <a:solidFill>
+                  <a:srgbClr val="000000"/>
+                </a:solidFill>
+                <a:effectLst/>
+                <a:latin typeface="Consolas" panose="020B0609020204030204" pitchFamily="49" charset="0"/>
+              </a:rPr>
+              <a:t>mean</a:t>
+            </a:r>
+            <a:r>
+              <a:rPr lang="ko-KR" altLang="ko-KR" b="0" dirty="0">
+                <a:solidFill>
+                  <a:srgbClr val="000000"/>
+                </a:solidFill>
+                <a:effectLst/>
+                <a:latin typeface="Consolas" panose="020B0609020204030204" pitchFamily="49" charset="0"/>
+              </a:rPr>
+              <a:t>())</a:t>
+            </a:r>
+            <a:endParaRPr lang="en-US" altLang="ko-KR" b="0" dirty="0">
+              <a:solidFill>
+                <a:srgbClr val="000000"/>
+              </a:solidFill>
+              <a:effectLst/>
+              <a:latin typeface="Consolas" panose="020B0609020204030204" pitchFamily="49" charset="0"/>
+            </a:endParaRPr>
+          </a:p>
+          <a:p>
+            <a:pPr>
+              <a:lnSpc>
+                <a:spcPts val="1425"/>
+              </a:lnSpc>
+              <a:buNone/>
+            </a:pPr>
+            <a:endParaRPr lang="en-US" altLang="ko-KR" dirty="0">
+              <a:solidFill>
+                <a:srgbClr val="000000"/>
+              </a:solidFill>
+              <a:latin typeface="Consolas" panose="020B0609020204030204" pitchFamily="49" charset="0"/>
+            </a:endParaRPr>
+          </a:p>
+          <a:p>
+            <a:pPr>
+              <a:lnSpc>
+                <a:spcPts val="1425"/>
+              </a:lnSpc>
+              <a:buNone/>
+            </a:pPr>
+            <a:endParaRPr lang="en-US" altLang="ko-KR" b="0" dirty="0">
+              <a:solidFill>
+                <a:srgbClr val="000000"/>
+              </a:solidFill>
+              <a:effectLst/>
+              <a:latin typeface="Consolas" panose="020B0609020204030204" pitchFamily="49" charset="0"/>
+            </a:endParaRPr>
+          </a:p>
+          <a:p>
+            <a:pPr>
+              <a:lnSpc>
+                <a:spcPts val="1425"/>
+              </a:lnSpc>
+              <a:buNone/>
+            </a:pPr>
+            <a:endParaRPr lang="ko-KR" altLang="ko-KR" b="0" dirty="0">
+              <a:solidFill>
+                <a:srgbClr val="000000"/>
+              </a:solidFill>
+              <a:effectLst/>
+              <a:latin typeface="Consolas" panose="020B0609020204030204" pitchFamily="49" charset="0"/>
+            </a:endParaRPr>
+          </a:p>
+          <a:p>
+            <a:pPr>
+              <a:lnSpc>
+                <a:spcPts val="1425"/>
+              </a:lnSpc>
+              <a:buNone/>
+            </a:pPr>
             <a:br>
-              <a:rPr lang="ko-KR" altLang="ko-KR" sz="1200" dirty="0"/>
+              <a:rPr lang="ko-KR" altLang="ko-KR" b="0" dirty="0">
+                <a:solidFill>
+                  <a:srgbClr val="000000"/>
+                </a:solidFill>
+                <a:effectLst/>
+                <a:latin typeface="Consolas" panose="020B0609020204030204" pitchFamily="49" charset="0"/>
+              </a:rPr>
             </a:br>
-            <a:endParaRPr lang="ko-KR" altLang="ko-KR" sz="1200" dirty="0"/>
-          </a:p>
-          <a:p>
-            <a:r>
-              <a:rPr lang="ko-KR" altLang="ko-KR" sz="1200" dirty="0" err="1"/>
-              <a:t>n</a:t>
-            </a:r>
-            <a:r>
-              <a:rPr lang="ko-KR" altLang="ko-KR" sz="1200" dirty="0"/>
-              <a:t> = 500 # 500줄</a:t>
-            </a:r>
-          </a:p>
-          <a:p>
-            <a:r>
-              <a:rPr lang="ko-KR" altLang="ko-KR" sz="1200" dirty="0" err="1"/>
-              <a:t>np.random.seed</a:t>
-            </a:r>
-            <a:r>
-              <a:rPr lang="ko-KR" altLang="ko-KR" sz="1200" dirty="0"/>
-              <a:t>(42) # 랜덤 시작 점 42상태에서 난수 생성</a:t>
-            </a:r>
-          </a:p>
-          <a:p>
+            <a:endParaRPr lang="ko-KR" altLang="ko-KR" b="0" dirty="0">
+              <a:solidFill>
+                <a:srgbClr val="000000"/>
+              </a:solidFill>
+              <a:effectLst/>
+              <a:latin typeface="Consolas" panose="020B0609020204030204" pitchFamily="49" charset="0"/>
+            </a:endParaRPr>
+          </a:p>
+          <a:p>
+            <a:pPr>
+              <a:lnSpc>
+                <a:spcPts val="1425"/>
+              </a:lnSpc>
+              <a:buNone/>
+            </a:pPr>
+            <a:r>
+              <a:rPr lang="ko-KR" altLang="ko-KR" b="0" dirty="0">
+                <a:solidFill>
+                  <a:srgbClr val="008000"/>
+                </a:solidFill>
+                <a:effectLst/>
+                <a:latin typeface="Consolas" panose="020B0609020204030204" pitchFamily="49" charset="0"/>
+              </a:rPr>
+              <a:t># 중앙값으로 채우기 </a:t>
+            </a:r>
+            <a:endParaRPr lang="ko-KR" altLang="ko-KR" b="0" dirty="0">
+              <a:solidFill>
+                <a:srgbClr val="000000"/>
+              </a:solidFill>
+              <a:effectLst/>
+              <a:latin typeface="Consolas" panose="020B0609020204030204" pitchFamily="49" charset="0"/>
+            </a:endParaRPr>
+          </a:p>
+          <a:p>
+            <a:pPr>
+              <a:lnSpc>
+                <a:spcPts val="1425"/>
+              </a:lnSpc>
+              <a:buNone/>
+            </a:pPr>
+            <a:r>
+              <a:rPr lang="ko-KR" altLang="ko-KR" b="0" dirty="0" err="1">
+                <a:solidFill>
+                  <a:srgbClr val="000000"/>
+                </a:solidFill>
+                <a:effectLst/>
+                <a:latin typeface="Consolas" panose="020B0609020204030204" pitchFamily="49" charset="0"/>
+              </a:rPr>
+              <a:t>df_median</a:t>
+            </a:r>
+            <a:r>
+              <a:rPr lang="ko-KR" altLang="ko-KR" b="0" dirty="0">
+                <a:solidFill>
+                  <a:srgbClr val="000000"/>
+                </a:solidFill>
+                <a:effectLst/>
+                <a:latin typeface="Consolas" panose="020B0609020204030204" pitchFamily="49" charset="0"/>
+              </a:rPr>
+              <a:t> = </a:t>
+            </a:r>
+            <a:r>
+              <a:rPr lang="ko-KR" altLang="ko-KR" b="0" dirty="0" err="1">
+                <a:solidFill>
+                  <a:srgbClr val="000000"/>
+                </a:solidFill>
+                <a:effectLst/>
+                <a:latin typeface="Consolas" panose="020B0609020204030204" pitchFamily="49" charset="0"/>
+              </a:rPr>
+              <a:t>df.copy</a:t>
+            </a:r>
+            <a:r>
+              <a:rPr lang="ko-KR" altLang="ko-KR" b="0" dirty="0">
+                <a:solidFill>
+                  <a:srgbClr val="000000"/>
+                </a:solidFill>
+                <a:effectLst/>
+                <a:latin typeface="Consolas" panose="020B0609020204030204" pitchFamily="49" charset="0"/>
+              </a:rPr>
+              <a:t>()</a:t>
+            </a:r>
+          </a:p>
+          <a:p>
+            <a:pPr>
+              <a:lnSpc>
+                <a:spcPts val="1425"/>
+              </a:lnSpc>
+              <a:buNone/>
+            </a:pPr>
+            <a:r>
+              <a:rPr lang="ko-KR" altLang="ko-KR" b="0" dirty="0" err="1">
+                <a:solidFill>
+                  <a:srgbClr val="000000"/>
+                </a:solidFill>
+                <a:effectLst/>
+                <a:latin typeface="Consolas" panose="020B0609020204030204" pitchFamily="49" charset="0"/>
+              </a:rPr>
+              <a:t>df_median</a:t>
+            </a:r>
+            <a:r>
+              <a:rPr lang="ko-KR" altLang="ko-KR" b="0" dirty="0">
+                <a:solidFill>
+                  <a:srgbClr val="000000"/>
+                </a:solidFill>
+                <a:effectLst/>
+                <a:latin typeface="Consolas" panose="020B0609020204030204" pitchFamily="49" charset="0"/>
+              </a:rPr>
+              <a:t>[</a:t>
+            </a:r>
+            <a:r>
+              <a:rPr lang="ko-KR" altLang="ko-KR" b="0" dirty="0">
+                <a:solidFill>
+                  <a:srgbClr val="A31515"/>
+                </a:solidFill>
+                <a:effectLst/>
+                <a:latin typeface="Consolas" panose="020B0609020204030204" pitchFamily="49" charset="0"/>
+              </a:rPr>
+              <a:t>'</a:t>
+            </a:r>
+            <a:r>
+              <a:rPr lang="ko-KR" altLang="ko-KR" b="0" dirty="0" err="1">
+                <a:solidFill>
+                  <a:srgbClr val="A31515"/>
+                </a:solidFill>
+                <a:effectLst/>
+                <a:latin typeface="Consolas" panose="020B0609020204030204" pitchFamily="49" charset="0"/>
+              </a:rPr>
+              <a:t>humidity_percent</a:t>
+            </a:r>
+            <a:r>
+              <a:rPr lang="ko-KR" altLang="ko-KR" b="0" dirty="0">
+                <a:solidFill>
+                  <a:srgbClr val="A31515"/>
+                </a:solidFill>
+                <a:effectLst/>
+                <a:latin typeface="Consolas" panose="020B0609020204030204" pitchFamily="49" charset="0"/>
+              </a:rPr>
+              <a:t>'</a:t>
+            </a:r>
+            <a:r>
+              <a:rPr lang="ko-KR" altLang="ko-KR" b="0" dirty="0">
+                <a:solidFill>
+                  <a:srgbClr val="000000"/>
+                </a:solidFill>
+                <a:effectLst/>
+                <a:latin typeface="Consolas" panose="020B0609020204030204" pitchFamily="49" charset="0"/>
+              </a:rPr>
+              <a:t>] = </a:t>
+            </a:r>
+            <a:r>
+              <a:rPr lang="ko-KR" altLang="ko-KR" b="0" dirty="0" err="1">
+                <a:solidFill>
+                  <a:srgbClr val="000000"/>
+                </a:solidFill>
+                <a:effectLst/>
+                <a:latin typeface="Consolas" panose="020B0609020204030204" pitchFamily="49" charset="0"/>
+              </a:rPr>
+              <a:t>df_median</a:t>
+            </a:r>
+            <a:r>
+              <a:rPr lang="ko-KR" altLang="ko-KR" b="0" dirty="0">
+                <a:solidFill>
+                  <a:srgbClr val="000000"/>
+                </a:solidFill>
+                <a:effectLst/>
+                <a:latin typeface="Consolas" panose="020B0609020204030204" pitchFamily="49" charset="0"/>
+              </a:rPr>
+              <a:t>[</a:t>
+            </a:r>
+            <a:r>
+              <a:rPr lang="ko-KR" altLang="ko-KR" b="0" dirty="0">
+                <a:solidFill>
+                  <a:srgbClr val="A31515"/>
+                </a:solidFill>
+                <a:effectLst/>
+                <a:latin typeface="Consolas" panose="020B0609020204030204" pitchFamily="49" charset="0"/>
+              </a:rPr>
+              <a:t>'</a:t>
+            </a:r>
+            <a:r>
+              <a:rPr lang="ko-KR" altLang="ko-KR" b="0" dirty="0" err="1">
+                <a:solidFill>
+                  <a:srgbClr val="A31515"/>
+                </a:solidFill>
+                <a:effectLst/>
+                <a:latin typeface="Consolas" panose="020B0609020204030204" pitchFamily="49" charset="0"/>
+              </a:rPr>
+              <a:t>humidity_percent</a:t>
+            </a:r>
+            <a:r>
+              <a:rPr lang="ko-KR" altLang="ko-KR" b="0" dirty="0">
+                <a:solidFill>
+                  <a:srgbClr val="A31515"/>
+                </a:solidFill>
+                <a:effectLst/>
+                <a:latin typeface="Consolas" panose="020B0609020204030204" pitchFamily="49" charset="0"/>
+              </a:rPr>
+              <a:t>'</a:t>
+            </a:r>
+            <a:r>
+              <a:rPr lang="ko-KR" altLang="ko-KR" b="0" dirty="0">
+                <a:solidFill>
+                  <a:srgbClr val="000000"/>
+                </a:solidFill>
+                <a:effectLst/>
+                <a:latin typeface="Consolas" panose="020B0609020204030204" pitchFamily="49" charset="0"/>
+              </a:rPr>
+              <a:t>].</a:t>
+            </a:r>
+            <a:r>
+              <a:rPr lang="ko-KR" altLang="ko-KR" b="0" dirty="0" err="1">
+                <a:solidFill>
+                  <a:srgbClr val="000000"/>
+                </a:solidFill>
+                <a:effectLst/>
+                <a:latin typeface="Consolas" panose="020B0609020204030204" pitchFamily="49" charset="0"/>
+              </a:rPr>
+              <a:t>fillna</a:t>
+            </a:r>
+            <a:r>
+              <a:rPr lang="ko-KR" altLang="ko-KR" b="0" dirty="0">
+                <a:solidFill>
+                  <a:srgbClr val="000000"/>
+                </a:solidFill>
+                <a:effectLst/>
+                <a:latin typeface="Consolas" panose="020B0609020204030204" pitchFamily="49" charset="0"/>
+              </a:rPr>
+              <a:t>(</a:t>
+            </a:r>
+            <a:r>
+              <a:rPr lang="ko-KR" altLang="ko-KR" b="0" dirty="0" err="1">
+                <a:solidFill>
+                  <a:srgbClr val="000000"/>
+                </a:solidFill>
+                <a:effectLst/>
+                <a:latin typeface="Consolas" panose="020B0609020204030204" pitchFamily="49" charset="0"/>
+              </a:rPr>
+              <a:t>df_median</a:t>
+            </a:r>
+            <a:r>
+              <a:rPr lang="ko-KR" altLang="ko-KR" b="0" dirty="0">
+                <a:solidFill>
+                  <a:srgbClr val="000000"/>
+                </a:solidFill>
+                <a:effectLst/>
+                <a:latin typeface="Consolas" panose="020B0609020204030204" pitchFamily="49" charset="0"/>
+              </a:rPr>
+              <a:t>[</a:t>
+            </a:r>
+            <a:r>
+              <a:rPr lang="ko-KR" altLang="ko-KR" b="0" dirty="0">
+                <a:solidFill>
+                  <a:srgbClr val="A31515"/>
+                </a:solidFill>
+                <a:effectLst/>
+                <a:latin typeface="Consolas" panose="020B0609020204030204" pitchFamily="49" charset="0"/>
+              </a:rPr>
+              <a:t>'</a:t>
+            </a:r>
+            <a:r>
+              <a:rPr lang="ko-KR" altLang="ko-KR" b="0" dirty="0" err="1">
+                <a:solidFill>
+                  <a:srgbClr val="A31515"/>
+                </a:solidFill>
+                <a:effectLst/>
+                <a:latin typeface="Consolas" panose="020B0609020204030204" pitchFamily="49" charset="0"/>
+              </a:rPr>
+              <a:t>humidity_percent</a:t>
+            </a:r>
+            <a:r>
+              <a:rPr lang="ko-KR" altLang="ko-KR" b="0" dirty="0">
+                <a:solidFill>
+                  <a:srgbClr val="A31515"/>
+                </a:solidFill>
+                <a:effectLst/>
+                <a:latin typeface="Consolas" panose="020B0609020204030204" pitchFamily="49" charset="0"/>
+              </a:rPr>
+              <a:t>'</a:t>
+            </a:r>
+            <a:r>
+              <a:rPr lang="ko-KR" altLang="ko-KR" b="0" dirty="0">
+                <a:solidFill>
+                  <a:srgbClr val="000000"/>
+                </a:solidFill>
+                <a:effectLst/>
+                <a:latin typeface="Consolas" panose="020B0609020204030204" pitchFamily="49" charset="0"/>
+              </a:rPr>
+              <a:t>].</a:t>
+            </a:r>
+            <a:r>
+              <a:rPr lang="ko-KR" altLang="ko-KR" b="0" dirty="0" err="1">
+                <a:solidFill>
+                  <a:srgbClr val="000000"/>
+                </a:solidFill>
+                <a:effectLst/>
+                <a:latin typeface="Consolas" panose="020B0609020204030204" pitchFamily="49" charset="0"/>
+              </a:rPr>
+              <a:t>median</a:t>
+            </a:r>
+            <a:r>
+              <a:rPr lang="ko-KR" altLang="ko-KR" b="0" dirty="0">
+                <a:solidFill>
+                  <a:srgbClr val="000000"/>
+                </a:solidFill>
+                <a:effectLst/>
+                <a:latin typeface="Consolas" panose="020B0609020204030204" pitchFamily="49" charset="0"/>
+              </a:rPr>
+              <a:t>())</a:t>
+            </a:r>
+          </a:p>
+          <a:p>
+            <a:pPr>
+              <a:lnSpc>
+                <a:spcPts val="1425"/>
+              </a:lnSpc>
+              <a:buNone/>
+            </a:pPr>
             <a:br>
-              <a:rPr lang="ko-KR" altLang="ko-KR" sz="1200" dirty="0"/>
+              <a:rPr lang="ko-KR" altLang="ko-KR" b="0" dirty="0">
+                <a:solidFill>
+                  <a:srgbClr val="000000"/>
+                </a:solidFill>
+                <a:effectLst/>
+                <a:latin typeface="Consolas" panose="020B0609020204030204" pitchFamily="49" charset="0"/>
+              </a:rPr>
             </a:br>
-            <a:endParaRPr lang="ko-KR" altLang="ko-KR" sz="1200" dirty="0"/>
-          </a:p>
-          <a:p>
-            <a:r>
-              <a:rPr lang="ko-KR" altLang="ko-KR" sz="1200" dirty="0" err="1"/>
-              <a:t>df</a:t>
-            </a:r>
-            <a:r>
-              <a:rPr lang="ko-KR" altLang="ko-KR" sz="1200" dirty="0"/>
+            <a:endParaRPr lang="ko-KR" altLang="ko-KR" b="0" dirty="0">
+              <a:solidFill>
+                <a:srgbClr val="000000"/>
+              </a:solidFill>
+              <a:effectLst/>
+              <a:latin typeface="Consolas" panose="020B0609020204030204" pitchFamily="49" charset="0"/>
+            </a:endParaRPr>
+          </a:p>
+          <a:p>
+            <a:pPr>
+              <a:lnSpc>
+                <a:spcPts val="1425"/>
+              </a:lnSpc>
+              <a:buNone/>
+            </a:pPr>
+            <a:r>
+              <a:rPr lang="ko-KR" altLang="ko-KR" b="0" dirty="0">
+                <a:solidFill>
+                  <a:srgbClr val="008000"/>
+                </a:solidFill>
+                <a:effectLst/>
+                <a:latin typeface="Consolas" panose="020B0609020204030204" pitchFamily="49" charset="0"/>
+              </a:rPr>
+              <a:t># 직전 값으로 채우기 </a:t>
+            </a:r>
+            <a:endParaRPr lang="ko-KR" altLang="ko-KR" b="0" dirty="0">
+              <a:solidFill>
+                <a:srgbClr val="000000"/>
+              </a:solidFill>
+              <a:effectLst/>
+              <a:latin typeface="Consolas" panose="020B0609020204030204" pitchFamily="49" charset="0"/>
+            </a:endParaRPr>
+          </a:p>
+          <a:p>
+            <a:pPr>
+              <a:lnSpc>
+                <a:spcPts val="1425"/>
+              </a:lnSpc>
+              <a:buNone/>
+            </a:pPr>
+            <a:r>
+              <a:rPr lang="ko-KR" altLang="ko-KR" b="0" dirty="0" err="1">
+                <a:solidFill>
+                  <a:srgbClr val="000000"/>
+                </a:solidFill>
+                <a:effectLst/>
+                <a:latin typeface="Consolas" panose="020B0609020204030204" pitchFamily="49" charset="0"/>
+              </a:rPr>
+              <a:t>df_ffill</a:t>
+            </a:r>
+            <a:r>
+              <a:rPr lang="ko-KR" altLang="ko-KR" b="0" dirty="0">
+                <a:solidFill>
+                  <a:srgbClr val="000000"/>
+                </a:solidFill>
+                <a:effectLst/>
+                <a:latin typeface="Consolas" panose="020B0609020204030204" pitchFamily="49" charset="0"/>
+              </a:rPr>
               <a:t> = </a:t>
             </a:r>
             <a:r>
-              <a:rPr lang="ko-KR" altLang="ko-KR" sz="1200" dirty="0" err="1"/>
-              <a:t>pd.DataFrame</a:t>
-            </a:r>
-            <a:r>
-              <a:rPr lang="ko-KR" altLang="ko-KR" sz="1200" dirty="0"/>
-              <a:t>({</a:t>
-            </a:r>
-          </a:p>
-          <a:p>
-            <a:br>
-              <a:rPr lang="ko-KR" altLang="ko-KR" sz="1200" dirty="0"/>
-            </a:br>
-            <a:endParaRPr lang="ko-KR" altLang="ko-KR" sz="1200" dirty="0"/>
-          </a:p>
-          <a:p>
-            <a:r>
-              <a:rPr lang="ko-KR" altLang="ko-KR" sz="1200" dirty="0"/>
-              <a:t>    # 시간: 1시간 간격의 데이터 생성</a:t>
-            </a:r>
-          </a:p>
-          <a:p>
-            <a:r>
-              <a:rPr lang="ko-KR" altLang="ko-KR" sz="1200" dirty="0"/>
-              <a:t>    '</a:t>
-            </a:r>
-            <a:r>
-              <a:rPr lang="ko-KR" altLang="ko-KR" sz="1200" dirty="0" err="1"/>
-              <a:t>time</a:t>
-            </a:r>
-            <a:r>
-              <a:rPr lang="ko-KR" altLang="ko-KR" sz="1200" dirty="0"/>
-              <a:t>': </a:t>
-            </a:r>
-            <a:r>
-              <a:rPr lang="ko-KR" altLang="ko-KR" sz="1200" dirty="0" err="1"/>
-              <a:t>pd.date_range</a:t>
-            </a:r>
-            <a:r>
-              <a:rPr lang="ko-KR" altLang="ko-KR" sz="1200" dirty="0"/>
-              <a:t>('2026-06-08', </a:t>
-            </a:r>
-            <a:r>
-              <a:rPr lang="ko-KR" altLang="ko-KR" sz="1200" dirty="0" err="1"/>
-              <a:t>periods</a:t>
-            </a:r>
-            <a:r>
-              <a:rPr lang="ko-KR" altLang="ko-KR" sz="1200" dirty="0"/>
-              <a:t>=</a:t>
-            </a:r>
-            <a:r>
-              <a:rPr lang="ko-KR" altLang="ko-KR" sz="1200" dirty="0" err="1"/>
-              <a:t>n</a:t>
-            </a:r>
-            <a:r>
-              <a:rPr lang="ko-KR" altLang="ko-KR" sz="1200" dirty="0"/>
-              <a:t>, </a:t>
-            </a:r>
-            <a:r>
-              <a:rPr lang="ko-KR" altLang="ko-KR" sz="1200" dirty="0" err="1"/>
-              <a:t>freq</a:t>
-            </a:r>
-            <a:r>
-              <a:rPr lang="ko-KR" altLang="ko-KR" sz="1200" dirty="0"/>
-              <a:t>='</a:t>
-            </a:r>
-            <a:r>
-              <a:rPr lang="ko-KR" altLang="ko-KR" sz="1200" dirty="0" err="1"/>
-              <a:t>h</a:t>
-            </a:r>
-            <a:r>
-              <a:rPr lang="ko-KR" altLang="ko-KR" sz="1200" dirty="0"/>
-              <a:t>'),</a:t>
-            </a:r>
-          </a:p>
-          <a:p>
-            <a:r>
-              <a:rPr lang="ko-KR" altLang="ko-KR" sz="1200" dirty="0"/>
-              <a:t>    </a:t>
-            </a:r>
-          </a:p>
-          <a:p>
-            <a:r>
-              <a:rPr lang="ko-KR" altLang="ko-KR" sz="1200" dirty="0"/>
-              <a:t>    # 온도(섭씨): 25도 전후 (초여름 날씨 가정)</a:t>
-            </a:r>
-          </a:p>
-          <a:p>
-            <a:r>
-              <a:rPr lang="ko-KR" altLang="ko-KR" sz="1200" dirty="0"/>
-              <a:t>    '</a:t>
-            </a:r>
-            <a:r>
-              <a:rPr lang="ko-KR" altLang="ko-KR" sz="1200" dirty="0" err="1"/>
-              <a:t>temperature_c</a:t>
-            </a:r>
-            <a:r>
-              <a:rPr lang="ko-KR" altLang="ko-KR" sz="1200" dirty="0"/>
-              <a:t>': </a:t>
-            </a:r>
-            <a:r>
-              <a:rPr lang="ko-KR" altLang="ko-KR" sz="1200" dirty="0" err="1"/>
-              <a:t>np.random.normal</a:t>
-            </a:r>
-            <a:r>
-              <a:rPr lang="ko-KR" altLang="ko-KR" sz="1200" dirty="0"/>
-              <a:t>(25, 3, </a:t>
-            </a:r>
-            <a:r>
-              <a:rPr lang="ko-KR" altLang="ko-KR" sz="1200" dirty="0" err="1"/>
-              <a:t>n</a:t>
-            </a:r>
-            <a:r>
-              <a:rPr lang="ko-KR" altLang="ko-KR" sz="1200" dirty="0"/>
-              <a:t>), </a:t>
-            </a:r>
-          </a:p>
-          <a:p>
-            <a:r>
-              <a:rPr lang="ko-KR" altLang="ko-KR" sz="1200" dirty="0"/>
-              <a:t>    </a:t>
-            </a:r>
-          </a:p>
-          <a:p>
-            <a:r>
-              <a:rPr lang="ko-KR" altLang="ko-KR" sz="1200" dirty="0"/>
-              <a:t>    # 습도(%): 60% 전후 (일반적인 습도)</a:t>
-            </a:r>
-          </a:p>
-          <a:p>
-            <a:r>
-              <a:rPr lang="ko-KR" altLang="ko-KR" sz="1200" dirty="0"/>
-              <a:t>    '</a:t>
-            </a:r>
-            <a:r>
-              <a:rPr lang="ko-KR" altLang="ko-KR" sz="1200" dirty="0" err="1"/>
+              <a:rPr lang="ko-KR" altLang="ko-KR" b="0" dirty="0" err="1">
+                <a:solidFill>
+                  <a:srgbClr val="000000"/>
+                </a:solidFill>
+                <a:effectLst/>
+                <a:latin typeface="Consolas" panose="020B0609020204030204" pitchFamily="49" charset="0"/>
+              </a:rPr>
+              <a:t>df.copy</a:t>
+            </a:r>
+            <a:r>
+              <a:rPr lang="ko-KR" altLang="ko-KR" b="0" dirty="0">
+                <a:solidFill>
+                  <a:srgbClr val="000000"/>
+                </a:solidFill>
+                <a:effectLst/>
+                <a:latin typeface="Consolas" panose="020B0609020204030204" pitchFamily="49" charset="0"/>
+              </a:rPr>
+              <a:t>()</a:t>
+            </a:r>
+          </a:p>
+          <a:p>
+            <a:pPr>
+              <a:lnSpc>
+                <a:spcPts val="1425"/>
+              </a:lnSpc>
+              <a:buNone/>
+            </a:pPr>
+            <a:r>
+              <a:rPr lang="ko-KR" altLang="ko-KR" b="0" dirty="0" err="1">
+                <a:solidFill>
+                  <a:srgbClr val="000000"/>
+                </a:solidFill>
+                <a:effectLst/>
+                <a:latin typeface="Consolas" panose="020B0609020204030204" pitchFamily="49" charset="0"/>
+              </a:rPr>
+              <a:t>df_ffill</a:t>
+            </a:r>
+            <a:r>
+              <a:rPr lang="ko-KR" altLang="ko-KR" b="0" dirty="0">
+                <a:solidFill>
+                  <a:srgbClr val="000000"/>
+                </a:solidFill>
+                <a:effectLst/>
+                <a:latin typeface="Consolas" panose="020B0609020204030204" pitchFamily="49" charset="0"/>
+              </a:rPr>
+              <a:t>[</a:t>
+            </a:r>
+            <a:r>
+              <a:rPr lang="ko-KR" altLang="ko-KR" b="0" dirty="0">
+                <a:solidFill>
+                  <a:srgbClr val="A31515"/>
+                </a:solidFill>
+                <a:effectLst/>
+                <a:latin typeface="Consolas" panose="020B0609020204030204" pitchFamily="49" charset="0"/>
+              </a:rPr>
+              <a:t>'</a:t>
+            </a:r>
+            <a:r>
+              <a:rPr lang="ko-KR" altLang="ko-KR" b="0" dirty="0" err="1">
+                <a:solidFill>
+                  <a:srgbClr val="A31515"/>
+                </a:solidFill>
+                <a:effectLst/>
+                <a:latin typeface="Consolas" panose="020B0609020204030204" pitchFamily="49" charset="0"/>
+              </a:rPr>
               <a:t>humidity_percent</a:t>
             </a:r>
             <a:r>
-              <a:rPr lang="ko-KR" altLang="ko-KR" sz="1200" dirty="0"/>
-              <a:t>': </a:t>
-            </a:r>
-            <a:r>
-              <a:rPr lang="ko-KR" altLang="ko-KR" sz="1200" dirty="0" err="1"/>
-              <a:t>np.random.normal</a:t>
-            </a:r>
-            <a:r>
-              <a:rPr lang="ko-KR" altLang="ko-KR" sz="1200" dirty="0"/>
-              <a:t>(60, 10, </a:t>
-            </a:r>
-            <a:r>
-              <a:rPr lang="ko-KR" altLang="ko-KR" sz="1200" dirty="0" err="1"/>
-              <a:t>n</a:t>
-            </a:r>
-            <a:r>
-              <a:rPr lang="ko-KR" altLang="ko-KR" sz="1200" dirty="0"/>
-              <a:t>), </a:t>
-            </a:r>
-          </a:p>
-          <a:p>
-            <a:r>
-              <a:rPr lang="ko-KR" altLang="ko-KR" sz="1200" dirty="0"/>
-              <a:t>    </a:t>
-            </a:r>
-          </a:p>
-          <a:p>
-            <a:r>
-              <a:rPr lang="ko-KR" altLang="ko-KR" sz="1200" dirty="0"/>
-              <a:t>    # 풍속(</a:t>
-            </a:r>
-            <a:r>
-              <a:rPr lang="ko-KR" altLang="ko-KR" sz="1200" dirty="0" err="1"/>
-              <a:t>m</a:t>
-            </a:r>
-            <a:r>
-              <a:rPr lang="ko-KR" altLang="ko-KR" sz="1200" dirty="0"/>
-              <a:t>/</a:t>
-            </a:r>
-            <a:r>
-              <a:rPr lang="ko-KR" altLang="ko-KR" sz="1200" dirty="0" err="1"/>
-              <a:t>s</a:t>
-            </a:r>
-            <a:r>
-              <a:rPr lang="ko-KR" altLang="ko-KR" sz="1200" dirty="0"/>
-              <a:t>): 3m/</a:t>
-            </a:r>
-            <a:r>
-              <a:rPr lang="ko-KR" altLang="ko-KR" sz="1200" dirty="0" err="1"/>
-              <a:t>s</a:t>
-            </a:r>
-            <a:r>
-              <a:rPr lang="ko-KR" altLang="ko-KR" sz="1200" dirty="0"/>
-              <a:t> 전후 (나뭇잎이 흔들리는 가벼운 바람 수준)</a:t>
-            </a:r>
-          </a:p>
-          <a:p>
-            <a:r>
-              <a:rPr lang="ko-KR" altLang="ko-KR" sz="1200" dirty="0"/>
-              <a:t>    '</a:t>
-            </a:r>
-            <a:r>
-              <a:rPr lang="ko-KR" altLang="ko-KR" sz="1200" dirty="0" err="1"/>
-              <a:t>wind_speed_ms</a:t>
-            </a:r>
-            <a:r>
-              <a:rPr lang="ko-KR" altLang="ko-KR" sz="1200" dirty="0"/>
-              <a:t>': </a:t>
-            </a:r>
-            <a:r>
-              <a:rPr lang="ko-KR" altLang="ko-KR" sz="1200" dirty="0" err="1"/>
-              <a:t>np.random.normal</a:t>
-            </a:r>
-            <a:r>
-              <a:rPr lang="ko-KR" altLang="ko-KR" sz="1200" dirty="0"/>
-              <a:t>(3, 1.5, </a:t>
-            </a:r>
-            <a:r>
-              <a:rPr lang="ko-KR" altLang="ko-KR" sz="1200" dirty="0" err="1"/>
-              <a:t>n</a:t>
-            </a:r>
-            <a:r>
-              <a:rPr lang="ko-KR" altLang="ko-KR" sz="1200" dirty="0"/>
-              <a:t>)</a:t>
-            </a:r>
-          </a:p>
-          <a:p>
-            <a:br>
-              <a:rPr lang="ko-KR" altLang="ko-KR" sz="1200" dirty="0"/>
-            </a:br>
-            <a:endParaRPr lang="ko-KR" altLang="ko-KR" sz="1200" dirty="0"/>
-          </a:p>
-          <a:p>
-            <a:r>
-              <a:rPr lang="ko-KR" altLang="ko-KR" sz="1200" dirty="0"/>
-              <a:t>    </a:t>
-            </a:r>
-          </a:p>
-          <a:p>
-            <a:r>
-              <a:rPr lang="ko-KR" altLang="ko-KR" sz="1200" dirty="0"/>
-              <a:t>})</a:t>
-            </a:r>
-          </a:p>
-          <a:p>
-            <a:br>
-              <a:rPr lang="ko-KR" altLang="ko-KR" sz="1200" dirty="0"/>
-            </a:br>
-            <a:endParaRPr lang="ko-KR" altLang="ko-KR" sz="1200" dirty="0"/>
-          </a:p>
-          <a:p>
-            <a:r>
-              <a:rPr lang="ko-KR" altLang="ko-KR" sz="1200" dirty="0" err="1"/>
-              <a:t>df</a:t>
-            </a:r>
-            <a:endParaRPr lang="ko-KR" altLang="ko-KR" sz="1200" dirty="0"/>
-          </a:p>
-          <a:p>
-            <a:r>
-              <a:rPr lang="ko-KR" altLang="ko-KR" sz="1200" dirty="0" err="1"/>
-              <a:t>print</a:t>
-            </a:r>
-            <a:r>
-              <a:rPr lang="ko-KR" altLang="ko-KR" sz="1200" dirty="0"/>
-              <a:t>(</a:t>
-            </a:r>
-            <a:r>
-              <a:rPr lang="ko-KR" altLang="ko-KR" sz="1200" dirty="0" err="1"/>
-              <a:t>df.shape</a:t>
-            </a:r>
-            <a:r>
-              <a:rPr lang="ko-KR" altLang="ko-KR" sz="1200" dirty="0"/>
-              <a:t>)</a:t>
-            </a:r>
-          </a:p>
-          <a:p>
-            <a:r>
-              <a:rPr lang="ko-KR" altLang="ko-KR" sz="1200" dirty="0" err="1"/>
-              <a:t>df</a:t>
-            </a:r>
-            <a:endParaRPr lang="ko-KR" altLang="ko-KR" sz="1200" dirty="0"/>
-          </a:p>
-          <a:p>
-            <a:endParaRPr lang="ko-KR" altLang="en-US" sz="900" dirty="0"/>
+              <a:rPr lang="ko-KR" altLang="ko-KR" b="0" dirty="0">
+                <a:solidFill>
+                  <a:srgbClr val="A31515"/>
+                </a:solidFill>
+                <a:effectLst/>
+                <a:latin typeface="Consolas" panose="020B0609020204030204" pitchFamily="49" charset="0"/>
+              </a:rPr>
+              <a:t>'</a:t>
+            </a:r>
+            <a:r>
+              <a:rPr lang="ko-KR" altLang="ko-KR" b="0" dirty="0">
+                <a:solidFill>
+                  <a:srgbClr val="000000"/>
+                </a:solidFill>
+                <a:effectLst/>
+                <a:latin typeface="Consolas" panose="020B0609020204030204" pitchFamily="49" charset="0"/>
+              </a:rPr>
+              <a:t>] = </a:t>
+            </a:r>
+            <a:r>
+              <a:rPr lang="ko-KR" altLang="ko-KR" b="0" dirty="0" err="1">
+                <a:solidFill>
+                  <a:srgbClr val="000000"/>
+                </a:solidFill>
+                <a:effectLst/>
+                <a:latin typeface="Consolas" panose="020B0609020204030204" pitchFamily="49" charset="0"/>
+              </a:rPr>
+              <a:t>df_ffill</a:t>
+            </a:r>
+            <a:r>
+              <a:rPr lang="ko-KR" altLang="ko-KR" b="0" dirty="0">
+                <a:solidFill>
+                  <a:srgbClr val="000000"/>
+                </a:solidFill>
+                <a:effectLst/>
+                <a:latin typeface="Consolas" panose="020B0609020204030204" pitchFamily="49" charset="0"/>
+              </a:rPr>
+              <a:t>[</a:t>
+            </a:r>
+            <a:r>
+              <a:rPr lang="ko-KR" altLang="ko-KR" b="0" dirty="0">
+                <a:solidFill>
+                  <a:srgbClr val="A31515"/>
+                </a:solidFill>
+                <a:effectLst/>
+                <a:latin typeface="Consolas" panose="020B0609020204030204" pitchFamily="49" charset="0"/>
+              </a:rPr>
+              <a:t>'</a:t>
+            </a:r>
+            <a:r>
+              <a:rPr lang="ko-KR" altLang="ko-KR" b="0" dirty="0" err="1">
+                <a:solidFill>
+                  <a:srgbClr val="A31515"/>
+                </a:solidFill>
+                <a:effectLst/>
+                <a:latin typeface="Consolas" panose="020B0609020204030204" pitchFamily="49" charset="0"/>
+              </a:rPr>
+              <a:t>humidity_percent</a:t>
+            </a:r>
+            <a:r>
+              <a:rPr lang="ko-KR" altLang="ko-KR" b="0" dirty="0">
+                <a:solidFill>
+                  <a:srgbClr val="A31515"/>
+                </a:solidFill>
+                <a:effectLst/>
+                <a:latin typeface="Consolas" panose="020B0609020204030204" pitchFamily="49" charset="0"/>
+              </a:rPr>
+              <a:t>'</a:t>
+            </a:r>
+            <a:r>
+              <a:rPr lang="ko-KR" altLang="ko-KR" b="0" dirty="0">
+                <a:solidFill>
+                  <a:srgbClr val="000000"/>
+                </a:solidFill>
+                <a:effectLst/>
+                <a:latin typeface="Consolas" panose="020B0609020204030204" pitchFamily="49" charset="0"/>
+              </a:rPr>
+              <a:t>].</a:t>
+            </a:r>
+            <a:r>
+              <a:rPr lang="ko-KR" altLang="ko-KR" b="0" dirty="0" err="1">
+                <a:solidFill>
+                  <a:srgbClr val="000000"/>
+                </a:solidFill>
+                <a:effectLst/>
+                <a:latin typeface="Consolas" panose="020B0609020204030204" pitchFamily="49" charset="0"/>
+              </a:rPr>
+              <a:t>ffill</a:t>
+            </a:r>
+            <a:r>
+              <a:rPr lang="ko-KR" altLang="ko-KR" b="0" dirty="0">
+                <a:solidFill>
+                  <a:srgbClr val="000000"/>
+                </a:solidFill>
+                <a:effectLst/>
+                <a:latin typeface="Consolas" panose="020B0609020204030204" pitchFamily="49" charset="0"/>
+              </a:rPr>
+              <a:t>()</a:t>
+            </a:r>
           </a:p>
         </p:txBody>
       </p:sp>
-      <p:sp>
-        <p:nvSpPr>
-          <p:cNvPr id="2" name="TextBox 1">
+      <p:pic>
+        <p:nvPicPr>
+          <p:cNvPr id="5" name="그림 4">
             <a:extLst>
               <a:ext uri="{FF2B5EF4-FFF2-40B4-BE49-F238E27FC236}">
-                <a16:creationId xmlns:a16="http://schemas.microsoft.com/office/drawing/2014/main" id="{9CF369D3-23A5-8355-9791-7AA6BD7CD28C}"/>
+                <a16:creationId xmlns:a16="http://schemas.microsoft.com/office/drawing/2014/main" id="{907A162D-973D-11EB-9D6F-F0A46D544F6E}"/>
               </a:ext>
             </a:extLst>
           </p:cNvPr>
-          <p:cNvSpPr txBox="1"/>
+          <p:cNvPicPr>
+            <a:picLocks noChangeAspect="1"/>
+          </p:cNvPicPr>
           <p:nvPr/>
-        </p:nvSpPr>
+        </p:nvPicPr>
+        <p:blipFill>
+          <a:blip r:embed="rId2">
+            <a:extLst>
+              <a:ext uri="{28A0092B-C50C-407E-A947-70E740481C1C}">
+                <a14:useLocalDpi xmlns:a14="http://schemas.microsoft.com/office/drawing/2010/main" val="0"/>
+              </a:ext>
+            </a:extLst>
+          </a:blip>
+          <a:stretch>
+            <a:fillRect/>
+          </a:stretch>
+        </p:blipFill>
         <p:spPr>
           <a:xfrm>
-            <a:off x="5279923" y="1042634"/>
-            <a:ext cx="5043948" cy="3416320"/>
+            <a:off x="0" y="-163931"/>
+            <a:ext cx="4115011" cy="1682836"/>
           </a:xfrm>
           <a:prstGeom prst="rect">
             <a:avLst/>
           </a:prstGeom>
-          <a:noFill/>
         </p:spPr>
-        <p:txBody>
-          <a:bodyPr wrap="square" rtlCol="0">
-            <a:spAutoFit/>
-          </a:bodyPr>
-          <a:lstStyle/>
-          <a:p>
-            <a:r>
-              <a:rPr lang="ko-KR" altLang="en-US" dirty="0">
-                <a:solidFill>
-                  <a:srgbClr val="FF0000"/>
-                </a:solidFill>
-              </a:rPr>
-              <a:t>주제 </a:t>
-            </a:r>
-            <a:r>
-              <a:rPr lang="en-US" altLang="ko-KR" dirty="0">
-                <a:solidFill>
-                  <a:srgbClr val="FF0000"/>
-                </a:solidFill>
-              </a:rPr>
-              <a:t>:  </a:t>
-            </a:r>
-            <a:r>
-              <a:rPr lang="ko-KR" altLang="en-US" dirty="0">
-                <a:solidFill>
-                  <a:srgbClr val="FF0000"/>
-                </a:solidFill>
-              </a:rPr>
-              <a:t>초여름 날씨 데이터</a:t>
-            </a:r>
-            <a:endParaRPr lang="en-US" altLang="ko-KR" dirty="0">
-              <a:solidFill>
-                <a:srgbClr val="FF0000"/>
-              </a:solidFill>
-            </a:endParaRPr>
-          </a:p>
-          <a:p>
-            <a:endParaRPr lang="en-US" altLang="ko-KR" dirty="0">
-              <a:solidFill>
-                <a:srgbClr val="FF0000"/>
-              </a:solidFill>
-            </a:endParaRPr>
-          </a:p>
-          <a:p>
-            <a:r>
-              <a:rPr lang="ko-KR" altLang="en-US" dirty="0">
-                <a:solidFill>
-                  <a:srgbClr val="FF0000"/>
-                </a:solidFill>
-              </a:rPr>
-              <a:t>시간</a:t>
-            </a:r>
-            <a:r>
-              <a:rPr lang="en-US" altLang="ko-KR" dirty="0">
-                <a:solidFill>
-                  <a:srgbClr val="FF0000"/>
-                </a:solidFill>
-              </a:rPr>
-              <a:t>, </a:t>
-            </a:r>
-            <a:r>
-              <a:rPr lang="ko-KR" altLang="en-US" dirty="0">
-                <a:solidFill>
-                  <a:srgbClr val="FF0000"/>
-                </a:solidFill>
-              </a:rPr>
-              <a:t>온도</a:t>
-            </a:r>
-            <a:r>
-              <a:rPr lang="en-US" altLang="ko-KR" dirty="0">
-                <a:solidFill>
-                  <a:srgbClr val="FF0000"/>
-                </a:solidFill>
-              </a:rPr>
-              <a:t>, </a:t>
-            </a:r>
-            <a:r>
-              <a:rPr lang="ko-KR" altLang="en-US" dirty="0">
-                <a:solidFill>
-                  <a:srgbClr val="FF0000"/>
-                </a:solidFill>
-              </a:rPr>
-              <a:t>습도</a:t>
-            </a:r>
-            <a:r>
-              <a:rPr lang="en-US" altLang="ko-KR" dirty="0">
-                <a:solidFill>
-                  <a:srgbClr val="FF0000"/>
-                </a:solidFill>
-              </a:rPr>
-              <a:t>, </a:t>
-            </a:r>
-            <a:r>
-              <a:rPr lang="ko-KR" altLang="en-US" dirty="0">
-                <a:solidFill>
-                  <a:srgbClr val="FF0000"/>
-                </a:solidFill>
-              </a:rPr>
-              <a:t>풍속</a:t>
-            </a:r>
-            <a:endParaRPr lang="en-US" altLang="ko-KR" dirty="0">
-              <a:solidFill>
-                <a:srgbClr val="FF0000"/>
-              </a:solidFill>
-            </a:endParaRPr>
-          </a:p>
-          <a:p>
-            <a:endParaRPr lang="en-US" altLang="ko-KR" dirty="0">
-              <a:solidFill>
-                <a:srgbClr val="FF0000"/>
-              </a:solidFill>
-            </a:endParaRPr>
-          </a:p>
-          <a:p>
-            <a:r>
-              <a:rPr lang="en-US" altLang="ko-KR" dirty="0">
-                <a:solidFill>
-                  <a:srgbClr val="FF0000"/>
-                </a:solidFill>
-              </a:rPr>
-              <a:t>500</a:t>
-            </a:r>
-            <a:r>
-              <a:rPr lang="ko-KR" altLang="en-US" dirty="0">
-                <a:solidFill>
-                  <a:srgbClr val="FF0000"/>
-                </a:solidFill>
-              </a:rPr>
-              <a:t>줄 까지 </a:t>
-            </a:r>
-            <a:endParaRPr lang="en-US" altLang="ko-KR" dirty="0">
-              <a:solidFill>
-                <a:srgbClr val="FF0000"/>
-              </a:solidFill>
-            </a:endParaRPr>
-          </a:p>
-          <a:p>
-            <a:endParaRPr lang="en-US" altLang="ko-KR" dirty="0">
-              <a:solidFill>
-                <a:srgbClr val="FF0000"/>
-              </a:solidFill>
-            </a:endParaRPr>
-          </a:p>
-          <a:p>
-            <a:r>
-              <a:rPr lang="en-US" altLang="ko-KR" dirty="0" err="1">
-                <a:solidFill>
-                  <a:srgbClr val="FF0000"/>
-                </a:solidFill>
-              </a:rPr>
-              <a:t>Random.normal</a:t>
-            </a:r>
-            <a:r>
-              <a:rPr lang="en-US" altLang="ko-KR" dirty="0">
-                <a:solidFill>
-                  <a:srgbClr val="FF0000"/>
-                </a:solidFill>
-              </a:rPr>
-              <a:t>(loc, scale, size) </a:t>
-            </a:r>
-          </a:p>
-          <a:p>
-            <a:endParaRPr lang="en-US" altLang="ko-KR" dirty="0">
-              <a:solidFill>
-                <a:srgbClr val="FF0000"/>
-              </a:solidFill>
-            </a:endParaRPr>
-          </a:p>
-          <a:p>
-            <a:r>
-              <a:rPr lang="en-US" altLang="ko-KR" dirty="0">
-                <a:solidFill>
-                  <a:srgbClr val="FF0000"/>
-                </a:solidFill>
-              </a:rPr>
-              <a:t>Loc / </a:t>
-            </a:r>
-            <a:r>
-              <a:rPr lang="ko-KR" altLang="en-US" dirty="0">
-                <a:solidFill>
-                  <a:srgbClr val="FF0000"/>
-                </a:solidFill>
-              </a:rPr>
-              <a:t>평균</a:t>
-            </a:r>
-            <a:endParaRPr lang="en-US" altLang="ko-KR" dirty="0">
-              <a:solidFill>
-                <a:srgbClr val="FF0000"/>
-              </a:solidFill>
-            </a:endParaRPr>
-          </a:p>
-          <a:p>
-            <a:r>
-              <a:rPr lang="en-US" altLang="ko-KR" dirty="0">
-                <a:solidFill>
-                  <a:srgbClr val="FF0000"/>
-                </a:solidFill>
-              </a:rPr>
-              <a:t>Scale / </a:t>
-            </a:r>
-            <a:r>
-              <a:rPr lang="ko-KR" altLang="en-US" dirty="0">
-                <a:solidFill>
-                  <a:srgbClr val="FF0000"/>
-                </a:solidFill>
-              </a:rPr>
-              <a:t>표준 편차 </a:t>
-            </a:r>
-            <a:endParaRPr lang="en-US" altLang="ko-KR" dirty="0">
-              <a:solidFill>
-                <a:srgbClr val="FF0000"/>
-              </a:solidFill>
-            </a:endParaRPr>
-          </a:p>
-          <a:p>
-            <a:r>
-              <a:rPr lang="en-US" altLang="ko-KR" dirty="0">
-                <a:solidFill>
-                  <a:srgbClr val="FF0000"/>
-                </a:solidFill>
-              </a:rPr>
-              <a:t>n/ </a:t>
-            </a:r>
-            <a:r>
-              <a:rPr lang="ko-KR" altLang="en-US" dirty="0">
-                <a:solidFill>
-                  <a:srgbClr val="FF0000"/>
-                </a:solidFill>
-              </a:rPr>
-              <a:t>개수</a:t>
-            </a:r>
-            <a:endParaRPr lang="en-US" altLang="ko-KR" dirty="0">
-              <a:solidFill>
-                <a:srgbClr val="FF0000"/>
-              </a:solidFill>
-            </a:endParaRPr>
-          </a:p>
-          <a:p>
-            <a:r>
-              <a:rPr lang="ko-KR" altLang="en-US" dirty="0">
-                <a:solidFill>
-                  <a:srgbClr val="FF0000"/>
-                </a:solidFill>
-              </a:rPr>
-              <a:t>랜덤하게 데이터 생성함 </a:t>
-            </a:r>
-          </a:p>
-        </p:txBody>
-      </p:sp>
+      </p:pic>
     </p:spTree>
     <p:extLst>
       <p:ext uri="{BB962C8B-B14F-4D97-AF65-F5344CB8AC3E}">
-        <p14:creationId xmlns:p14="http://schemas.microsoft.com/office/powerpoint/2010/main" val="108057784"/>
+        <p14:creationId xmlns:p14="http://schemas.microsoft.com/office/powerpoint/2010/main" val="3962146943"/>
       </p:ext>
     </p:extLst>
   </p:cSld>
@@ -4429,7 +4879,7 @@
 </p:sld>
 </file>
 
-<file path=ppt/slides/slide10.xml><?xml version="1.0" encoding="utf-8"?>
+<file path=ppt/slides/slide11.xml><?xml version="1.0" encoding="utf-8"?>
 <p:sld xmlns:a="http://schemas.openxmlformats.org/drawingml/2006/main" xmlns:r="http://schemas.openxmlformats.org/officeDocument/2006/relationships" xmlns:p="http://schemas.openxmlformats.org/presentationml/2006/main">
   <p:cSld>
     <p:spTree>
@@ -5465,7 +5915,7 @@
 </p:sld>
 </file>
 
-<file path=ppt/slides/slide11.xml><?xml version="1.0" encoding="utf-8"?>
+<file path=ppt/slides/slide12.xml><?xml version="1.0" encoding="utf-8"?>
 <p:sld xmlns:a="http://schemas.openxmlformats.org/drawingml/2006/main" xmlns:r="http://schemas.openxmlformats.org/officeDocument/2006/relationships" xmlns:p="http://schemas.openxmlformats.org/presentationml/2006/main">
   <p:cSld>
     <p:spTree>
@@ -5497,7 +5947,7 @@
         <p:spPr>
           <a:xfrm>
             <a:off x="1002890" y="187389"/>
-            <a:ext cx="11041625" cy="4236160"/>
+            <a:ext cx="11041625" cy="5133841"/>
           </a:xfrm>
           <a:prstGeom prst="rect">
             <a:avLst/>
@@ -5681,6 +6131,13 @@
               </a:rPr>
               <a:t>()</a:t>
             </a:r>
+            <a:endParaRPr lang="en-US" altLang="ko-KR" b="0" dirty="0">
+              <a:solidFill>
+                <a:srgbClr val="000000"/>
+              </a:solidFill>
+              <a:effectLst/>
+              <a:latin typeface="Consolas" panose="020B0609020204030204" pitchFamily="49" charset="0"/>
+            </a:endParaRPr>
           </a:p>
           <a:p>
             <a:pPr>
@@ -5689,56 +6146,13 @@
               </a:lnSpc>
               <a:buNone/>
             </a:pPr>
-            <a:r>
-              <a:rPr lang="ko-KR" altLang="ko-KR" b="0" dirty="0">
-                <a:solidFill>
-                  <a:srgbClr val="000000"/>
-                </a:solidFill>
-                <a:effectLst/>
-                <a:latin typeface="Consolas" panose="020B0609020204030204" pitchFamily="49" charset="0"/>
-              </a:rPr>
-              <a:t>Q1 = </a:t>
-            </a:r>
-            <a:r>
-              <a:rPr lang="ko-KR" altLang="ko-KR" b="0" dirty="0" err="1">
-                <a:solidFill>
-                  <a:srgbClr val="000000"/>
-                </a:solidFill>
-                <a:effectLst/>
-                <a:latin typeface="Consolas" panose="020B0609020204030204" pitchFamily="49" charset="0"/>
-              </a:rPr>
-              <a:t>temp_data.quantile</a:t>
-            </a:r>
-            <a:r>
-              <a:rPr lang="ko-KR" altLang="ko-KR" b="0" dirty="0">
-                <a:solidFill>
-                  <a:srgbClr val="000000"/>
-                </a:solidFill>
-                <a:effectLst/>
-                <a:latin typeface="Consolas" panose="020B0609020204030204" pitchFamily="49" charset="0"/>
-              </a:rPr>
-              <a:t>(</a:t>
-            </a:r>
-            <a:r>
-              <a:rPr lang="ko-KR" altLang="ko-KR" b="0" dirty="0">
-                <a:solidFill>
-                  <a:srgbClr val="098658"/>
-                </a:solidFill>
-                <a:effectLst/>
-                <a:latin typeface="Consolas" panose="020B0609020204030204" pitchFamily="49" charset="0"/>
-              </a:rPr>
-              <a:t>0.25</a:t>
-            </a:r>
-            <a:r>
-              <a:rPr lang="ko-KR" altLang="ko-KR" b="0" dirty="0">
-                <a:solidFill>
-                  <a:srgbClr val="000000"/>
-                </a:solidFill>
-                <a:effectLst/>
-                <a:latin typeface="Consolas" panose="020B0609020204030204" pitchFamily="49" charset="0"/>
-              </a:rPr>
-              <a:t>)</a:t>
-            </a:r>
+            <a:endParaRPr lang="ko-KR" altLang="ko-KR" b="0" dirty="0">
+              <a:solidFill>
+                <a:srgbClr val="000000"/>
+              </a:solidFill>
+              <a:effectLst/>
+              <a:latin typeface="Consolas" panose="020B0609020204030204" pitchFamily="49" charset="0"/>
+            </a:endParaRPr>
           </a:p>
           <a:p>
             <a:pPr>
@@ -5755,7 +6169,7 @@
                 <a:effectLst/>
                 <a:latin typeface="Consolas" panose="020B0609020204030204" pitchFamily="49" charset="0"/>
               </a:rPr>
-              <a:t>Q3 = </a:t>
+              <a:t>Q1 = </a:t>
             </a:r>
             <a:r>
               <a:rPr lang="ko-KR" altLang="ko-KR" b="0" dirty="0" err="1">
@@ -5785,7 +6199,7 @@
                 <a:effectLst/>
                 <a:latin typeface="Consolas" panose="020B0609020204030204" pitchFamily="49" charset="0"/>
               </a:rPr>
-              <a:t>0.75</a:t>
+              <a:t>0.25</a:t>
             </a:r>
             <a:r>
               <a:rPr lang="ko-KR" altLang="ko-KR" b="0" dirty="0">
@@ -5813,8 +6227,55 @@
                 <a:effectLst/>
                 <a:latin typeface="Consolas" panose="020B0609020204030204" pitchFamily="49" charset="0"/>
               </a:rPr>
-              <a:t>IQR = Q3 - Q1</a:t>
-            </a:r>
+              <a:t>Q3 = </a:t>
+            </a:r>
+            <a:r>
+              <a:rPr lang="ko-KR" altLang="ko-KR" b="0" dirty="0" err="1">
+                <a:solidFill>
+                  <a:srgbClr val="000000"/>
+                </a:solidFill>
+                <a:effectLst/>
+                <a:latin typeface="Consolas" panose="020B0609020204030204" pitchFamily="49" charset="0"/>
+              </a:rPr>
+              <a:t>temp_data.quantile</a:t>
+            </a:r>
+            <a:r>
+              <a:rPr lang="ko-KR" altLang="ko-KR" b="0" dirty="0">
+                <a:solidFill>
+                  <a:srgbClr val="000000"/>
+                </a:solidFill>
+                <a:effectLst/>
+                <a:latin typeface="Consolas" panose="020B0609020204030204" pitchFamily="49" charset="0"/>
+              </a:rPr>
+              <a:t>(</a:t>
+            </a:r>
+            <a:r>
+              <a:rPr lang="ko-KR" altLang="ko-KR" b="0" dirty="0">
+                <a:solidFill>
+                  <a:srgbClr val="098658"/>
+                </a:solidFill>
+                <a:effectLst/>
+                <a:latin typeface="Consolas" panose="020B0609020204030204" pitchFamily="49" charset="0"/>
+              </a:rPr>
+              <a:t>0.75</a:t>
+            </a:r>
+            <a:r>
+              <a:rPr lang="ko-KR" altLang="ko-KR" b="0" dirty="0">
+                <a:solidFill>
+                  <a:srgbClr val="000000"/>
+                </a:solidFill>
+                <a:effectLst/>
+                <a:latin typeface="Consolas" panose="020B0609020204030204" pitchFamily="49" charset="0"/>
+              </a:rPr>
+              <a:t>)</a:t>
+            </a:r>
+            <a:endParaRPr lang="en-US" altLang="ko-KR" b="0" dirty="0">
+              <a:solidFill>
+                <a:srgbClr val="000000"/>
+              </a:solidFill>
+              <a:effectLst/>
+              <a:latin typeface="Consolas" panose="020B0609020204030204" pitchFamily="49" charset="0"/>
+            </a:endParaRPr>
           </a:p>
           <a:p>
             <a:pPr>
@@ -5823,46 +6284,13 @@
               </a:lnSpc>
               <a:buNone/>
             </a:pPr>
-            <a:r>
-              <a:rPr lang="ko-KR" altLang="ko-KR" b="0" dirty="0" err="1">
-                <a:solidFill>
-                  <a:srgbClr val="000000"/>
-                </a:solidFill>
-                <a:effectLst/>
-                <a:latin typeface="Consolas" panose="020B0609020204030204" pitchFamily="49" charset="0"/>
-              </a:rPr>
-              <a:t>low</a:t>
-            </a:r>
-            <a:r>
-              <a:rPr lang="ko-KR" altLang="ko-KR" b="0" dirty="0">
-                <a:solidFill>
-                  <a:srgbClr val="000000"/>
-                </a:solidFill>
-                <a:effectLst/>
-                <a:latin typeface="Consolas" panose="020B0609020204030204" pitchFamily="49" charset="0"/>
-              </a:rPr>
-              <a:t> = Q1 - </a:t>
-            </a:r>
-            <a:r>
-              <a:rPr lang="ko-KR" altLang="ko-KR" b="0" dirty="0">
-                <a:solidFill>
-                  <a:srgbClr val="098658"/>
-                </a:solidFill>
-                <a:effectLst/>
-                <a:latin typeface="Consolas" panose="020B0609020204030204" pitchFamily="49" charset="0"/>
-              </a:rPr>
-              <a:t>1.5</a:t>
-            </a:r>
-            <a:r>
-              <a:rPr lang="ko-KR" altLang="ko-KR" b="0" dirty="0">
-                <a:solidFill>
-                  <a:srgbClr val="000000"/>
-                </a:solidFill>
-                <a:effectLst/>
-                <a:latin typeface="Consolas" panose="020B0609020204030204" pitchFamily="49" charset="0"/>
-              </a:rPr>
-              <a:t> * IQR</a:t>
-            </a:r>
+            <a:endParaRPr lang="ko-KR" altLang="ko-KR" b="0" dirty="0">
+              <a:solidFill>
+                <a:srgbClr val="000000"/>
+              </a:solidFill>
+              <a:effectLst/>
+              <a:latin typeface="Consolas" panose="020B0609020204030204" pitchFamily="49" charset="0"/>
+            </a:endParaRPr>
           </a:p>
           <a:p>
             <a:pPr>
@@ -5872,6 +6300,72 @@
               <a:buNone/>
             </a:pPr>
             <a:r>
+              <a:rPr lang="ko-KR" altLang="ko-KR" b="0" dirty="0">
+                <a:solidFill>
+                  <a:srgbClr val="000000"/>
+                </a:solidFill>
+                <a:effectLst/>
+                <a:latin typeface="Consolas" panose="020B0609020204030204" pitchFamily="49" charset="0"/>
+              </a:rPr>
+              <a:t>IQR = Q3 - Q1</a:t>
+            </a:r>
+          </a:p>
+          <a:p>
+            <a:pPr>
+              <a:lnSpc>
+                <a:spcPts val="1425"/>
+              </a:lnSpc>
+              <a:buNone/>
+            </a:pPr>
+            <a:r>
+              <a:rPr lang="ko-KR" altLang="ko-KR" b="0" dirty="0" err="1">
+                <a:solidFill>
+                  <a:srgbClr val="000000"/>
+                </a:solidFill>
+                <a:effectLst/>
+                <a:latin typeface="Consolas" panose="020B0609020204030204" pitchFamily="49" charset="0"/>
+              </a:rPr>
+              <a:t>low</a:t>
+            </a:r>
+            <a:r>
+              <a:rPr lang="ko-KR" altLang="ko-KR" b="0" dirty="0">
+                <a:solidFill>
+                  <a:srgbClr val="000000"/>
+                </a:solidFill>
+                <a:effectLst/>
+                <a:latin typeface="Consolas" panose="020B0609020204030204" pitchFamily="49" charset="0"/>
+              </a:rPr>
+              <a:t> = Q1 - </a:t>
+            </a:r>
+            <a:r>
+              <a:rPr lang="ko-KR" altLang="ko-KR" b="0" dirty="0">
+                <a:solidFill>
+                  <a:srgbClr val="098658"/>
+                </a:solidFill>
+                <a:effectLst/>
+                <a:latin typeface="Consolas" panose="020B0609020204030204" pitchFamily="49" charset="0"/>
+              </a:rPr>
+              <a:t>1.5</a:t>
+            </a:r>
+            <a:r>
+              <a:rPr lang="ko-KR" altLang="ko-KR" b="0" dirty="0">
+                <a:solidFill>
+                  <a:srgbClr val="000000"/>
+                </a:solidFill>
+                <a:effectLst/>
+                <a:latin typeface="Consolas" panose="020B0609020204030204" pitchFamily="49" charset="0"/>
+              </a:rPr>
+              <a:t> * IQR</a:t>
+            </a:r>
+          </a:p>
+          <a:p>
+            <a:pPr>
+              <a:lnSpc>
+                <a:spcPts val="1425"/>
+              </a:lnSpc>
+              <a:buNone/>
+            </a:pPr>
+            <a:r>
               <a:rPr lang="ko-KR" altLang="ko-KR" b="0" dirty="0" err="1">
                 <a:solidFill>
                   <a:srgbClr val="000000"/>
@@ -5911,6 +6405,28 @@
               </a:rPr>
               <a:t> * IQR</a:t>
             </a:r>
+            <a:endParaRPr lang="en-US" altLang="ko-KR" b="0" dirty="0">
+              <a:solidFill>
+                <a:srgbClr val="000000"/>
+              </a:solidFill>
+              <a:effectLst/>
+              <a:latin typeface="Consolas" panose="020B0609020204030204" pitchFamily="49" charset="0"/>
+            </a:endParaRPr>
+          </a:p>
+          <a:p>
+            <a:pPr>
+              <a:lnSpc>
+                <a:spcPts val="1425"/>
+              </a:lnSpc>
+              <a:buNone/>
+            </a:pPr>
+            <a:endParaRPr lang="ko-KR" altLang="ko-KR" b="0" dirty="0">
+              <a:solidFill>
+                <a:srgbClr val="000000"/>
+              </a:solidFill>
+              <a:effectLst/>
+              <a:latin typeface="Consolas" panose="020B0609020204030204" pitchFamily="49" charset="0"/>
+            </a:endParaRPr>
           </a:p>
           <a:p>
             <a:pPr>
@@ -6400,6 +6916,13 @@
               </a:rPr>
               <a:t>)</a:t>
             </a:r>
+            <a:endParaRPr lang="en-US" altLang="ko-KR" b="0" dirty="0">
+              <a:solidFill>
+                <a:srgbClr val="000000"/>
+              </a:solidFill>
+              <a:effectLst/>
+              <a:latin typeface="Consolas" panose="020B0609020204030204" pitchFamily="49" charset="0"/>
+            </a:endParaRPr>
           </a:p>
           <a:p>
             <a:pPr>
@@ -6408,6 +6931,21 @@
               </a:lnSpc>
               <a:buNone/>
             </a:pPr>
+            <a:endParaRPr lang="ko-KR" altLang="ko-KR" b="0" dirty="0">
+              <a:solidFill>
+                <a:srgbClr val="000000"/>
+              </a:solidFill>
+              <a:effectLst/>
+              <a:latin typeface="Consolas" panose="020B0609020204030204" pitchFamily="49" charset="0"/>
+            </a:endParaRPr>
+          </a:p>
+          <a:p>
+            <a:pPr>
+              <a:lnSpc>
+                <a:spcPts val="1425"/>
+              </a:lnSpc>
+              <a:buNone/>
+            </a:pPr>
             <a:r>
               <a:rPr lang="ko-KR" altLang="ko-KR" b="0" dirty="0" err="1">
                 <a:solidFill>
@@ -6468,6 +7006,28 @@
               </a:rPr>
               <a:t>]</a:t>
             </a:r>
+            <a:endParaRPr lang="en-US" altLang="ko-KR" b="0" dirty="0">
+              <a:solidFill>
+                <a:srgbClr val="000000"/>
+              </a:solidFill>
+              <a:effectLst/>
+              <a:latin typeface="Consolas" panose="020B0609020204030204" pitchFamily="49" charset="0"/>
+            </a:endParaRPr>
+          </a:p>
+          <a:p>
+            <a:pPr>
+              <a:lnSpc>
+                <a:spcPts val="1425"/>
+              </a:lnSpc>
+              <a:buNone/>
+            </a:pPr>
+            <a:endParaRPr lang="ko-KR" altLang="ko-KR" b="0" dirty="0">
+              <a:solidFill>
+                <a:srgbClr val="000000"/>
+              </a:solidFill>
+              <a:effectLst/>
+              <a:latin typeface="Consolas" panose="020B0609020204030204" pitchFamily="49" charset="0"/>
+            </a:endParaRPr>
           </a:p>
           <a:p>
             <a:pPr>
@@ -6879,7 +7439,7 @@
         </p:blipFill>
         <p:spPr>
           <a:xfrm>
-            <a:off x="2780837" y="4543457"/>
+            <a:off x="2240510" y="4776213"/>
             <a:ext cx="6630325" cy="1743318"/>
           </a:xfrm>
           <a:prstGeom prst="rect">
@@ -6900,7 +7460,7 @@
 </p:sld>
 </file>
 
-<file path=ppt/slides/slide12.xml><?xml version="1.0" encoding="utf-8"?>
+<file path=ppt/slides/slide13.xml><?xml version="1.0" encoding="utf-8"?>
 <p:sld xmlns:a="http://schemas.openxmlformats.org/drawingml/2006/main" xmlns:r="http://schemas.openxmlformats.org/officeDocument/2006/relationships" xmlns:p="http://schemas.openxmlformats.org/presentationml/2006/main">
   <p:cSld>
     <p:spTree>
@@ -6938,7 +7498,7 @@
         <p:spPr>
           <a:xfrm>
             <a:off x="2851354" y="358762"/>
-            <a:ext cx="6096000" cy="2979405"/>
+            <a:ext cx="8645148" cy="4595232"/>
           </a:xfrm>
           <a:prstGeom prst="rect">
             <a:avLst/>
@@ -7122,6 +7682,16 @@
               </a:rPr>
               <a:t>()</a:t>
             </a:r>
+            <a:r>
+              <a:rPr lang="en-US" altLang="ko-KR" b="0" dirty="0">
+                <a:solidFill>
+                  <a:srgbClr val="000000"/>
+                </a:solidFill>
+                <a:effectLst/>
+                <a:latin typeface="Consolas" panose="020B0609020204030204" pitchFamily="49" charset="0"/>
+              </a:rPr>
+              <a:t> </a:t>
+            </a:r>
           </a:p>
           <a:p>
             <a:pPr>
@@ -7130,420 +7700,6 @@
               </a:lnSpc>
               <a:buNone/>
             </a:pPr>
-            <a:r>
-              <a:rPr lang="ko-KR" altLang="ko-KR" b="0" dirty="0" err="1">
-                <a:solidFill>
-                  <a:srgbClr val="000000"/>
-                </a:solidFill>
-                <a:effectLst/>
-                <a:latin typeface="Consolas" panose="020B0609020204030204" pitchFamily="49" charset="0"/>
-              </a:rPr>
-              <a:t>mean</a:t>
-            </a:r>
-            <a:r>
-              <a:rPr lang="ko-KR" altLang="ko-KR" b="0" dirty="0">
-                <a:solidFill>
-                  <a:srgbClr val="000000"/>
-                </a:solidFill>
-                <a:effectLst/>
-                <a:latin typeface="Consolas" panose="020B0609020204030204" pitchFamily="49" charset="0"/>
-              </a:rPr>
-              <a:t> = </a:t>
-            </a:r>
-            <a:r>
-              <a:rPr lang="ko-KR" altLang="ko-KR" b="0" dirty="0" err="1">
-                <a:solidFill>
-                  <a:srgbClr val="000000"/>
-                </a:solidFill>
-                <a:effectLst/>
-                <a:latin typeface="Consolas" panose="020B0609020204030204" pitchFamily="49" charset="0"/>
-              </a:rPr>
-              <a:t>df</a:t>
-            </a:r>
-            <a:r>
-              <a:rPr lang="ko-KR" altLang="ko-KR" b="0" dirty="0">
-                <a:solidFill>
-                  <a:srgbClr val="000000"/>
-                </a:solidFill>
-                <a:effectLst/>
-                <a:latin typeface="Consolas" panose="020B0609020204030204" pitchFamily="49" charset="0"/>
-              </a:rPr>
-              <a:t>[</a:t>
-            </a:r>
-            <a:r>
-              <a:rPr lang="ko-KR" altLang="ko-KR" b="0" dirty="0">
-                <a:solidFill>
-                  <a:srgbClr val="A31515"/>
-                </a:solidFill>
-                <a:effectLst/>
-                <a:latin typeface="Consolas" panose="020B0609020204030204" pitchFamily="49" charset="0"/>
-              </a:rPr>
-              <a:t>'</a:t>
-            </a:r>
-            <a:r>
-              <a:rPr lang="ko-KR" altLang="ko-KR" b="0" dirty="0" err="1">
-                <a:solidFill>
-                  <a:srgbClr val="A31515"/>
-                </a:solidFill>
-                <a:effectLst/>
-                <a:latin typeface="Consolas" panose="020B0609020204030204" pitchFamily="49" charset="0"/>
-              </a:rPr>
-              <a:t>temperature_c</a:t>
-            </a:r>
-            <a:r>
-              <a:rPr lang="ko-KR" altLang="ko-KR" b="0" dirty="0">
-                <a:solidFill>
-                  <a:srgbClr val="A31515"/>
-                </a:solidFill>
-                <a:effectLst/>
-                <a:latin typeface="Consolas" panose="020B0609020204030204" pitchFamily="49" charset="0"/>
-              </a:rPr>
-              <a:t>'</a:t>
-            </a:r>
-            <a:r>
-              <a:rPr lang="ko-KR" altLang="ko-KR" b="0" dirty="0">
-                <a:solidFill>
-                  <a:srgbClr val="000000"/>
-                </a:solidFill>
-                <a:effectLst/>
-                <a:latin typeface="Consolas" panose="020B0609020204030204" pitchFamily="49" charset="0"/>
-              </a:rPr>
-              <a:t>].</a:t>
-            </a:r>
-            <a:r>
-              <a:rPr lang="ko-KR" altLang="ko-KR" b="0" dirty="0" err="1">
-                <a:solidFill>
-                  <a:srgbClr val="000000"/>
-                </a:solidFill>
-                <a:effectLst/>
-                <a:latin typeface="Consolas" panose="020B0609020204030204" pitchFamily="49" charset="0"/>
-              </a:rPr>
-              <a:t>mean</a:t>
-            </a:r>
-            <a:r>
-              <a:rPr lang="ko-KR" altLang="ko-KR" b="0" dirty="0">
-                <a:solidFill>
-                  <a:srgbClr val="000000"/>
-                </a:solidFill>
-                <a:effectLst/>
-                <a:latin typeface="Consolas" panose="020B0609020204030204" pitchFamily="49" charset="0"/>
-              </a:rPr>
-              <a:t>()</a:t>
-            </a:r>
-          </a:p>
-          <a:p>
-            <a:pPr>
-              <a:lnSpc>
-                <a:spcPts val="1425"/>
-              </a:lnSpc>
-              <a:buNone/>
-            </a:pPr>
-            <a:r>
-              <a:rPr lang="ko-KR" altLang="ko-KR" b="0" dirty="0" err="1">
-                <a:solidFill>
-                  <a:srgbClr val="000000"/>
-                </a:solidFill>
-                <a:effectLst/>
-                <a:latin typeface="Consolas" panose="020B0609020204030204" pitchFamily="49" charset="0"/>
-              </a:rPr>
-              <a:t>std</a:t>
-            </a:r>
-            <a:r>
-              <a:rPr lang="ko-KR" altLang="ko-KR" b="0" dirty="0">
-                <a:solidFill>
-                  <a:srgbClr val="000000"/>
-                </a:solidFill>
-                <a:effectLst/>
-                <a:latin typeface="Consolas" panose="020B0609020204030204" pitchFamily="49" charset="0"/>
-              </a:rPr>
-              <a:t> = </a:t>
-            </a:r>
-            <a:r>
-              <a:rPr lang="ko-KR" altLang="ko-KR" b="0" dirty="0" err="1">
-                <a:solidFill>
-                  <a:srgbClr val="000000"/>
-                </a:solidFill>
-                <a:effectLst/>
-                <a:latin typeface="Consolas" panose="020B0609020204030204" pitchFamily="49" charset="0"/>
-              </a:rPr>
-              <a:t>df</a:t>
-            </a:r>
-            <a:r>
-              <a:rPr lang="ko-KR" altLang="ko-KR" b="0" dirty="0">
-                <a:solidFill>
-                  <a:srgbClr val="000000"/>
-                </a:solidFill>
-                <a:effectLst/>
-                <a:latin typeface="Consolas" panose="020B0609020204030204" pitchFamily="49" charset="0"/>
-              </a:rPr>
-              <a:t>[</a:t>
-            </a:r>
-            <a:r>
-              <a:rPr lang="ko-KR" altLang="ko-KR" b="0" dirty="0">
-                <a:solidFill>
-                  <a:srgbClr val="A31515"/>
-                </a:solidFill>
-                <a:effectLst/>
-                <a:latin typeface="Consolas" panose="020B0609020204030204" pitchFamily="49" charset="0"/>
-              </a:rPr>
-              <a:t>'</a:t>
-            </a:r>
-            <a:r>
-              <a:rPr lang="ko-KR" altLang="ko-KR" b="0" dirty="0" err="1">
-                <a:solidFill>
-                  <a:srgbClr val="A31515"/>
-                </a:solidFill>
-                <a:effectLst/>
-                <a:latin typeface="Consolas" panose="020B0609020204030204" pitchFamily="49" charset="0"/>
-              </a:rPr>
-              <a:t>temperature_c</a:t>
-            </a:r>
-            <a:r>
-              <a:rPr lang="ko-KR" altLang="ko-KR" b="0" dirty="0">
-                <a:solidFill>
-                  <a:srgbClr val="A31515"/>
-                </a:solidFill>
-                <a:effectLst/>
-                <a:latin typeface="Consolas" panose="020B0609020204030204" pitchFamily="49" charset="0"/>
-              </a:rPr>
-              <a:t>'</a:t>
-            </a:r>
-            <a:r>
-              <a:rPr lang="ko-KR" altLang="ko-KR" b="0" dirty="0">
-                <a:solidFill>
-                  <a:srgbClr val="000000"/>
-                </a:solidFill>
-                <a:effectLst/>
-                <a:latin typeface="Consolas" panose="020B0609020204030204" pitchFamily="49" charset="0"/>
-              </a:rPr>
-              <a:t>].</a:t>
-            </a:r>
-            <a:r>
-              <a:rPr lang="ko-KR" altLang="ko-KR" b="0" dirty="0" err="1">
-                <a:solidFill>
-                  <a:srgbClr val="000000"/>
-                </a:solidFill>
-                <a:effectLst/>
-                <a:latin typeface="Consolas" panose="020B0609020204030204" pitchFamily="49" charset="0"/>
-              </a:rPr>
-              <a:t>std</a:t>
-            </a:r>
-            <a:r>
-              <a:rPr lang="ko-KR" altLang="ko-KR" b="0" dirty="0">
-                <a:solidFill>
-                  <a:srgbClr val="000000"/>
-                </a:solidFill>
-                <a:effectLst/>
-                <a:latin typeface="Consolas" panose="020B0609020204030204" pitchFamily="49" charset="0"/>
-              </a:rPr>
-              <a:t>()</a:t>
-            </a:r>
-          </a:p>
-          <a:p>
-            <a:pPr>
-              <a:lnSpc>
-                <a:spcPts val="1425"/>
-              </a:lnSpc>
-              <a:buNone/>
-            </a:pPr>
-            <a:r>
-              <a:rPr lang="ko-KR" altLang="ko-KR" b="0" dirty="0" err="1">
-                <a:solidFill>
-                  <a:srgbClr val="000000"/>
-                </a:solidFill>
-                <a:effectLst/>
-                <a:latin typeface="Consolas" panose="020B0609020204030204" pitchFamily="49" charset="0"/>
-              </a:rPr>
-              <a:t>df_z</a:t>
-            </a:r>
-            <a:r>
-              <a:rPr lang="ko-KR" altLang="ko-KR" b="0" dirty="0">
-                <a:solidFill>
-                  <a:srgbClr val="000000"/>
-                </a:solidFill>
-                <a:effectLst/>
-                <a:latin typeface="Consolas" panose="020B0609020204030204" pitchFamily="49" charset="0"/>
-              </a:rPr>
-              <a:t> = </a:t>
-            </a:r>
-            <a:r>
-              <a:rPr lang="ko-KR" altLang="ko-KR" b="0" dirty="0" err="1">
-                <a:solidFill>
-                  <a:srgbClr val="000000"/>
-                </a:solidFill>
-                <a:effectLst/>
-                <a:latin typeface="Consolas" panose="020B0609020204030204" pitchFamily="49" charset="0"/>
-              </a:rPr>
-              <a:t>df.copy</a:t>
-            </a:r>
-            <a:r>
-              <a:rPr lang="ko-KR" altLang="ko-KR" b="0" dirty="0">
-                <a:solidFill>
-                  <a:srgbClr val="000000"/>
-                </a:solidFill>
-                <a:effectLst/>
-                <a:latin typeface="Consolas" panose="020B0609020204030204" pitchFamily="49" charset="0"/>
-              </a:rPr>
-              <a:t>()</a:t>
-            </a:r>
-          </a:p>
-          <a:p>
-            <a:pPr>
-              <a:lnSpc>
-                <a:spcPts val="1425"/>
-              </a:lnSpc>
-              <a:buNone/>
-            </a:pPr>
-            <a:r>
-              <a:rPr lang="ko-KR" altLang="ko-KR" b="0" dirty="0" err="1">
-                <a:solidFill>
-                  <a:srgbClr val="000000"/>
-                </a:solidFill>
-                <a:effectLst/>
-                <a:latin typeface="Consolas" panose="020B0609020204030204" pitchFamily="49" charset="0"/>
-              </a:rPr>
-              <a:t>df_z</a:t>
-            </a:r>
-            <a:r>
-              <a:rPr lang="ko-KR" altLang="ko-KR" b="0" dirty="0">
-                <a:solidFill>
-                  <a:srgbClr val="000000"/>
-                </a:solidFill>
-                <a:effectLst/>
-                <a:latin typeface="Consolas" panose="020B0609020204030204" pitchFamily="49" charset="0"/>
-              </a:rPr>
-              <a:t>[</a:t>
-            </a:r>
-            <a:r>
-              <a:rPr lang="ko-KR" altLang="ko-KR" b="0" dirty="0">
-                <a:solidFill>
-                  <a:srgbClr val="A31515"/>
-                </a:solidFill>
-                <a:effectLst/>
-                <a:latin typeface="Consolas" panose="020B0609020204030204" pitchFamily="49" charset="0"/>
-              </a:rPr>
-              <a:t>'</a:t>
-            </a:r>
-            <a:r>
-              <a:rPr lang="ko-KR" altLang="ko-KR" b="0" dirty="0" err="1">
-                <a:solidFill>
-                  <a:srgbClr val="A31515"/>
-                </a:solidFill>
-                <a:effectLst/>
-                <a:latin typeface="Consolas" panose="020B0609020204030204" pitchFamily="49" charset="0"/>
-              </a:rPr>
-              <a:t>z</a:t>
-            </a:r>
-            <a:r>
-              <a:rPr lang="ko-KR" altLang="ko-KR" b="0" dirty="0">
-                <a:solidFill>
-                  <a:srgbClr val="A31515"/>
-                </a:solidFill>
-                <a:effectLst/>
-                <a:latin typeface="Consolas" panose="020B0609020204030204" pitchFamily="49" charset="0"/>
-              </a:rPr>
-              <a:t>'</a:t>
-            </a:r>
-            <a:r>
-              <a:rPr lang="ko-KR" altLang="ko-KR" b="0" dirty="0">
-                <a:solidFill>
-                  <a:srgbClr val="000000"/>
-                </a:solidFill>
-                <a:effectLst/>
-                <a:latin typeface="Consolas" panose="020B0609020204030204" pitchFamily="49" charset="0"/>
-              </a:rPr>
-              <a:t>] = (</a:t>
-            </a:r>
-            <a:r>
-              <a:rPr lang="ko-KR" altLang="ko-KR" b="0" dirty="0" err="1">
-                <a:solidFill>
-                  <a:srgbClr val="000000"/>
-                </a:solidFill>
-                <a:effectLst/>
-                <a:latin typeface="Consolas" panose="020B0609020204030204" pitchFamily="49" charset="0"/>
-              </a:rPr>
-              <a:t>df_z</a:t>
-            </a:r>
-            <a:r>
-              <a:rPr lang="ko-KR" altLang="ko-KR" b="0" dirty="0">
-                <a:solidFill>
-                  <a:srgbClr val="000000"/>
-                </a:solidFill>
-                <a:effectLst/>
-                <a:latin typeface="Consolas" panose="020B0609020204030204" pitchFamily="49" charset="0"/>
-              </a:rPr>
-              <a:t>[</a:t>
-            </a:r>
-            <a:r>
-              <a:rPr lang="ko-KR" altLang="ko-KR" b="0" dirty="0">
-                <a:solidFill>
-                  <a:srgbClr val="A31515"/>
-                </a:solidFill>
-                <a:effectLst/>
-                <a:latin typeface="Consolas" panose="020B0609020204030204" pitchFamily="49" charset="0"/>
-              </a:rPr>
-              <a:t>'</a:t>
-            </a:r>
-            <a:r>
-              <a:rPr lang="ko-KR" altLang="ko-KR" b="0" dirty="0" err="1">
-                <a:solidFill>
-                  <a:srgbClr val="A31515"/>
-                </a:solidFill>
-                <a:effectLst/>
-                <a:latin typeface="Consolas" panose="020B0609020204030204" pitchFamily="49" charset="0"/>
-              </a:rPr>
-              <a:t>temperature_c</a:t>
-            </a:r>
-            <a:r>
-              <a:rPr lang="ko-KR" altLang="ko-KR" b="0" dirty="0">
-                <a:solidFill>
-                  <a:srgbClr val="A31515"/>
-                </a:solidFill>
-                <a:effectLst/>
-                <a:latin typeface="Consolas" panose="020B0609020204030204" pitchFamily="49" charset="0"/>
-              </a:rPr>
-              <a:t>'</a:t>
-            </a:r>
-            <a:r>
-              <a:rPr lang="ko-KR" altLang="ko-KR" b="0" dirty="0">
-                <a:solidFill>
-                  <a:srgbClr val="000000"/>
-                </a:solidFill>
-                <a:effectLst/>
-                <a:latin typeface="Consolas" panose="020B0609020204030204" pitchFamily="49" charset="0"/>
-              </a:rPr>
-              <a:t>] - </a:t>
-            </a:r>
-            <a:r>
-              <a:rPr lang="ko-KR" altLang="ko-KR" b="0" dirty="0" err="1">
-                <a:solidFill>
-                  <a:srgbClr val="000000"/>
-                </a:solidFill>
-                <a:effectLst/>
-                <a:latin typeface="Consolas" panose="020B0609020204030204" pitchFamily="49" charset="0"/>
-              </a:rPr>
-              <a:t>mean</a:t>
-            </a:r>
-            <a:r>
-              <a:rPr lang="ko-KR" altLang="ko-KR" b="0" dirty="0">
-                <a:solidFill>
-                  <a:srgbClr val="000000"/>
-                </a:solidFill>
-                <a:effectLst/>
-                <a:latin typeface="Consolas" panose="020B0609020204030204" pitchFamily="49" charset="0"/>
-              </a:rPr>
-              <a:t>) / </a:t>
-            </a:r>
-            <a:r>
-              <a:rPr lang="ko-KR" altLang="ko-KR" b="0" dirty="0" err="1">
-                <a:solidFill>
-                  <a:srgbClr val="000000"/>
-                </a:solidFill>
-                <a:effectLst/>
-                <a:latin typeface="Consolas" panose="020B0609020204030204" pitchFamily="49" charset="0"/>
-              </a:rPr>
-              <a:t>std</a:t>
-            </a:r>
             <a:endParaRPr lang="ko-KR" altLang="ko-KR" b="0" dirty="0">
               <a:solidFill>
                 <a:srgbClr val="000000"/>
@@ -7567,7 +7723,7 @@
                 <a:effectLst/>
                 <a:latin typeface="Consolas" panose="020B0609020204030204" pitchFamily="49" charset="0"/>
               </a:rPr>
-              <a:t>df_z_clean</a:t>
+              <a:t>mean</a:t>
             </a:r>
             <a:r>
               <a:rPr lang="ko-KR" altLang="ko-KR" b="0" dirty="0">
@@ -7587,7 +7743,7 @@
                 <a:effectLst/>
                 <a:latin typeface="Consolas" panose="020B0609020204030204" pitchFamily="49" charset="0"/>
               </a:rPr>
-              <a:t>df_z</a:t>
+              <a:t>df</a:t>
             </a:r>
             <a:r>
               <a:rPr lang="ko-KR" altLang="ko-KR" b="0" dirty="0">
@@ -7600,26 +7756,6 @@
               <a:t>[</a:t>
             </a:r>
             <a:r>
-              <a:rPr lang="ko-KR" altLang="ko-KR" b="0" dirty="0" err="1">
-                <a:solidFill>
-                  <a:srgbClr val="000000"/>
-                </a:solidFill>
-                <a:effectLst/>
-                <a:latin typeface="Consolas" panose="020B0609020204030204" pitchFamily="49" charset="0"/>
-              </a:rPr>
-              <a:t>df_z</a:t>
-            </a:r>
-            <a:r>
-              <a:rPr lang="ko-KR" altLang="ko-KR" b="0" dirty="0">
-                <a:solidFill>
-                  <a:srgbClr val="000000"/>
-                </a:solidFill>
-                <a:effectLst/>
-                <a:latin typeface="Consolas" panose="020B0609020204030204" pitchFamily="49" charset="0"/>
-              </a:rPr>
-              <a:t>[</a:t>
-            </a:r>
-            <a:r>
               <a:rPr lang="ko-KR" altLang="ko-KR" b="0" dirty="0">
                 <a:solidFill>
                   <a:srgbClr val="A31515"/>
@@ -7637,7 +7773,7 @@
                 <a:effectLst/>
                 <a:latin typeface="Consolas" panose="020B0609020204030204" pitchFamily="49" charset="0"/>
               </a:rPr>
-              <a:t>z</a:t>
+              <a:t>temperature_c</a:t>
             </a:r>
             <a:r>
               <a:rPr lang="ko-KR" altLang="ko-KR" b="0" dirty="0">
@@ -7667,38 +7803,45 @@
                 <a:effectLst/>
                 <a:latin typeface="Consolas" panose="020B0609020204030204" pitchFamily="49" charset="0"/>
               </a:rPr>
-              <a:t>abs</a:t>
-            </a:r>
-            <a:r>
-              <a:rPr lang="ko-KR" altLang="ko-KR" b="0" dirty="0">
-                <a:solidFill>
-                  <a:srgbClr val="000000"/>
-                </a:solidFill>
-                <a:effectLst/>
-                <a:latin typeface="Consolas" panose="020B0609020204030204" pitchFamily="49" charset="0"/>
-              </a:rPr>
-              <a:t>() &lt;= </a:t>
-            </a:r>
-            <a:r>
-              <a:rPr lang="ko-KR" altLang="ko-KR" b="0" dirty="0">
-                <a:solidFill>
-                  <a:srgbClr val="098658"/>
-                </a:solidFill>
-                <a:effectLst/>
-                <a:latin typeface="Consolas" panose="020B0609020204030204" pitchFamily="49" charset="0"/>
-              </a:rPr>
-              <a:t>3</a:t>
-            </a:r>
-            <a:r>
-              <a:rPr lang="ko-KR" altLang="ko-KR" b="0" dirty="0">
-                <a:solidFill>
-                  <a:srgbClr val="000000"/>
-                </a:solidFill>
-                <a:effectLst/>
-                <a:latin typeface="Consolas" panose="020B0609020204030204" pitchFamily="49" charset="0"/>
-              </a:rPr>
-              <a:t>]</a:t>
-            </a:r>
+              <a:t>mean</a:t>
+            </a:r>
+            <a:r>
+              <a:rPr lang="ko-KR" altLang="ko-KR" b="0" dirty="0">
+                <a:solidFill>
+                  <a:srgbClr val="000000"/>
+                </a:solidFill>
+                <a:effectLst/>
+                <a:latin typeface="Consolas" panose="020B0609020204030204" pitchFamily="49" charset="0"/>
+              </a:rPr>
+              <a:t>()</a:t>
+            </a:r>
+            <a:r>
+              <a:rPr lang="en-US" altLang="ko-KR" b="0" dirty="0">
+                <a:solidFill>
+                  <a:srgbClr val="000000"/>
+                </a:solidFill>
+                <a:effectLst/>
+                <a:latin typeface="Consolas" panose="020B0609020204030204" pitchFamily="49" charset="0"/>
+              </a:rPr>
+              <a:t> </a:t>
+            </a:r>
+            <a:r>
+              <a:rPr lang="ko-KR" altLang="en-US" b="0" dirty="0">
+                <a:solidFill>
+                  <a:srgbClr val="000000"/>
+                </a:solidFill>
+                <a:effectLst/>
+                <a:latin typeface="Consolas" panose="020B0609020204030204" pitchFamily="49" charset="0"/>
+              </a:rPr>
+              <a:t>평균</a:t>
+            </a:r>
+            <a:endParaRPr lang="ko-KR" altLang="ko-KR" b="0" dirty="0">
+              <a:solidFill>
+                <a:srgbClr val="000000"/>
+              </a:solidFill>
+              <a:effectLst/>
+              <a:latin typeface="Consolas" panose="020B0609020204030204" pitchFamily="49" charset="0"/>
+            </a:endParaRPr>
           </a:p>
           <a:p>
             <a:pPr>
@@ -7715,6 +7858,743 @@
                 <a:effectLst/>
                 <a:latin typeface="Consolas" panose="020B0609020204030204" pitchFamily="49" charset="0"/>
               </a:rPr>
+              <a:t>std</a:t>
+            </a:r>
+            <a:r>
+              <a:rPr lang="ko-KR" altLang="ko-KR" b="0" dirty="0">
+                <a:solidFill>
+                  <a:srgbClr val="000000"/>
+                </a:solidFill>
+                <a:effectLst/>
+                <a:latin typeface="Consolas" panose="020B0609020204030204" pitchFamily="49" charset="0"/>
+              </a:rPr>
+              <a:t> = </a:t>
+            </a:r>
+            <a:r>
+              <a:rPr lang="ko-KR" altLang="ko-KR" b="0" dirty="0" err="1">
+                <a:solidFill>
+                  <a:srgbClr val="000000"/>
+                </a:solidFill>
+                <a:effectLst/>
+                <a:latin typeface="Consolas" panose="020B0609020204030204" pitchFamily="49" charset="0"/>
+              </a:rPr>
+              <a:t>df</a:t>
+            </a:r>
+            <a:r>
+              <a:rPr lang="ko-KR" altLang="ko-KR" b="0" dirty="0">
+                <a:solidFill>
+                  <a:srgbClr val="000000"/>
+                </a:solidFill>
+                <a:effectLst/>
+                <a:latin typeface="Consolas" panose="020B0609020204030204" pitchFamily="49" charset="0"/>
+              </a:rPr>
+              <a:t>[</a:t>
+            </a:r>
+            <a:r>
+              <a:rPr lang="ko-KR" altLang="ko-KR" b="0" dirty="0">
+                <a:solidFill>
+                  <a:srgbClr val="A31515"/>
+                </a:solidFill>
+                <a:effectLst/>
+                <a:latin typeface="Consolas" panose="020B0609020204030204" pitchFamily="49" charset="0"/>
+              </a:rPr>
+              <a:t>'</a:t>
+            </a:r>
+            <a:r>
+              <a:rPr lang="ko-KR" altLang="ko-KR" b="0" dirty="0" err="1">
+                <a:solidFill>
+                  <a:srgbClr val="A31515"/>
+                </a:solidFill>
+                <a:effectLst/>
+                <a:latin typeface="Consolas" panose="020B0609020204030204" pitchFamily="49" charset="0"/>
+              </a:rPr>
+              <a:t>temperature_c</a:t>
+            </a:r>
+            <a:r>
+              <a:rPr lang="ko-KR" altLang="ko-KR" b="0" dirty="0">
+                <a:solidFill>
+                  <a:srgbClr val="A31515"/>
+                </a:solidFill>
+                <a:effectLst/>
+                <a:latin typeface="Consolas" panose="020B0609020204030204" pitchFamily="49" charset="0"/>
+              </a:rPr>
+              <a:t>'</a:t>
+            </a:r>
+            <a:r>
+              <a:rPr lang="ko-KR" altLang="ko-KR" b="0" dirty="0">
+                <a:solidFill>
+                  <a:srgbClr val="000000"/>
+                </a:solidFill>
+                <a:effectLst/>
+                <a:latin typeface="Consolas" panose="020B0609020204030204" pitchFamily="49" charset="0"/>
+              </a:rPr>
+              <a:t>].</a:t>
+            </a:r>
+            <a:r>
+              <a:rPr lang="ko-KR" altLang="ko-KR" b="0" dirty="0" err="1">
+                <a:solidFill>
+                  <a:srgbClr val="000000"/>
+                </a:solidFill>
+                <a:effectLst/>
+                <a:latin typeface="Consolas" panose="020B0609020204030204" pitchFamily="49" charset="0"/>
+              </a:rPr>
+              <a:t>std</a:t>
+            </a:r>
+            <a:r>
+              <a:rPr lang="ko-KR" altLang="ko-KR" b="0" dirty="0">
+                <a:solidFill>
+                  <a:srgbClr val="000000"/>
+                </a:solidFill>
+                <a:effectLst/>
+                <a:latin typeface="Consolas" panose="020B0609020204030204" pitchFamily="49" charset="0"/>
+              </a:rPr>
+              <a:t>()</a:t>
+            </a:r>
+            <a:r>
+              <a:rPr lang="en-US" altLang="ko-KR" b="0" dirty="0">
+                <a:solidFill>
+                  <a:srgbClr val="000000"/>
+                </a:solidFill>
+                <a:effectLst/>
+                <a:latin typeface="Consolas" panose="020B0609020204030204" pitchFamily="49" charset="0"/>
+              </a:rPr>
+              <a:t>  </a:t>
+            </a:r>
+            <a:r>
+              <a:rPr lang="ko-KR" altLang="en-US" b="0" dirty="0">
+                <a:solidFill>
+                  <a:srgbClr val="000000"/>
+                </a:solidFill>
+                <a:effectLst/>
+                <a:latin typeface="Consolas" panose="020B0609020204030204" pitchFamily="49" charset="0"/>
+              </a:rPr>
+              <a:t>표준편차</a:t>
+            </a:r>
+            <a:endParaRPr lang="ko-KR" altLang="ko-KR" b="0" dirty="0">
+              <a:solidFill>
+                <a:srgbClr val="000000"/>
+              </a:solidFill>
+              <a:effectLst/>
+              <a:latin typeface="Consolas" panose="020B0609020204030204" pitchFamily="49" charset="0"/>
+            </a:endParaRPr>
+          </a:p>
+          <a:p>
+            <a:pPr>
+              <a:lnSpc>
+                <a:spcPts val="1425"/>
+              </a:lnSpc>
+              <a:buNone/>
+            </a:pPr>
+            <a:r>
+              <a:rPr lang="ko-KR" altLang="ko-KR" b="0" dirty="0" err="1">
+                <a:solidFill>
+                  <a:srgbClr val="000000"/>
+                </a:solidFill>
+                <a:effectLst/>
+                <a:latin typeface="Consolas" panose="020B0609020204030204" pitchFamily="49" charset="0"/>
+              </a:rPr>
+              <a:t>df_z</a:t>
+            </a:r>
+            <a:r>
+              <a:rPr lang="ko-KR" altLang="ko-KR" b="0" dirty="0">
+                <a:solidFill>
+                  <a:srgbClr val="000000"/>
+                </a:solidFill>
+                <a:effectLst/>
+                <a:latin typeface="Consolas" panose="020B0609020204030204" pitchFamily="49" charset="0"/>
+              </a:rPr>
+              <a:t> = </a:t>
+            </a:r>
+            <a:r>
+              <a:rPr lang="ko-KR" altLang="ko-KR" b="0" dirty="0" err="1">
+                <a:solidFill>
+                  <a:srgbClr val="000000"/>
+                </a:solidFill>
+                <a:effectLst/>
+                <a:latin typeface="Consolas" panose="020B0609020204030204" pitchFamily="49" charset="0"/>
+              </a:rPr>
+              <a:t>df.copy</a:t>
+            </a:r>
+            <a:r>
+              <a:rPr lang="ko-KR" altLang="ko-KR" b="0" dirty="0">
+                <a:solidFill>
+                  <a:srgbClr val="000000"/>
+                </a:solidFill>
+                <a:effectLst/>
+                <a:latin typeface="Consolas" panose="020B0609020204030204" pitchFamily="49" charset="0"/>
+              </a:rPr>
+              <a:t>()</a:t>
+            </a:r>
+            <a:endParaRPr lang="en-US" altLang="ko-KR" b="0" dirty="0">
+              <a:solidFill>
+                <a:srgbClr val="000000"/>
+              </a:solidFill>
+              <a:effectLst/>
+              <a:latin typeface="Consolas" panose="020B0609020204030204" pitchFamily="49" charset="0"/>
+            </a:endParaRPr>
+          </a:p>
+          <a:p>
+            <a:pPr>
+              <a:lnSpc>
+                <a:spcPts val="1425"/>
+              </a:lnSpc>
+              <a:buNone/>
+            </a:pPr>
+            <a:endParaRPr lang="en-US" altLang="ko-KR" dirty="0">
+              <a:solidFill>
+                <a:srgbClr val="000000"/>
+              </a:solidFill>
+              <a:latin typeface="Consolas" panose="020B0609020204030204" pitchFamily="49" charset="0"/>
+            </a:endParaRPr>
+          </a:p>
+          <a:p>
+            <a:pPr>
+              <a:lnSpc>
+                <a:spcPts val="1425"/>
+              </a:lnSpc>
+              <a:buNone/>
+            </a:pPr>
+            <a:endParaRPr lang="en-US" altLang="ko-KR" dirty="0">
+              <a:solidFill>
+                <a:srgbClr val="000000"/>
+              </a:solidFill>
+              <a:latin typeface="Consolas" panose="020B0609020204030204" pitchFamily="49" charset="0"/>
+            </a:endParaRPr>
+          </a:p>
+          <a:p>
+            <a:pPr>
+              <a:lnSpc>
+                <a:spcPts val="1425"/>
+              </a:lnSpc>
+            </a:pPr>
+            <a:r>
+              <a:rPr lang="ko-KR" altLang="ko-KR" dirty="0">
+                <a:solidFill>
+                  <a:srgbClr val="008000"/>
+                </a:solidFill>
+                <a:latin typeface="Consolas" panose="020B0609020204030204" pitchFamily="49" charset="0"/>
+              </a:rPr>
+              <a:t># </a:t>
+            </a:r>
+            <a:r>
+              <a:rPr lang="ko-KR" altLang="ko-KR" dirty="0" err="1">
+                <a:solidFill>
+                  <a:srgbClr val="008000"/>
+                </a:solidFill>
+                <a:latin typeface="Consolas" panose="020B0609020204030204" pitchFamily="49" charset="0"/>
+              </a:rPr>
+              <a:t>Z</a:t>
+            </a:r>
+            <a:r>
+              <a:rPr lang="ko-KR" altLang="ko-KR" dirty="0">
+                <a:solidFill>
+                  <a:srgbClr val="008000"/>
+                </a:solidFill>
+                <a:latin typeface="Consolas" panose="020B0609020204030204" pitchFamily="49" charset="0"/>
+              </a:rPr>
+              <a:t>- </a:t>
+            </a:r>
+            <a:r>
+              <a:rPr lang="ko-KR" altLang="ko-KR" dirty="0" err="1">
+                <a:solidFill>
+                  <a:srgbClr val="008000"/>
+                </a:solidFill>
+                <a:latin typeface="Consolas" panose="020B0609020204030204" pitchFamily="49" charset="0"/>
+              </a:rPr>
+              <a:t>Score</a:t>
+            </a:r>
+            <a:r>
+              <a:rPr lang="en-US" altLang="ko-KR" dirty="0">
+                <a:solidFill>
+                  <a:srgbClr val="008000"/>
+                </a:solidFill>
+                <a:latin typeface="Consolas" panose="020B0609020204030204" pitchFamily="49" charset="0"/>
+              </a:rPr>
+              <a:t> </a:t>
+            </a:r>
+            <a:r>
+              <a:rPr lang="ko-KR" altLang="en-US" dirty="0">
+                <a:solidFill>
+                  <a:srgbClr val="008000"/>
+                </a:solidFill>
+                <a:latin typeface="Consolas" panose="020B0609020204030204" pitchFamily="49" charset="0"/>
+              </a:rPr>
+              <a:t>계산</a:t>
+            </a:r>
+            <a:r>
+              <a:rPr lang="ko-KR" altLang="ko-KR" dirty="0">
+                <a:solidFill>
+                  <a:srgbClr val="008000"/>
+                </a:solidFill>
+                <a:latin typeface="Consolas" panose="020B0609020204030204" pitchFamily="49" charset="0"/>
+              </a:rPr>
+              <a:t> </a:t>
+            </a:r>
+            <a:endParaRPr lang="ko-KR" altLang="ko-KR" dirty="0">
+              <a:solidFill>
+                <a:srgbClr val="000000"/>
+              </a:solidFill>
+              <a:latin typeface="Consolas" panose="020B0609020204030204" pitchFamily="49" charset="0"/>
+            </a:endParaRPr>
+          </a:p>
+          <a:p>
+            <a:pPr>
+              <a:lnSpc>
+                <a:spcPts val="1425"/>
+              </a:lnSpc>
+              <a:buNone/>
+            </a:pPr>
+            <a:endParaRPr lang="ko-KR" altLang="ko-KR" b="0" dirty="0">
+              <a:solidFill>
+                <a:srgbClr val="000000"/>
+              </a:solidFill>
+              <a:effectLst/>
+              <a:latin typeface="Consolas" panose="020B0609020204030204" pitchFamily="49" charset="0"/>
+            </a:endParaRPr>
+          </a:p>
+          <a:p>
+            <a:pPr>
+              <a:lnSpc>
+                <a:spcPts val="1425"/>
+              </a:lnSpc>
+              <a:buNone/>
+            </a:pPr>
+            <a:r>
+              <a:rPr lang="ko-KR" altLang="ko-KR" b="0" dirty="0" err="1">
+                <a:solidFill>
+                  <a:srgbClr val="000000"/>
+                </a:solidFill>
+                <a:effectLst/>
+                <a:latin typeface="Consolas" panose="020B0609020204030204" pitchFamily="49" charset="0"/>
+              </a:rPr>
+              <a:t>df_z</a:t>
+            </a:r>
+            <a:r>
+              <a:rPr lang="ko-KR" altLang="ko-KR" b="0" dirty="0">
+                <a:solidFill>
+                  <a:srgbClr val="000000"/>
+                </a:solidFill>
+                <a:effectLst/>
+                <a:latin typeface="Consolas" panose="020B0609020204030204" pitchFamily="49" charset="0"/>
+              </a:rPr>
+              <a:t>[</a:t>
+            </a:r>
+            <a:r>
+              <a:rPr lang="ko-KR" altLang="ko-KR" b="0" dirty="0">
+                <a:solidFill>
+                  <a:srgbClr val="A31515"/>
+                </a:solidFill>
+                <a:effectLst/>
+                <a:latin typeface="Consolas" panose="020B0609020204030204" pitchFamily="49" charset="0"/>
+              </a:rPr>
+              <a:t>'</a:t>
+            </a:r>
+            <a:r>
+              <a:rPr lang="ko-KR" altLang="ko-KR" b="0" dirty="0" err="1">
+                <a:solidFill>
+                  <a:srgbClr val="A31515"/>
+                </a:solidFill>
+                <a:effectLst/>
+                <a:latin typeface="Consolas" panose="020B0609020204030204" pitchFamily="49" charset="0"/>
+              </a:rPr>
+              <a:t>z</a:t>
+            </a:r>
+            <a:r>
+              <a:rPr lang="ko-KR" altLang="ko-KR" b="0" dirty="0">
+                <a:solidFill>
+                  <a:srgbClr val="A31515"/>
+                </a:solidFill>
+                <a:effectLst/>
+                <a:latin typeface="Consolas" panose="020B0609020204030204" pitchFamily="49" charset="0"/>
+              </a:rPr>
+              <a:t>'</a:t>
+            </a:r>
+            <a:r>
+              <a:rPr lang="ko-KR" altLang="ko-KR" b="0" dirty="0">
+                <a:solidFill>
+                  <a:srgbClr val="000000"/>
+                </a:solidFill>
+                <a:effectLst/>
+                <a:latin typeface="Consolas" panose="020B0609020204030204" pitchFamily="49" charset="0"/>
+              </a:rPr>
+              <a:t>] = (</a:t>
+            </a:r>
+            <a:r>
+              <a:rPr lang="ko-KR" altLang="ko-KR" b="0" dirty="0" err="1">
+                <a:solidFill>
+                  <a:srgbClr val="000000"/>
+                </a:solidFill>
+                <a:effectLst/>
+                <a:latin typeface="Consolas" panose="020B0609020204030204" pitchFamily="49" charset="0"/>
+              </a:rPr>
+              <a:t>df_z</a:t>
+            </a:r>
+            <a:r>
+              <a:rPr lang="ko-KR" altLang="ko-KR" b="0" dirty="0">
+                <a:solidFill>
+                  <a:srgbClr val="000000"/>
+                </a:solidFill>
+                <a:effectLst/>
+                <a:latin typeface="Consolas" panose="020B0609020204030204" pitchFamily="49" charset="0"/>
+              </a:rPr>
+              <a:t>[</a:t>
+            </a:r>
+            <a:r>
+              <a:rPr lang="ko-KR" altLang="ko-KR" b="0" dirty="0">
+                <a:solidFill>
+                  <a:srgbClr val="A31515"/>
+                </a:solidFill>
+                <a:effectLst/>
+                <a:latin typeface="Consolas" panose="020B0609020204030204" pitchFamily="49" charset="0"/>
+              </a:rPr>
+              <a:t>'</a:t>
+            </a:r>
+            <a:r>
+              <a:rPr lang="ko-KR" altLang="ko-KR" b="0" dirty="0" err="1">
+                <a:solidFill>
+                  <a:srgbClr val="A31515"/>
+                </a:solidFill>
+                <a:effectLst/>
+                <a:latin typeface="Consolas" panose="020B0609020204030204" pitchFamily="49" charset="0"/>
+              </a:rPr>
+              <a:t>temperature_c</a:t>
+            </a:r>
+            <a:r>
+              <a:rPr lang="ko-KR" altLang="ko-KR" b="0" dirty="0">
+                <a:solidFill>
+                  <a:srgbClr val="A31515"/>
+                </a:solidFill>
+                <a:effectLst/>
+                <a:latin typeface="Consolas" panose="020B0609020204030204" pitchFamily="49" charset="0"/>
+              </a:rPr>
+              <a:t>'</a:t>
+            </a:r>
+            <a:r>
+              <a:rPr lang="ko-KR" altLang="ko-KR" b="0" dirty="0">
+                <a:solidFill>
+                  <a:srgbClr val="000000"/>
+                </a:solidFill>
+                <a:effectLst/>
+                <a:latin typeface="Consolas" panose="020B0609020204030204" pitchFamily="49" charset="0"/>
+              </a:rPr>
+              <a:t>] - </a:t>
+            </a:r>
+            <a:r>
+              <a:rPr lang="ko-KR" altLang="ko-KR" b="0" dirty="0" err="1">
+                <a:solidFill>
+                  <a:srgbClr val="000000"/>
+                </a:solidFill>
+                <a:effectLst/>
+                <a:latin typeface="Consolas" panose="020B0609020204030204" pitchFamily="49" charset="0"/>
+              </a:rPr>
+              <a:t>mean</a:t>
+            </a:r>
+            <a:r>
+              <a:rPr lang="ko-KR" altLang="ko-KR" b="0" dirty="0">
+                <a:solidFill>
+                  <a:srgbClr val="000000"/>
+                </a:solidFill>
+                <a:effectLst/>
+                <a:latin typeface="Consolas" panose="020B0609020204030204" pitchFamily="49" charset="0"/>
+              </a:rPr>
+              <a:t>) / </a:t>
+            </a:r>
+            <a:r>
+              <a:rPr lang="ko-KR" altLang="ko-KR" b="0" dirty="0" err="1">
+                <a:solidFill>
+                  <a:srgbClr val="000000"/>
+                </a:solidFill>
+                <a:effectLst/>
+                <a:latin typeface="Consolas" panose="020B0609020204030204" pitchFamily="49" charset="0"/>
+              </a:rPr>
+              <a:t>std</a:t>
+            </a:r>
+            <a:endParaRPr lang="en-US" altLang="ko-KR" b="0" dirty="0">
+              <a:solidFill>
+                <a:srgbClr val="000000"/>
+              </a:solidFill>
+              <a:effectLst/>
+              <a:latin typeface="Consolas" panose="020B0609020204030204" pitchFamily="49" charset="0"/>
+            </a:endParaRPr>
+          </a:p>
+          <a:p>
+            <a:pPr>
+              <a:lnSpc>
+                <a:spcPts val="1425"/>
+              </a:lnSpc>
+              <a:buNone/>
+            </a:pPr>
+            <a:endParaRPr lang="ko-KR" altLang="ko-KR" b="0" dirty="0">
+              <a:solidFill>
+                <a:srgbClr val="000000"/>
+              </a:solidFill>
+              <a:effectLst/>
+              <a:latin typeface="Consolas" panose="020B0609020204030204" pitchFamily="49" charset="0"/>
+            </a:endParaRPr>
+          </a:p>
+          <a:p>
+            <a:pPr>
+              <a:lnSpc>
+                <a:spcPts val="1425"/>
+              </a:lnSpc>
+              <a:buNone/>
+            </a:pPr>
+            <a:r>
+              <a:rPr lang="ko-KR" altLang="ko-KR" b="0" dirty="0" err="1">
+                <a:solidFill>
+                  <a:srgbClr val="000000"/>
+                </a:solidFill>
+                <a:effectLst/>
+                <a:latin typeface="Consolas" panose="020B0609020204030204" pitchFamily="49" charset="0"/>
+              </a:rPr>
+              <a:t>df_z_clean</a:t>
+            </a:r>
+            <a:r>
+              <a:rPr lang="ko-KR" altLang="ko-KR" b="0" dirty="0">
+                <a:solidFill>
+                  <a:srgbClr val="000000"/>
+                </a:solidFill>
+                <a:effectLst/>
+                <a:latin typeface="Consolas" panose="020B0609020204030204" pitchFamily="49" charset="0"/>
+              </a:rPr>
+              <a:t> = </a:t>
+            </a:r>
+            <a:r>
+              <a:rPr lang="ko-KR" altLang="ko-KR" b="0" dirty="0" err="1">
+                <a:solidFill>
+                  <a:srgbClr val="000000"/>
+                </a:solidFill>
+                <a:effectLst/>
+                <a:latin typeface="Consolas" panose="020B0609020204030204" pitchFamily="49" charset="0"/>
+              </a:rPr>
+              <a:t>df_z</a:t>
+            </a:r>
+            <a:r>
+              <a:rPr lang="ko-KR" altLang="ko-KR" b="0" dirty="0">
+                <a:solidFill>
+                  <a:srgbClr val="000000"/>
+                </a:solidFill>
+                <a:effectLst/>
+                <a:latin typeface="Consolas" panose="020B0609020204030204" pitchFamily="49" charset="0"/>
+              </a:rPr>
+              <a:t>[</a:t>
+            </a:r>
+            <a:r>
+              <a:rPr lang="ko-KR" altLang="ko-KR" b="0" dirty="0" err="1">
+                <a:solidFill>
+                  <a:srgbClr val="000000"/>
+                </a:solidFill>
+                <a:effectLst/>
+                <a:latin typeface="Consolas" panose="020B0609020204030204" pitchFamily="49" charset="0"/>
+              </a:rPr>
+              <a:t>df_z</a:t>
+            </a:r>
+            <a:r>
+              <a:rPr lang="ko-KR" altLang="ko-KR" b="0" dirty="0">
+                <a:solidFill>
+                  <a:srgbClr val="000000"/>
+                </a:solidFill>
+                <a:effectLst/>
+                <a:latin typeface="Consolas" panose="020B0609020204030204" pitchFamily="49" charset="0"/>
+              </a:rPr>
+              <a:t>[</a:t>
+            </a:r>
+            <a:r>
+              <a:rPr lang="ko-KR" altLang="ko-KR" b="0" dirty="0">
+                <a:solidFill>
+                  <a:srgbClr val="A31515"/>
+                </a:solidFill>
+                <a:effectLst/>
+                <a:latin typeface="Consolas" panose="020B0609020204030204" pitchFamily="49" charset="0"/>
+              </a:rPr>
+              <a:t>'</a:t>
+            </a:r>
+            <a:r>
+              <a:rPr lang="ko-KR" altLang="ko-KR" b="0" dirty="0" err="1">
+                <a:solidFill>
+                  <a:srgbClr val="A31515"/>
+                </a:solidFill>
+                <a:effectLst/>
+                <a:latin typeface="Consolas" panose="020B0609020204030204" pitchFamily="49" charset="0"/>
+              </a:rPr>
+              <a:t>z</a:t>
+            </a:r>
+            <a:r>
+              <a:rPr lang="ko-KR" altLang="ko-KR" b="0" dirty="0">
+                <a:solidFill>
+                  <a:srgbClr val="A31515"/>
+                </a:solidFill>
+                <a:effectLst/>
+                <a:latin typeface="Consolas" panose="020B0609020204030204" pitchFamily="49" charset="0"/>
+              </a:rPr>
+              <a:t>'</a:t>
+            </a:r>
+            <a:r>
+              <a:rPr lang="ko-KR" altLang="ko-KR" b="0" dirty="0">
+                <a:solidFill>
+                  <a:srgbClr val="000000"/>
+                </a:solidFill>
+                <a:effectLst/>
+                <a:latin typeface="Consolas" panose="020B0609020204030204" pitchFamily="49" charset="0"/>
+              </a:rPr>
+              <a:t>].</a:t>
+            </a:r>
+            <a:r>
+              <a:rPr lang="ko-KR" altLang="ko-KR" b="0" dirty="0" err="1">
+                <a:solidFill>
+                  <a:srgbClr val="000000"/>
+                </a:solidFill>
+                <a:effectLst/>
+                <a:latin typeface="Consolas" panose="020B0609020204030204" pitchFamily="49" charset="0"/>
+              </a:rPr>
+              <a:t>abs</a:t>
+            </a:r>
+            <a:r>
+              <a:rPr lang="ko-KR" altLang="ko-KR" b="0" dirty="0">
+                <a:solidFill>
+                  <a:srgbClr val="000000"/>
+                </a:solidFill>
+                <a:effectLst/>
+                <a:latin typeface="Consolas" panose="020B0609020204030204" pitchFamily="49" charset="0"/>
+              </a:rPr>
+              <a:t>() &lt;= </a:t>
+            </a:r>
+            <a:r>
+              <a:rPr lang="ko-KR" altLang="ko-KR" b="0" dirty="0">
+                <a:solidFill>
+                  <a:srgbClr val="098658"/>
+                </a:solidFill>
+                <a:effectLst/>
+                <a:latin typeface="Consolas" panose="020B0609020204030204" pitchFamily="49" charset="0"/>
+              </a:rPr>
+              <a:t>3</a:t>
+            </a:r>
+            <a:r>
+              <a:rPr lang="ko-KR" altLang="ko-KR" b="0" dirty="0">
+                <a:solidFill>
+                  <a:srgbClr val="000000"/>
+                </a:solidFill>
+                <a:effectLst/>
+                <a:latin typeface="Consolas" panose="020B0609020204030204" pitchFamily="49" charset="0"/>
+              </a:rPr>
+              <a:t>]</a:t>
+            </a:r>
+            <a:endParaRPr lang="en-US" altLang="ko-KR" b="0" dirty="0">
+              <a:solidFill>
+                <a:srgbClr val="000000"/>
+              </a:solidFill>
+              <a:effectLst/>
+              <a:latin typeface="Consolas" panose="020B0609020204030204" pitchFamily="49" charset="0"/>
+            </a:endParaRPr>
+          </a:p>
+          <a:p>
+            <a:pPr>
+              <a:lnSpc>
+                <a:spcPts val="1425"/>
+              </a:lnSpc>
+              <a:buNone/>
+            </a:pPr>
+            <a:r>
+              <a:rPr lang="en-US" altLang="ko-KR" b="0" dirty="0">
+                <a:solidFill>
+                  <a:srgbClr val="000000"/>
+                </a:solidFill>
+                <a:effectLst/>
+                <a:latin typeface="Consolas" panose="020B0609020204030204" pitchFamily="49" charset="0"/>
+              </a:rPr>
+              <a:t> </a:t>
+            </a:r>
+          </a:p>
+          <a:p>
+            <a:pPr>
+              <a:lnSpc>
+                <a:spcPts val="1425"/>
+              </a:lnSpc>
+              <a:buNone/>
+            </a:pPr>
+            <a:r>
+              <a:rPr lang="ko-KR" altLang="en-US" b="0" dirty="0">
+                <a:solidFill>
+                  <a:srgbClr val="FF0000"/>
+                </a:solidFill>
+                <a:effectLst/>
+                <a:latin typeface="Consolas" panose="020B0609020204030204" pitchFamily="49" charset="0"/>
+              </a:rPr>
+              <a:t>절대값 </a:t>
+            </a:r>
+            <a:r>
+              <a:rPr lang="en-US" altLang="ko-KR" b="0" dirty="0">
+                <a:solidFill>
+                  <a:srgbClr val="FF0000"/>
+                </a:solidFill>
+                <a:effectLst/>
+                <a:latin typeface="Consolas" panose="020B0609020204030204" pitchFamily="49" charset="0"/>
+              </a:rPr>
+              <a:t>3</a:t>
+            </a:r>
+            <a:r>
+              <a:rPr lang="ko-KR" altLang="en-US" b="0" dirty="0">
+                <a:solidFill>
+                  <a:srgbClr val="FF0000"/>
+                </a:solidFill>
+                <a:effectLst/>
+                <a:latin typeface="Consolas" panose="020B0609020204030204" pitchFamily="49" charset="0"/>
+              </a:rPr>
+              <a:t>이하 데이터만</a:t>
+            </a:r>
+            <a:endParaRPr lang="en-US" altLang="ko-KR" b="0" dirty="0">
+              <a:solidFill>
+                <a:srgbClr val="FF0000"/>
+              </a:solidFill>
+              <a:effectLst/>
+              <a:latin typeface="Consolas" panose="020B0609020204030204" pitchFamily="49" charset="0"/>
+            </a:endParaRPr>
+          </a:p>
+          <a:p>
+            <a:pPr>
+              <a:lnSpc>
+                <a:spcPts val="1425"/>
+              </a:lnSpc>
+              <a:buNone/>
+            </a:pPr>
+            <a:endParaRPr lang="en-US" altLang="ko-KR" b="0" dirty="0">
+              <a:solidFill>
+                <a:srgbClr val="000000"/>
+              </a:solidFill>
+              <a:effectLst/>
+              <a:latin typeface="Consolas" panose="020B0609020204030204" pitchFamily="49" charset="0"/>
+            </a:endParaRPr>
+          </a:p>
+          <a:p>
+            <a:pPr>
+              <a:lnSpc>
+                <a:spcPts val="1425"/>
+              </a:lnSpc>
+              <a:buNone/>
+            </a:pPr>
+            <a:endParaRPr lang="ko-KR" altLang="ko-KR" b="0" dirty="0">
+              <a:solidFill>
+                <a:srgbClr val="000000"/>
+              </a:solidFill>
+              <a:effectLst/>
+              <a:latin typeface="Consolas" panose="020B0609020204030204" pitchFamily="49" charset="0"/>
+            </a:endParaRPr>
+          </a:p>
+          <a:p>
+            <a:pPr>
+              <a:lnSpc>
+                <a:spcPts val="1425"/>
+              </a:lnSpc>
+              <a:buNone/>
+            </a:pPr>
+            <a:r>
+              <a:rPr lang="ko-KR" altLang="ko-KR" b="0" dirty="0" err="1">
+                <a:solidFill>
+                  <a:srgbClr val="000000"/>
+                </a:solidFill>
+                <a:effectLst/>
+                <a:latin typeface="Consolas" panose="020B0609020204030204" pitchFamily="49" charset="0"/>
+              </a:rPr>
               <a:t>print</a:t>
             </a:r>
             <a:r>
@@ -7807,6 +8687,28 @@
               </a:rPr>
               <a:t>))</a:t>
             </a:r>
+            <a:endParaRPr lang="en-US" altLang="ko-KR" b="0" dirty="0">
+              <a:solidFill>
+                <a:srgbClr val="000000"/>
+              </a:solidFill>
+              <a:effectLst/>
+              <a:latin typeface="Consolas" panose="020B0609020204030204" pitchFamily="49" charset="0"/>
+            </a:endParaRPr>
+          </a:p>
+          <a:p>
+            <a:pPr>
+              <a:lnSpc>
+                <a:spcPts val="1425"/>
+              </a:lnSpc>
+              <a:buNone/>
+            </a:pPr>
+            <a:endParaRPr lang="ko-KR" altLang="ko-KR" b="0" dirty="0">
+              <a:solidFill>
+                <a:srgbClr val="000000"/>
+              </a:solidFill>
+              <a:effectLst/>
+              <a:latin typeface="Consolas" panose="020B0609020204030204" pitchFamily="49" charset="0"/>
+            </a:endParaRPr>
           </a:p>
           <a:p>
             <a:pPr>
@@ -8042,8 +8944,44 @@
         </p:blipFill>
         <p:spPr>
           <a:xfrm>
-            <a:off x="2828469" y="3152736"/>
+            <a:off x="3086164" y="5014786"/>
             <a:ext cx="6535062" cy="552527"/>
+          </a:xfrm>
+          <a:prstGeom prst="rect">
+            <a:avLst/>
+          </a:prstGeom>
+        </p:spPr>
+      </p:pic>
+      <p:pic>
+        <p:nvPicPr>
+          <p:cNvPr id="4" name="그림 3">
+            <a:extLst>
+              <a:ext uri="{FF2B5EF4-FFF2-40B4-BE49-F238E27FC236}">
+                <a16:creationId xmlns:a16="http://schemas.microsoft.com/office/drawing/2014/main" id="{A9A51A3B-B220-175A-F45E-0FF1E6FCC4BD}"/>
+              </a:ext>
+            </a:extLst>
+          </p:cNvPr>
+          <p:cNvPicPr>
+            <a:picLocks noChangeAspect="1"/>
+          </p:cNvPicPr>
+          <p:nvPr/>
+        </p:nvPicPr>
+        <p:blipFill>
+          <a:blip r:embed="rId3">
+            <a:extLst>
+              <a:ext uri="{28A0092B-C50C-407E-A947-70E740481C1C}">
+                <a14:useLocalDpi xmlns:a14="http://schemas.microsoft.com/office/drawing/2010/main" val="0"/>
+              </a:ext>
+            </a:extLst>
+          </a:blip>
+          <a:stretch>
+            <a:fillRect/>
+          </a:stretch>
+        </p:blipFill>
+        <p:spPr>
+          <a:xfrm flipH="1">
+            <a:off x="438560" y="4112376"/>
+            <a:ext cx="2132214" cy="1066107"/>
           </a:xfrm>
           <a:prstGeom prst="rect">
             <a:avLst/>
@@ -8063,7 +9001,7 @@
 </p:sld>
 </file>
 
-<file path=ppt/slides/slide13.xml><?xml version="1.0" encoding="utf-8"?>
+<file path=ppt/slides/slide14.xml><?xml version="1.0" encoding="utf-8"?>
 <p:sld xmlns:a="http://schemas.openxmlformats.org/drawingml/2006/main" xmlns:r="http://schemas.openxmlformats.org/officeDocument/2006/relationships" xmlns:p="http://schemas.openxmlformats.org/presentationml/2006/main">
   <p:cSld>
     <p:spTree>
@@ -8100,8 +9038,8 @@
         </p:nvSpPr>
         <p:spPr>
           <a:xfrm>
-            <a:off x="1484670" y="486191"/>
-            <a:ext cx="8790039" cy="4236160"/>
+            <a:off x="141316" y="143934"/>
+            <a:ext cx="10399222" cy="6570132"/>
           </a:xfrm>
           <a:prstGeom prst="rect">
             <a:avLst/>
@@ -8190,6 +9128,21 @@
               </a:rPr>
               <a:t>plt</a:t>
             </a:r>
+            <a:endParaRPr lang="en-US" altLang="ko-KR" b="0" dirty="0">
+              <a:solidFill>
+                <a:srgbClr val="000000"/>
+              </a:solidFill>
+              <a:effectLst/>
+              <a:latin typeface="Consolas" panose="020B0609020204030204" pitchFamily="49" charset="0"/>
+            </a:endParaRPr>
+          </a:p>
+          <a:p>
+            <a:pPr>
+              <a:lnSpc>
+                <a:spcPts val="1425"/>
+              </a:lnSpc>
+              <a:buNone/>
+            </a:pPr>
             <a:endParaRPr lang="ko-KR" altLang="ko-KR" b="0" dirty="0">
               <a:solidFill>
                 <a:srgbClr val="000000"/>
@@ -8215,6 +9168,21 @@
               </a:rPr>
               <a:t># 시각화로 이상치 확인</a:t>
             </a:r>
+            <a:endParaRPr lang="en-US" altLang="ko-KR" b="0" dirty="0">
+              <a:solidFill>
+                <a:srgbClr val="008000"/>
+              </a:solidFill>
+              <a:effectLst/>
+              <a:latin typeface="Consolas" panose="020B0609020204030204" pitchFamily="49" charset="0"/>
+            </a:endParaRPr>
+          </a:p>
+          <a:p>
+            <a:pPr>
+              <a:lnSpc>
+                <a:spcPts val="1425"/>
+              </a:lnSpc>
+              <a:buNone/>
+            </a:pPr>
             <a:endParaRPr lang="ko-KR" altLang="ko-KR" b="0" dirty="0">
               <a:solidFill>
                 <a:srgbClr val="000000"/>
@@ -8300,6 +9268,36 @@
               </a:rPr>
               <a:t>plt</a:t>
             </a:r>
+            <a:endParaRPr lang="en-US" altLang="ko-KR" b="0" dirty="0">
+              <a:solidFill>
+                <a:srgbClr val="000000"/>
+              </a:solidFill>
+              <a:effectLst/>
+              <a:latin typeface="Consolas" panose="020B0609020204030204" pitchFamily="49" charset="0"/>
+            </a:endParaRPr>
+          </a:p>
+          <a:p>
+            <a:pPr>
+              <a:lnSpc>
+                <a:spcPts val="1425"/>
+              </a:lnSpc>
+              <a:buNone/>
+            </a:pPr>
+            <a:endParaRPr lang="en-US" altLang="ko-KR" b="0" dirty="0">
+              <a:solidFill>
+                <a:srgbClr val="000000"/>
+              </a:solidFill>
+              <a:effectLst/>
+              <a:latin typeface="Consolas" panose="020B0609020204030204" pitchFamily="49" charset="0"/>
+            </a:endParaRPr>
+          </a:p>
+          <a:p>
+            <a:pPr>
+              <a:lnSpc>
+                <a:spcPts val="1425"/>
+              </a:lnSpc>
+              <a:buNone/>
+            </a:pPr>
             <a:endParaRPr lang="ko-KR" altLang="ko-KR" b="0" dirty="0">
               <a:solidFill>
                 <a:srgbClr val="000000"/>
@@ -8345,6 +9343,21 @@
               </a:rPr>
               <a:t> 이상치가 점으로 튀어나옴</a:t>
             </a:r>
+            <a:endParaRPr lang="en-US" altLang="ko-KR" b="0" dirty="0">
+              <a:solidFill>
+                <a:srgbClr val="008000"/>
+              </a:solidFill>
+              <a:effectLst/>
+              <a:latin typeface="Consolas" panose="020B0609020204030204" pitchFamily="49" charset="0"/>
+            </a:endParaRPr>
+          </a:p>
+          <a:p>
+            <a:pPr>
+              <a:lnSpc>
+                <a:spcPts val="1425"/>
+              </a:lnSpc>
+              <a:buNone/>
+            </a:pPr>
             <a:endParaRPr lang="ko-KR" altLang="ko-KR" b="0" dirty="0">
               <a:solidFill>
                 <a:srgbClr val="000000"/>
@@ -8428,7 +9441,7 @@
                 <a:effectLst/>
                 <a:latin typeface="Consolas" panose="020B0609020204030204" pitchFamily="49" charset="0"/>
               </a:rPr>
-              <a:t>'</a:t>
+              <a:t>’</a:t>
             </a:r>
             <a:r>
               <a:rPr lang="ko-KR" altLang="ko-KR" b="0" dirty="0">
@@ -8440,6 +9453,13 @@
               </a:rPr>
               <a:t>)</a:t>
             </a:r>
+            <a:endParaRPr lang="en-US" altLang="ko-KR" b="0" dirty="0">
+              <a:solidFill>
+                <a:srgbClr val="000000"/>
+              </a:solidFill>
+              <a:effectLst/>
+              <a:latin typeface="Consolas" panose="020B0609020204030204" pitchFamily="49" charset="0"/>
+            </a:endParaRPr>
           </a:p>
           <a:p>
             <a:pPr>
@@ -8448,6 +9468,21 @@
               </a:lnSpc>
               <a:buNone/>
             </a:pPr>
+            <a:endParaRPr lang="ko-KR" altLang="ko-KR" b="0" dirty="0">
+              <a:solidFill>
+                <a:srgbClr val="000000"/>
+              </a:solidFill>
+              <a:effectLst/>
+              <a:latin typeface="Consolas" panose="020B0609020204030204" pitchFamily="49" charset="0"/>
+            </a:endParaRPr>
+          </a:p>
+          <a:p>
+            <a:pPr>
+              <a:lnSpc>
+                <a:spcPts val="1425"/>
+              </a:lnSpc>
+              <a:buNone/>
+            </a:pPr>
             <a:r>
               <a:rPr lang="ko-KR" altLang="ko-KR" b="0" dirty="0" err="1">
                 <a:solidFill>
@@ -8516,7 +9551,7 @@
                 <a:effectLst/>
                 <a:latin typeface="Consolas" panose="020B0609020204030204" pitchFamily="49" charset="0"/>
               </a:rPr>
-              <a:t>'</a:t>
+              <a:t>’</a:t>
             </a:r>
             <a:r>
               <a:rPr lang="ko-KR" altLang="ko-KR" b="0" dirty="0">
@@ -8528,6 +9563,28 @@
               </a:rPr>
               <a:t>)</a:t>
             </a:r>
+            <a:endParaRPr lang="en-US" altLang="ko-KR" b="0" dirty="0">
+              <a:solidFill>
+                <a:srgbClr val="000000"/>
+              </a:solidFill>
+              <a:effectLst/>
+              <a:latin typeface="Consolas" panose="020B0609020204030204" pitchFamily="49" charset="0"/>
+            </a:endParaRPr>
+          </a:p>
+          <a:p>
+            <a:pPr>
+              <a:lnSpc>
+                <a:spcPts val="1425"/>
+              </a:lnSpc>
+              <a:buNone/>
+            </a:pPr>
+            <a:endParaRPr lang="ko-KR" altLang="ko-KR" b="0" dirty="0">
+              <a:solidFill>
+                <a:srgbClr val="000000"/>
+              </a:solidFill>
+              <a:effectLst/>
+              <a:latin typeface="Consolas" panose="020B0609020204030204" pitchFamily="49" charset="0"/>
+            </a:endParaRPr>
           </a:p>
           <a:p>
             <a:pPr>
@@ -8605,7 +9662,27 @@
                 <a:effectLst/>
                 <a:latin typeface="Consolas" panose="020B0609020204030204" pitchFamily="49" charset="0"/>
               </a:rPr>
-              <a:t>#시계열 선 그래프 9999 지점 위로 솟구침 </a:t>
+              <a:t>#시계열 선 그래프 </a:t>
+            </a:r>
+            <a:r>
+              <a:rPr lang="en-US" altLang="ko-KR" b="0" dirty="0">
+                <a:solidFill>
+                  <a:srgbClr val="008000"/>
+                </a:solidFill>
+                <a:effectLst/>
+                <a:latin typeface="Consolas" panose="020B0609020204030204" pitchFamily="49" charset="0"/>
+              </a:rPr>
+              <a:t>45</a:t>
+            </a:r>
+            <a:r>
+              <a:rPr lang="ko-KR" altLang="ko-KR" b="0" dirty="0">
+                <a:solidFill>
+                  <a:srgbClr val="008000"/>
+                </a:solidFill>
+                <a:effectLst/>
+                <a:latin typeface="Consolas" panose="020B0609020204030204" pitchFamily="49" charset="0"/>
+              </a:rPr>
+              <a:t> 지점 위로 솟구침 </a:t>
             </a:r>
             <a:endParaRPr lang="ko-KR" altLang="ko-KR" b="0" dirty="0">
               <a:solidFill>
@@ -8770,7 +9847,7 @@
                 <a:effectLst/>
                 <a:latin typeface="Consolas" panose="020B0609020204030204" pitchFamily="49" charset="0"/>
               </a:rPr>
-              <a:t>'</a:t>
+              <a:t>’</a:t>
             </a:r>
             <a:r>
               <a:rPr lang="ko-KR" altLang="ko-KR" b="0" dirty="0">
@@ -8782,6 +9859,13 @@
               </a:rPr>
               <a:t>)</a:t>
             </a:r>
+            <a:endParaRPr lang="en-US" altLang="ko-KR" b="0" dirty="0">
+              <a:solidFill>
+                <a:srgbClr val="000000"/>
+              </a:solidFill>
+              <a:effectLst/>
+              <a:latin typeface="Consolas" panose="020B0609020204030204" pitchFamily="49" charset="0"/>
+            </a:endParaRPr>
           </a:p>
           <a:p>
             <a:pPr>
@@ -8790,66 +9874,13 @@
               </a:lnSpc>
               <a:buNone/>
             </a:pPr>
-            <a:r>
-              <a:rPr lang="ko-KR" altLang="ko-KR" b="0" dirty="0" err="1">
-                <a:solidFill>
-                  <a:srgbClr val="000000"/>
-                </a:solidFill>
-                <a:effectLst/>
-                <a:latin typeface="Consolas" panose="020B0609020204030204" pitchFamily="49" charset="0"/>
-              </a:rPr>
-              <a:t>plt.xlabel</a:t>
-            </a:r>
-            <a:r>
-              <a:rPr lang="ko-KR" altLang="ko-KR" b="0" dirty="0">
-                <a:solidFill>
-                  <a:srgbClr val="000000"/>
-                </a:solidFill>
-                <a:effectLst/>
-                <a:latin typeface="Consolas" panose="020B0609020204030204" pitchFamily="49" charset="0"/>
-              </a:rPr>
-              <a:t>(</a:t>
-            </a:r>
-            <a:r>
-              <a:rPr lang="ko-KR" altLang="ko-KR" b="0" dirty="0">
-                <a:solidFill>
-                  <a:srgbClr val="A31515"/>
-                </a:solidFill>
-                <a:effectLst/>
-                <a:latin typeface="Consolas" panose="020B0609020204030204" pitchFamily="49" charset="0"/>
-              </a:rPr>
-              <a:t>'</a:t>
-            </a:r>
-            <a:r>
-              <a:rPr lang="ko-KR" altLang="ko-KR" b="0" dirty="0" err="1">
-                <a:solidFill>
-                  <a:srgbClr val="A31515"/>
-                </a:solidFill>
-                <a:effectLst/>
-                <a:latin typeface="Consolas" panose="020B0609020204030204" pitchFamily="49" charset="0"/>
-              </a:rPr>
-              <a:t>Index</a:t>
-            </a:r>
-            <a:r>
-              <a:rPr lang="ko-KR" altLang="ko-KR" b="0" dirty="0">
-                <a:solidFill>
-                  <a:srgbClr val="A31515"/>
-                </a:solidFill>
-                <a:effectLst/>
-                <a:latin typeface="Consolas" panose="020B0609020204030204" pitchFamily="49" charset="0"/>
-              </a:rPr>
-              <a:t>'</a:t>
-            </a:r>
-            <a:r>
-              <a:rPr lang="ko-KR" altLang="ko-KR" b="0" dirty="0">
-                <a:solidFill>
-                  <a:srgbClr val="000000"/>
-                </a:solidFill>
-                <a:effectLst/>
-                <a:latin typeface="Consolas" panose="020B0609020204030204" pitchFamily="49" charset="0"/>
-              </a:rPr>
-              <a:t>)</a:t>
-            </a:r>
+            <a:endParaRPr lang="ko-KR" altLang="ko-KR" b="0" dirty="0">
+              <a:solidFill>
+                <a:srgbClr val="000000"/>
+              </a:solidFill>
+              <a:effectLst/>
+              <a:latin typeface="Consolas" panose="020B0609020204030204" pitchFamily="49" charset="0"/>
+            </a:endParaRPr>
           </a:p>
           <a:p>
             <a:pPr>
@@ -8866,6 +9897,96 @@
                 <a:effectLst/>
                 <a:latin typeface="Consolas" panose="020B0609020204030204" pitchFamily="49" charset="0"/>
               </a:rPr>
+              <a:t>plt.xlabel</a:t>
+            </a:r>
+            <a:r>
+              <a:rPr lang="ko-KR" altLang="ko-KR" b="0" dirty="0">
+                <a:solidFill>
+                  <a:srgbClr val="000000"/>
+                </a:solidFill>
+                <a:effectLst/>
+                <a:latin typeface="Consolas" panose="020B0609020204030204" pitchFamily="49" charset="0"/>
+              </a:rPr>
+              <a:t>(</a:t>
+            </a:r>
+            <a:r>
+              <a:rPr lang="ko-KR" altLang="ko-KR" b="0" dirty="0">
+                <a:solidFill>
+                  <a:srgbClr val="A31515"/>
+                </a:solidFill>
+                <a:effectLst/>
+                <a:latin typeface="Consolas" panose="020B0609020204030204" pitchFamily="49" charset="0"/>
+              </a:rPr>
+              <a:t>'</a:t>
+            </a:r>
+            <a:r>
+              <a:rPr lang="ko-KR" altLang="ko-KR" b="0" dirty="0" err="1">
+                <a:solidFill>
+                  <a:srgbClr val="A31515"/>
+                </a:solidFill>
+                <a:effectLst/>
+                <a:latin typeface="Consolas" panose="020B0609020204030204" pitchFamily="49" charset="0"/>
+              </a:rPr>
+              <a:t>Index</a:t>
+            </a:r>
+            <a:r>
+              <a:rPr lang="ko-KR" altLang="ko-KR" b="0" dirty="0">
+                <a:solidFill>
+                  <a:srgbClr val="A31515"/>
+                </a:solidFill>
+                <a:effectLst/>
+                <a:latin typeface="Consolas" panose="020B0609020204030204" pitchFamily="49" charset="0"/>
+              </a:rPr>
+              <a:t>’</a:t>
+            </a:r>
+            <a:r>
+              <a:rPr lang="ko-KR" altLang="ko-KR" b="0" dirty="0">
+                <a:solidFill>
+                  <a:srgbClr val="000000"/>
+                </a:solidFill>
+                <a:effectLst/>
+                <a:latin typeface="Consolas" panose="020B0609020204030204" pitchFamily="49" charset="0"/>
+              </a:rPr>
+              <a:t>)</a:t>
+            </a:r>
+            <a:endParaRPr lang="en-US" altLang="ko-KR" b="0" dirty="0">
+              <a:solidFill>
+                <a:srgbClr val="000000"/>
+              </a:solidFill>
+              <a:effectLst/>
+              <a:latin typeface="Consolas" panose="020B0609020204030204" pitchFamily="49" charset="0"/>
+            </a:endParaRPr>
+          </a:p>
+          <a:p>
+            <a:pPr>
+              <a:lnSpc>
+                <a:spcPts val="1425"/>
+              </a:lnSpc>
+              <a:buNone/>
+            </a:pPr>
+            <a:endParaRPr lang="ko-KR" altLang="ko-KR" b="0" dirty="0">
+              <a:solidFill>
+                <a:srgbClr val="000000"/>
+              </a:solidFill>
+              <a:effectLst/>
+              <a:latin typeface="Consolas" panose="020B0609020204030204" pitchFamily="49" charset="0"/>
+            </a:endParaRPr>
+          </a:p>
+          <a:p>
+            <a:pPr>
+              <a:lnSpc>
+                <a:spcPts val="1425"/>
+              </a:lnSpc>
+              <a:buNone/>
+            </a:pPr>
+            <a:r>
+              <a:rPr lang="ko-KR" altLang="ko-KR" b="0" dirty="0" err="1">
+                <a:solidFill>
+                  <a:srgbClr val="000000"/>
+                </a:solidFill>
+                <a:effectLst/>
+                <a:latin typeface="Consolas" panose="020B0609020204030204" pitchFamily="49" charset="0"/>
+              </a:rPr>
               <a:t>plt.ylabel</a:t>
             </a:r>
             <a:r>
@@ -8906,7 +10027,7 @@
                 <a:effectLst/>
                 <a:latin typeface="Consolas" panose="020B0609020204030204" pitchFamily="49" charset="0"/>
               </a:rPr>
-              <a:t> (C)'</a:t>
+              <a:t> (C)’</a:t>
             </a:r>
             <a:r>
               <a:rPr lang="ko-KR" altLang="ko-KR" b="0" dirty="0">
@@ -8918,6 +10039,28 @@
               </a:rPr>
               <a:t>)</a:t>
             </a:r>
+            <a:endParaRPr lang="en-US" altLang="ko-KR" b="0" dirty="0">
+              <a:solidFill>
+                <a:srgbClr val="000000"/>
+              </a:solidFill>
+              <a:effectLst/>
+              <a:latin typeface="Consolas" panose="020B0609020204030204" pitchFamily="49" charset="0"/>
+            </a:endParaRPr>
+          </a:p>
+          <a:p>
+            <a:pPr>
+              <a:lnSpc>
+                <a:spcPts val="1425"/>
+              </a:lnSpc>
+              <a:buNone/>
+            </a:pPr>
+            <a:endParaRPr lang="ko-KR" altLang="ko-KR" b="0" dirty="0">
+              <a:solidFill>
+                <a:srgbClr val="000000"/>
+              </a:solidFill>
+              <a:effectLst/>
+              <a:latin typeface="Consolas" panose="020B0609020204030204" pitchFamily="49" charset="0"/>
+            </a:endParaRPr>
           </a:p>
           <a:p>
             <a:pPr>
@@ -9191,7 +10334,7 @@
                 <a:effectLst/>
                 <a:latin typeface="Consolas" panose="020B0609020204030204" pitchFamily="49" charset="0"/>
               </a:rPr>
-              <a:t>)'</a:t>
+              <a:t>)’</a:t>
             </a:r>
             <a:r>
               <a:rPr lang="ko-KR" altLang="ko-KR" b="0" dirty="0">
@@ -9203,6 +10346,13 @@
               </a:rPr>
               <a:t>)</a:t>
             </a:r>
+            <a:endParaRPr lang="en-US" altLang="ko-KR" b="0" dirty="0">
+              <a:solidFill>
+                <a:srgbClr val="000000"/>
+              </a:solidFill>
+              <a:effectLst/>
+              <a:latin typeface="Consolas" panose="020B0609020204030204" pitchFamily="49" charset="0"/>
+            </a:endParaRPr>
           </a:p>
           <a:p>
             <a:pPr>
@@ -9211,66 +10361,13 @@
               </a:lnSpc>
               <a:buNone/>
             </a:pPr>
-            <a:r>
-              <a:rPr lang="ko-KR" altLang="ko-KR" b="0" dirty="0" err="1">
-                <a:solidFill>
-                  <a:srgbClr val="000000"/>
-                </a:solidFill>
-                <a:effectLst/>
-                <a:latin typeface="Consolas" panose="020B0609020204030204" pitchFamily="49" charset="0"/>
-              </a:rPr>
-              <a:t>plt.xlabel</a:t>
-            </a:r>
-            <a:r>
-              <a:rPr lang="ko-KR" altLang="ko-KR" b="0" dirty="0">
-                <a:solidFill>
-                  <a:srgbClr val="000000"/>
-                </a:solidFill>
-                <a:effectLst/>
-                <a:latin typeface="Consolas" panose="020B0609020204030204" pitchFamily="49" charset="0"/>
-              </a:rPr>
-              <a:t>(</a:t>
-            </a:r>
-            <a:r>
-              <a:rPr lang="ko-KR" altLang="ko-KR" b="0" dirty="0">
-                <a:solidFill>
-                  <a:srgbClr val="A31515"/>
-                </a:solidFill>
-                <a:effectLst/>
-                <a:latin typeface="Consolas" panose="020B0609020204030204" pitchFamily="49" charset="0"/>
-              </a:rPr>
-              <a:t>'</a:t>
-            </a:r>
-            <a:r>
-              <a:rPr lang="ko-KR" altLang="ko-KR" b="0" dirty="0" err="1">
-                <a:solidFill>
-                  <a:srgbClr val="A31515"/>
-                </a:solidFill>
-                <a:effectLst/>
-                <a:latin typeface="Consolas" panose="020B0609020204030204" pitchFamily="49" charset="0"/>
-              </a:rPr>
-              <a:t>Index</a:t>
-            </a:r>
-            <a:r>
-              <a:rPr lang="ko-KR" altLang="ko-KR" b="0" dirty="0">
-                <a:solidFill>
-                  <a:srgbClr val="A31515"/>
-                </a:solidFill>
-                <a:effectLst/>
-                <a:latin typeface="Consolas" panose="020B0609020204030204" pitchFamily="49" charset="0"/>
-              </a:rPr>
-              <a:t>'</a:t>
-            </a:r>
-            <a:r>
-              <a:rPr lang="ko-KR" altLang="ko-KR" b="0" dirty="0">
-                <a:solidFill>
-                  <a:srgbClr val="000000"/>
-                </a:solidFill>
-                <a:effectLst/>
-                <a:latin typeface="Consolas" panose="020B0609020204030204" pitchFamily="49" charset="0"/>
-              </a:rPr>
-              <a:t>)</a:t>
-            </a:r>
+            <a:endParaRPr lang="ko-KR" altLang="ko-KR" b="0" dirty="0">
+              <a:solidFill>
+                <a:srgbClr val="000000"/>
+              </a:solidFill>
+              <a:effectLst/>
+              <a:latin typeface="Consolas" panose="020B0609020204030204" pitchFamily="49" charset="0"/>
+            </a:endParaRPr>
           </a:p>
           <a:p>
             <a:pPr>
@@ -9287,6 +10384,96 @@
                 <a:effectLst/>
                 <a:latin typeface="Consolas" panose="020B0609020204030204" pitchFamily="49" charset="0"/>
               </a:rPr>
+              <a:t>plt.xlabel</a:t>
+            </a:r>
+            <a:r>
+              <a:rPr lang="ko-KR" altLang="ko-KR" b="0" dirty="0">
+                <a:solidFill>
+                  <a:srgbClr val="000000"/>
+                </a:solidFill>
+                <a:effectLst/>
+                <a:latin typeface="Consolas" panose="020B0609020204030204" pitchFamily="49" charset="0"/>
+              </a:rPr>
+              <a:t>(</a:t>
+            </a:r>
+            <a:r>
+              <a:rPr lang="ko-KR" altLang="ko-KR" b="0" dirty="0">
+                <a:solidFill>
+                  <a:srgbClr val="A31515"/>
+                </a:solidFill>
+                <a:effectLst/>
+                <a:latin typeface="Consolas" panose="020B0609020204030204" pitchFamily="49" charset="0"/>
+              </a:rPr>
+              <a:t>'</a:t>
+            </a:r>
+            <a:r>
+              <a:rPr lang="ko-KR" altLang="ko-KR" b="0" dirty="0" err="1">
+                <a:solidFill>
+                  <a:srgbClr val="A31515"/>
+                </a:solidFill>
+                <a:effectLst/>
+                <a:latin typeface="Consolas" panose="020B0609020204030204" pitchFamily="49" charset="0"/>
+              </a:rPr>
+              <a:t>Index</a:t>
+            </a:r>
+            <a:r>
+              <a:rPr lang="ko-KR" altLang="ko-KR" b="0" dirty="0">
+                <a:solidFill>
+                  <a:srgbClr val="A31515"/>
+                </a:solidFill>
+                <a:effectLst/>
+                <a:latin typeface="Consolas" panose="020B0609020204030204" pitchFamily="49" charset="0"/>
+              </a:rPr>
+              <a:t>’</a:t>
+            </a:r>
+            <a:r>
+              <a:rPr lang="ko-KR" altLang="ko-KR" b="0" dirty="0">
+                <a:solidFill>
+                  <a:srgbClr val="000000"/>
+                </a:solidFill>
+                <a:effectLst/>
+                <a:latin typeface="Consolas" panose="020B0609020204030204" pitchFamily="49" charset="0"/>
+              </a:rPr>
+              <a:t>)</a:t>
+            </a:r>
+            <a:endParaRPr lang="en-US" altLang="ko-KR" b="0" dirty="0">
+              <a:solidFill>
+                <a:srgbClr val="000000"/>
+              </a:solidFill>
+              <a:effectLst/>
+              <a:latin typeface="Consolas" panose="020B0609020204030204" pitchFamily="49" charset="0"/>
+            </a:endParaRPr>
+          </a:p>
+          <a:p>
+            <a:pPr>
+              <a:lnSpc>
+                <a:spcPts val="1425"/>
+              </a:lnSpc>
+              <a:buNone/>
+            </a:pPr>
+            <a:endParaRPr lang="ko-KR" altLang="ko-KR" b="0" dirty="0">
+              <a:solidFill>
+                <a:srgbClr val="000000"/>
+              </a:solidFill>
+              <a:effectLst/>
+              <a:latin typeface="Consolas" panose="020B0609020204030204" pitchFamily="49" charset="0"/>
+            </a:endParaRPr>
+          </a:p>
+          <a:p>
+            <a:pPr>
+              <a:lnSpc>
+                <a:spcPts val="1425"/>
+              </a:lnSpc>
+              <a:buNone/>
+            </a:pPr>
+            <a:r>
+              <a:rPr lang="ko-KR" altLang="ko-KR" b="0" dirty="0" err="1">
+                <a:solidFill>
+                  <a:srgbClr val="000000"/>
+                </a:solidFill>
+                <a:effectLst/>
+                <a:latin typeface="Consolas" panose="020B0609020204030204" pitchFamily="49" charset="0"/>
+              </a:rPr>
               <a:t>plt.ylabel</a:t>
             </a:r>
             <a:r>
@@ -9327,7 +10514,7 @@
                 <a:effectLst/>
                 <a:latin typeface="Consolas" panose="020B0609020204030204" pitchFamily="49" charset="0"/>
               </a:rPr>
-              <a:t> (C)'</a:t>
+              <a:t> (C)’</a:t>
             </a:r>
             <a:r>
               <a:rPr lang="ko-KR" altLang="ko-KR" b="0" dirty="0">
@@ -9339,6 +10526,28 @@
               </a:rPr>
               <a:t>)</a:t>
             </a:r>
+            <a:endParaRPr lang="en-US" altLang="ko-KR" b="0" dirty="0">
+              <a:solidFill>
+                <a:srgbClr val="000000"/>
+              </a:solidFill>
+              <a:effectLst/>
+              <a:latin typeface="Consolas" panose="020B0609020204030204" pitchFamily="49" charset="0"/>
+            </a:endParaRPr>
+          </a:p>
+          <a:p>
+            <a:pPr>
+              <a:lnSpc>
+                <a:spcPts val="1425"/>
+              </a:lnSpc>
+              <a:buNone/>
+            </a:pPr>
+            <a:endParaRPr lang="ko-KR" altLang="ko-KR" b="0" dirty="0">
+              <a:solidFill>
+                <a:srgbClr val="000000"/>
+              </a:solidFill>
+              <a:effectLst/>
+              <a:latin typeface="Consolas" panose="020B0609020204030204" pitchFamily="49" charset="0"/>
+            </a:endParaRPr>
           </a:p>
           <a:p>
             <a:pPr>
@@ -9383,7 +10592,7 @@
 </p:sld>
 </file>
 
-<file path=ppt/slides/slide14.xml><?xml version="1.0" encoding="utf-8"?>
+<file path=ppt/slides/slide15.xml><?xml version="1.0" encoding="utf-8"?>
 <p:sld xmlns:a="http://schemas.openxmlformats.org/drawingml/2006/main" xmlns:r="http://schemas.openxmlformats.org/officeDocument/2006/relationships" xmlns:p="http://schemas.openxmlformats.org/presentationml/2006/main">
   <p:cSld>
     <p:spTree>
@@ -9449,7 +10658,7 @@
 </p:sld>
 </file>
 
-<file path=ppt/slides/slide15.xml><?xml version="1.0" encoding="utf-8"?>
+<file path=ppt/slides/slide16.xml><?xml version="1.0" encoding="utf-8"?>
 <p:sld xmlns:a="http://schemas.openxmlformats.org/drawingml/2006/main" xmlns:r="http://schemas.openxmlformats.org/officeDocument/2006/relationships" xmlns:p="http://schemas.openxmlformats.org/presentationml/2006/main">
   <p:cSld>
     <p:spTree>
@@ -9515,7 +10724,7 @@
 </p:sld>
 </file>
 
-<file path=ppt/slides/slide16.xml><?xml version="1.0" encoding="utf-8"?>
+<file path=ppt/slides/slide17.xml><?xml version="1.0" encoding="utf-8"?>
 <p:sld xmlns:a="http://schemas.openxmlformats.org/drawingml/2006/main" xmlns:r="http://schemas.openxmlformats.org/officeDocument/2006/relationships" xmlns:p="http://schemas.openxmlformats.org/presentationml/2006/main">
   <p:cSld>
     <p:spTree>
@@ -9552,8 +10761,8 @@
         </p:nvSpPr>
         <p:spPr>
           <a:xfrm>
-            <a:off x="1337186" y="772995"/>
-            <a:ext cx="8357419" cy="2620333"/>
+            <a:off x="374073" y="270058"/>
+            <a:ext cx="11330247" cy="4774769"/>
           </a:xfrm>
           <a:prstGeom prst="rect">
             <a:avLst/>
@@ -9582,6 +10791,21 @@
               </a:rPr>
               <a:t># 중복 행 제거 </a:t>
             </a:r>
+            <a:endParaRPr lang="en-US" altLang="ko-KR" b="0" dirty="0">
+              <a:solidFill>
+                <a:srgbClr val="008000"/>
+              </a:solidFill>
+              <a:effectLst/>
+              <a:latin typeface="Consolas" panose="020B0609020204030204" pitchFamily="49" charset="0"/>
+            </a:endParaRPr>
+          </a:p>
+          <a:p>
+            <a:pPr>
+              <a:lnSpc>
+                <a:spcPts val="1425"/>
+              </a:lnSpc>
+              <a:buNone/>
+            </a:pPr>
             <a:endParaRPr lang="ko-KR" altLang="ko-KR" b="0" dirty="0">
               <a:solidFill>
                 <a:srgbClr val="000000"/>
@@ -9764,6 +10988,21 @@
               </a:rPr>
               <a:t>#문자열 -&gt; 숫자 변환</a:t>
             </a:r>
+            <a:endParaRPr lang="en-US" altLang="ko-KR" b="0" dirty="0">
+              <a:solidFill>
+                <a:srgbClr val="008000"/>
+              </a:solidFill>
+              <a:effectLst/>
+              <a:latin typeface="Consolas" panose="020B0609020204030204" pitchFamily="49" charset="0"/>
+            </a:endParaRPr>
+          </a:p>
+          <a:p>
+            <a:pPr>
+              <a:lnSpc>
+                <a:spcPts val="1425"/>
+              </a:lnSpc>
+              <a:buNone/>
+            </a:pPr>
             <a:endParaRPr lang="ko-KR" altLang="ko-KR" b="0" dirty="0">
               <a:solidFill>
                 <a:srgbClr val="000000"/>
@@ -9967,7 +11206,7 @@
                 <a:effectLst/>
                 <a:latin typeface="Consolas" panose="020B0609020204030204" pitchFamily="49" charset="0"/>
               </a:rPr>
-              <a:t>'</a:t>
+              <a:t>’</a:t>
             </a:r>
             <a:r>
               <a:rPr lang="ko-KR" altLang="ko-KR" b="0" dirty="0">
@@ -9979,6 +11218,36 @@
               </a:rPr>
               <a:t>) </a:t>
             </a:r>
+            <a:endParaRPr lang="en-US" altLang="ko-KR" b="0" dirty="0">
+              <a:solidFill>
+                <a:srgbClr val="000000"/>
+              </a:solidFill>
+              <a:effectLst/>
+              <a:latin typeface="Consolas" panose="020B0609020204030204" pitchFamily="49" charset="0"/>
+            </a:endParaRPr>
+          </a:p>
+          <a:p>
+            <a:pPr>
+              <a:lnSpc>
+                <a:spcPts val="1425"/>
+              </a:lnSpc>
+              <a:buNone/>
+            </a:pPr>
+            <a:endParaRPr lang="en-US" altLang="ko-KR" b="0" dirty="0">
+              <a:solidFill>
+                <a:srgbClr val="000000"/>
+              </a:solidFill>
+              <a:effectLst/>
+              <a:latin typeface="Consolas" panose="020B0609020204030204" pitchFamily="49" charset="0"/>
+            </a:endParaRPr>
+          </a:p>
+          <a:p>
+            <a:pPr>
+              <a:lnSpc>
+                <a:spcPts val="1425"/>
+              </a:lnSpc>
+              <a:buNone/>
+            </a:pPr>
             <a:r>
               <a:rPr lang="ko-KR" altLang="ko-KR" b="0" dirty="0">
                 <a:solidFill>
@@ -10009,7 +11278,110 @@
               </a:rPr>
               <a:t> 처리</a:t>
             </a:r>
+            <a:endParaRPr lang="en-US" altLang="ko-KR" b="0" dirty="0">
+              <a:solidFill>
+                <a:srgbClr val="008000"/>
+              </a:solidFill>
+              <a:effectLst/>
+              <a:latin typeface="Consolas" panose="020B0609020204030204" pitchFamily="49" charset="0"/>
+            </a:endParaRPr>
+          </a:p>
+          <a:p>
+            <a:pPr>
+              <a:lnSpc>
+                <a:spcPts val="1425"/>
+              </a:lnSpc>
+              <a:buNone/>
+            </a:pPr>
             <a:endParaRPr lang="ko-KR" altLang="ko-KR" b="0" dirty="0">
+              <a:solidFill>
+                <a:srgbClr val="000000"/>
+              </a:solidFill>
+              <a:effectLst/>
+              <a:latin typeface="Consolas" panose="020B0609020204030204" pitchFamily="49" charset="0"/>
+            </a:endParaRPr>
+          </a:p>
+          <a:p>
+            <a:pPr>
+              <a:lnSpc>
+                <a:spcPts val="1425"/>
+              </a:lnSpc>
+              <a:buNone/>
+            </a:pPr>
+            <a:r>
+              <a:rPr lang="ko-KR" altLang="en-US" b="0" dirty="0">
+                <a:solidFill>
+                  <a:srgbClr val="000000"/>
+                </a:solidFill>
+                <a:effectLst/>
+                <a:latin typeface="Consolas" panose="020B0609020204030204" pitchFamily="49" charset="0"/>
+              </a:rPr>
+              <a:t>숫자로 변환 </a:t>
+            </a:r>
+            <a:r>
+              <a:rPr lang="ko-KR" altLang="ko-KR" dirty="0" err="1">
+                <a:solidFill>
+                  <a:srgbClr val="000000"/>
+                </a:solidFill>
+                <a:latin typeface="Consolas" panose="020B0609020204030204" pitchFamily="49" charset="0"/>
+              </a:rPr>
+              <a:t>to_numeric</a:t>
+            </a:r>
+            <a:endParaRPr lang="en-US" altLang="ko-KR" dirty="0">
+              <a:solidFill>
+                <a:srgbClr val="000000"/>
+              </a:solidFill>
+              <a:latin typeface="Consolas" panose="020B0609020204030204" pitchFamily="49" charset="0"/>
+            </a:endParaRPr>
+          </a:p>
+          <a:p>
+            <a:pPr>
+              <a:lnSpc>
+                <a:spcPts val="1425"/>
+              </a:lnSpc>
+              <a:buNone/>
+            </a:pPr>
+            <a:r>
+              <a:rPr lang="en-US" altLang="ko-KR" b="0" dirty="0">
+                <a:solidFill>
+                  <a:srgbClr val="000000"/>
+                </a:solidFill>
+                <a:effectLst/>
+                <a:latin typeface="Consolas" panose="020B0609020204030204" pitchFamily="49" charset="0"/>
+              </a:rPr>
+              <a:t>Errors = coerce   </a:t>
+            </a:r>
+            <a:r>
+              <a:rPr lang="ko-KR" altLang="en-US" b="0" dirty="0">
+                <a:solidFill>
+                  <a:srgbClr val="000000"/>
+                </a:solidFill>
+                <a:effectLst/>
+                <a:latin typeface="Consolas" panose="020B0609020204030204" pitchFamily="49" charset="0"/>
+              </a:rPr>
+              <a:t>숫자로 바꿀 수 없으면 </a:t>
+            </a:r>
+            <a:r>
+              <a:rPr lang="en-US" altLang="ko-KR" b="0" dirty="0" err="1">
+                <a:solidFill>
+                  <a:srgbClr val="000000"/>
+                </a:solidFill>
+                <a:effectLst/>
+                <a:latin typeface="Consolas" panose="020B0609020204030204" pitchFamily="49" charset="0"/>
+              </a:rPr>
+              <a:t>NaN</a:t>
+            </a:r>
+            <a:r>
+              <a:rPr lang="ko-KR" altLang="en-US" b="0" dirty="0">
+                <a:solidFill>
+                  <a:srgbClr val="000000"/>
+                </a:solidFill>
+                <a:effectLst/>
+                <a:latin typeface="Consolas" panose="020B0609020204030204" pitchFamily="49" charset="0"/>
+              </a:rPr>
+              <a:t>으로 처리 해라</a:t>
+            </a:r>
+            <a:endParaRPr lang="en-US" altLang="ko-KR" b="0" dirty="0">
               <a:solidFill>
                 <a:srgbClr val="000000"/>
               </a:solidFill>
@@ -10058,6 +11430,21 @@
               </a:rPr>
               <a:t># 문자열 -&gt; 날짜 변환</a:t>
             </a:r>
+            <a:endParaRPr lang="en-US" altLang="ko-KR" b="0" dirty="0">
+              <a:solidFill>
+                <a:srgbClr val="008000"/>
+              </a:solidFill>
+              <a:effectLst/>
+              <a:latin typeface="Consolas" panose="020B0609020204030204" pitchFamily="49" charset="0"/>
+            </a:endParaRPr>
+          </a:p>
+          <a:p>
+            <a:pPr>
+              <a:lnSpc>
+                <a:spcPts val="1425"/>
+              </a:lnSpc>
+              <a:buNone/>
+            </a:pPr>
             <a:endParaRPr lang="ko-KR" altLang="ko-KR" b="0" dirty="0">
               <a:solidFill>
                 <a:srgbClr val="000000"/>
@@ -10261,17 +11648,172 @@
                 <a:effectLst/>
                 <a:latin typeface="Consolas" panose="020B0609020204030204" pitchFamily="49" charset="0"/>
               </a:rPr>
-              <a:t>'</a:t>
-            </a:r>
-            <a:r>
-              <a:rPr lang="ko-KR" altLang="ko-KR" b="0" dirty="0">
-                <a:solidFill>
-                  <a:srgbClr val="000000"/>
-                </a:solidFill>
-                <a:effectLst/>
-                <a:latin typeface="Consolas" panose="020B0609020204030204" pitchFamily="49" charset="0"/>
-              </a:rPr>
-              <a:t>) </a:t>
+              <a:t>’</a:t>
+            </a:r>
+            <a:r>
+              <a:rPr lang="ko-KR" altLang="ko-KR" b="0" dirty="0">
+                <a:solidFill>
+                  <a:srgbClr val="000000"/>
+                </a:solidFill>
+                <a:effectLst/>
+                <a:latin typeface="Consolas" panose="020B0609020204030204" pitchFamily="49" charset="0"/>
+              </a:rPr>
+              <a:t>)</a:t>
+            </a:r>
+            <a:endParaRPr lang="en-US" altLang="ko-KR" b="0" dirty="0">
+              <a:solidFill>
+                <a:srgbClr val="000000"/>
+              </a:solidFill>
+              <a:effectLst/>
+              <a:latin typeface="Consolas" panose="020B0609020204030204" pitchFamily="49" charset="0"/>
+            </a:endParaRPr>
+          </a:p>
+          <a:p>
+            <a:pPr>
+              <a:lnSpc>
+                <a:spcPts val="1425"/>
+              </a:lnSpc>
+              <a:buNone/>
+            </a:pPr>
+            <a:endParaRPr lang="en-US" altLang="ko-KR" b="0" dirty="0">
+              <a:solidFill>
+                <a:srgbClr val="000000"/>
+              </a:solidFill>
+              <a:effectLst/>
+              <a:latin typeface="Consolas" panose="020B0609020204030204" pitchFamily="49" charset="0"/>
+            </a:endParaRPr>
+          </a:p>
+          <a:p>
+            <a:pPr>
+              <a:lnSpc>
+                <a:spcPts val="1425"/>
+              </a:lnSpc>
+              <a:buNone/>
+            </a:pPr>
+            <a:r>
+              <a:rPr lang="en-US" altLang="ko-KR" dirty="0">
+                <a:solidFill>
+                  <a:srgbClr val="000000"/>
+                </a:solidFill>
+                <a:latin typeface="Consolas" panose="020B0609020204030204" pitchFamily="49" charset="0"/>
+              </a:rPr>
+              <a:t>Datetime</a:t>
+            </a:r>
+            <a:r>
+              <a:rPr lang="ko-KR" altLang="en-US" dirty="0">
+                <a:solidFill>
+                  <a:srgbClr val="000000"/>
+                </a:solidFill>
+                <a:latin typeface="Consolas" panose="020B0609020204030204" pitchFamily="49" charset="0"/>
+              </a:rPr>
+              <a:t> 형태로 바꾸고  </a:t>
+            </a:r>
+            <a:r>
+              <a:rPr lang="en-US" altLang="ko-KR" dirty="0">
+                <a:solidFill>
+                  <a:srgbClr val="000000"/>
+                </a:solidFill>
+                <a:latin typeface="Consolas" panose="020B0609020204030204" pitchFamily="49" charset="0"/>
+              </a:rPr>
+              <a:t>errors =‘coerce’ datetime</a:t>
+            </a:r>
+            <a:r>
+              <a:rPr lang="ko-KR" altLang="en-US" dirty="0">
+                <a:solidFill>
+                  <a:srgbClr val="000000"/>
+                </a:solidFill>
+                <a:latin typeface="Consolas" panose="020B0609020204030204" pitchFamily="49" charset="0"/>
+              </a:rPr>
+              <a:t>으로 바꿀 수 없으면 </a:t>
+            </a:r>
+            <a:r>
+              <a:rPr lang="en-US" altLang="ko-KR" dirty="0" err="1">
+                <a:solidFill>
+                  <a:srgbClr val="000000"/>
+                </a:solidFill>
+                <a:latin typeface="Consolas" panose="020B0609020204030204" pitchFamily="49" charset="0"/>
+              </a:rPr>
+              <a:t>NaT</a:t>
+            </a:r>
+            <a:r>
+              <a:rPr lang="ko-KR" altLang="en-US" dirty="0">
+                <a:solidFill>
+                  <a:srgbClr val="000000"/>
+                </a:solidFill>
+                <a:latin typeface="Consolas" panose="020B0609020204030204" pitchFamily="49" charset="0"/>
+              </a:rPr>
+              <a:t>로 처리 </a:t>
+            </a:r>
+            <a:r>
+              <a:rPr lang="en-US" altLang="ko-KR" dirty="0">
+                <a:solidFill>
+                  <a:srgbClr val="000000"/>
+                </a:solidFill>
+                <a:latin typeface="Consolas" panose="020B0609020204030204" pitchFamily="49" charset="0"/>
+              </a:rPr>
+              <a:t>Not a time</a:t>
+            </a:r>
+          </a:p>
+          <a:p>
+            <a:pPr>
+              <a:lnSpc>
+                <a:spcPts val="1425"/>
+              </a:lnSpc>
+              <a:buNone/>
+            </a:pPr>
+            <a:endParaRPr lang="en-US" altLang="ko-KR" dirty="0">
+              <a:solidFill>
+                <a:srgbClr val="000000"/>
+              </a:solidFill>
+              <a:latin typeface="Consolas" panose="020B0609020204030204" pitchFamily="49" charset="0"/>
+            </a:endParaRPr>
+          </a:p>
+          <a:p>
+            <a:pPr>
+              <a:lnSpc>
+                <a:spcPts val="1425"/>
+              </a:lnSpc>
+              <a:buNone/>
+            </a:pPr>
+            <a:endParaRPr lang="en-US" altLang="ko-KR" b="0" dirty="0">
+              <a:solidFill>
+                <a:srgbClr val="000000"/>
+              </a:solidFill>
+              <a:effectLst/>
+              <a:latin typeface="Consolas" panose="020B0609020204030204" pitchFamily="49" charset="0"/>
+            </a:endParaRPr>
+          </a:p>
+          <a:p>
+            <a:pPr>
+              <a:lnSpc>
+                <a:spcPts val="1425"/>
+              </a:lnSpc>
+              <a:buNone/>
+            </a:pPr>
+            <a:endParaRPr lang="en-US" altLang="ko-KR" b="0" dirty="0">
+              <a:solidFill>
+                <a:srgbClr val="000000"/>
+              </a:solidFill>
+              <a:effectLst/>
+              <a:latin typeface="Consolas" panose="020B0609020204030204" pitchFamily="49" charset="0"/>
+            </a:endParaRPr>
+          </a:p>
+          <a:p>
+            <a:pPr>
+              <a:lnSpc>
+                <a:spcPts val="1425"/>
+              </a:lnSpc>
+              <a:buNone/>
+            </a:pPr>
+            <a:r>
+              <a:rPr lang="ko-KR" altLang="ko-KR" b="0" dirty="0">
+                <a:solidFill>
+                  <a:srgbClr val="000000"/>
+                </a:solidFill>
+                <a:effectLst/>
+                <a:latin typeface="Consolas" panose="020B0609020204030204" pitchFamily="49" charset="0"/>
+              </a:rPr>
+              <a:t> </a:t>
             </a:r>
             <a:r>
               <a:rPr lang="ko-KR" altLang="ko-KR" b="0" dirty="0">
@@ -10383,7 +11925,7 @@
         </p:blipFill>
         <p:spPr>
           <a:xfrm>
-            <a:off x="2949677" y="4073955"/>
+            <a:off x="131842" y="5179548"/>
             <a:ext cx="3962953" cy="1895740"/>
           </a:xfrm>
           <a:prstGeom prst="rect">
@@ -10404,7 +11946,7 @@
 </p:sld>
 </file>
 
-<file path=ppt/slides/slide17.xml><?xml version="1.0" encoding="utf-8"?>
+<file path=ppt/slides/slide18.xml><?xml version="1.0" encoding="utf-8"?>
 <p:sld xmlns:a="http://schemas.openxmlformats.org/drawingml/2006/main" xmlns:r="http://schemas.openxmlformats.org/officeDocument/2006/relationships" xmlns:p="http://schemas.openxmlformats.org/presentationml/2006/main">
   <p:cSld>
     <p:spTree>
@@ -11755,7 +13297,7 @@
 </p:sld>
 </file>
 
-<file path=ppt/slides/slide18.xml><?xml version="1.0" encoding="utf-8"?>
+<file path=ppt/slides/slide19.xml><?xml version="1.0" encoding="utf-8"?>
 <p:sld xmlns:a="http://schemas.openxmlformats.org/drawingml/2006/main" xmlns:r="http://schemas.openxmlformats.org/officeDocument/2006/relationships" xmlns:p="http://schemas.openxmlformats.org/presentationml/2006/main">
   <p:cSld>
     <p:spTree>
@@ -11793,7 +13335,7 @@
         <p:spPr>
           <a:xfrm>
             <a:off x="0" y="560440"/>
-            <a:ext cx="11975689" cy="3518014"/>
+            <a:ext cx="11975689" cy="5672450"/>
           </a:xfrm>
           <a:prstGeom prst="rect">
             <a:avLst/>
@@ -12215,7 +13757,7 @@
                 <a:effectLst/>
                 <a:latin typeface="Consolas" panose="020B0609020204030204" pitchFamily="49" charset="0"/>
               </a:rPr>
-              <a:t>'</a:t>
+              <a:t>’</a:t>
             </a:r>
             <a:r>
               <a:rPr lang="ko-KR" altLang="ko-KR" b="0" dirty="0">
@@ -12227,6 +13769,30 @@
               </a:rPr>
               <a:t>) </a:t>
             </a:r>
+            <a:endParaRPr lang="en-US" altLang="ko-KR" dirty="0">
+              <a:solidFill>
+                <a:srgbClr val="000000"/>
+              </a:solidFill>
+              <a:latin typeface="Consolas" panose="020B0609020204030204" pitchFamily="49" charset="0"/>
+            </a:endParaRPr>
+          </a:p>
+          <a:p>
+            <a:pPr>
+              <a:lnSpc>
+                <a:spcPts val="1425"/>
+              </a:lnSpc>
+              <a:buNone/>
+            </a:pPr>
+            <a:r>
+              <a:rPr lang="en-US" altLang="ko-KR" b="0" dirty="0">
+                <a:solidFill>
+                  <a:srgbClr val="000000"/>
+                </a:solidFill>
+                <a:effectLst/>
+                <a:latin typeface="Consolas" panose="020B0609020204030204" pitchFamily="49" charset="0"/>
+              </a:rPr>
+              <a:t>	</a:t>
+            </a:r>
             <a:r>
               <a:rPr lang="ko-KR" altLang="ko-KR" b="0" dirty="0">
                 <a:solidFill>
@@ -12257,6 +13823,35 @@
               </a:rPr>
               <a:t> 처리</a:t>
             </a:r>
+            <a:endParaRPr lang="en-US" altLang="ko-KR" b="0" dirty="0">
+              <a:solidFill>
+                <a:srgbClr val="008000"/>
+              </a:solidFill>
+              <a:effectLst/>
+              <a:latin typeface="Consolas" panose="020B0609020204030204" pitchFamily="49" charset="0"/>
+            </a:endParaRPr>
+          </a:p>
+          <a:p>
+            <a:pPr>
+              <a:lnSpc>
+                <a:spcPts val="1425"/>
+              </a:lnSpc>
+              <a:buNone/>
+            </a:pPr>
+            <a:endParaRPr lang="en-US" altLang="ko-KR" dirty="0">
+              <a:solidFill>
+                <a:srgbClr val="008000"/>
+              </a:solidFill>
+              <a:latin typeface="Consolas" panose="020B0609020204030204" pitchFamily="49" charset="0"/>
+            </a:endParaRPr>
+          </a:p>
+          <a:p>
+            <a:pPr>
+              <a:lnSpc>
+                <a:spcPts val="1425"/>
+              </a:lnSpc>
+              <a:buNone/>
+            </a:pPr>
             <a:endParaRPr lang="ko-KR" altLang="ko-KR" b="0" dirty="0">
               <a:solidFill>
                 <a:srgbClr val="000000"/>
@@ -12470,7 +14065,7 @@
                 <a:effectLst/>
                 <a:latin typeface="Consolas" panose="020B0609020204030204" pitchFamily="49" charset="0"/>
               </a:rPr>
-              <a:t>'</a:t>
+              <a:t>’</a:t>
             </a:r>
             <a:r>
               <a:rPr lang="ko-KR" altLang="ko-KR" b="0" dirty="0">
@@ -12482,6 +14077,45 @@
               </a:rPr>
               <a:t>) </a:t>
             </a:r>
+            <a:endParaRPr lang="en-US" altLang="ko-KR" b="0" dirty="0">
+              <a:solidFill>
+                <a:srgbClr val="000000"/>
+              </a:solidFill>
+              <a:effectLst/>
+              <a:latin typeface="Consolas" panose="020B0609020204030204" pitchFamily="49" charset="0"/>
+            </a:endParaRPr>
+          </a:p>
+          <a:p>
+            <a:pPr>
+              <a:lnSpc>
+                <a:spcPts val="1425"/>
+              </a:lnSpc>
+              <a:buNone/>
+            </a:pPr>
+            <a:endParaRPr lang="en-US" altLang="ko-KR" b="0" dirty="0">
+              <a:solidFill>
+                <a:srgbClr val="000000"/>
+              </a:solidFill>
+              <a:effectLst/>
+              <a:latin typeface="Consolas" panose="020B0609020204030204" pitchFamily="49" charset="0"/>
+            </a:endParaRPr>
+          </a:p>
+          <a:p>
+            <a:pPr>
+              <a:lnSpc>
+                <a:spcPts val="1425"/>
+              </a:lnSpc>
+              <a:buNone/>
+            </a:pPr>
+            <a:r>
+              <a:rPr lang="en-US" altLang="ko-KR" dirty="0">
+                <a:solidFill>
+                  <a:srgbClr val="000000"/>
+                </a:solidFill>
+                <a:latin typeface="Consolas" panose="020B0609020204030204" pitchFamily="49" charset="0"/>
+              </a:rPr>
+              <a:t>	</a:t>
+            </a:r>
             <a:r>
               <a:rPr lang="ko-KR" altLang="ko-KR" b="0" dirty="0">
                 <a:solidFill>
@@ -12512,6 +14146,21 @@
               </a:rPr>
               <a:t> 처리</a:t>
             </a:r>
+            <a:endParaRPr lang="en-US" altLang="ko-KR" b="0" dirty="0">
+              <a:solidFill>
+                <a:srgbClr val="008000"/>
+              </a:solidFill>
+              <a:effectLst/>
+              <a:latin typeface="Consolas" panose="020B0609020204030204" pitchFamily="49" charset="0"/>
+            </a:endParaRPr>
+          </a:p>
+          <a:p>
+            <a:pPr>
+              <a:lnSpc>
+                <a:spcPts val="1425"/>
+              </a:lnSpc>
+              <a:buNone/>
+            </a:pPr>
             <a:endParaRPr lang="ko-KR" altLang="ko-KR" b="0" dirty="0">
               <a:solidFill>
                 <a:srgbClr val="000000"/>
@@ -12538,6 +14187,16 @@
               <a:t>    </a:t>
             </a:r>
             <a:r>
+              <a:rPr lang="en-US" altLang="ko-KR" b="0" dirty="0">
+                <a:solidFill>
+                  <a:srgbClr val="000000"/>
+                </a:solidFill>
+                <a:effectLst/>
+                <a:latin typeface="Consolas" panose="020B0609020204030204" pitchFamily="49" charset="0"/>
+              </a:rPr>
+              <a:t>	</a:t>
+            </a:r>
+            <a:r>
               <a:rPr lang="ko-KR" altLang="ko-KR" b="0" dirty="0">
                 <a:solidFill>
                   <a:srgbClr val="008000"/>
@@ -12622,6 +14281,21 @@
               </a:rPr>
               <a:t># 중복 제거</a:t>
             </a:r>
+            <a:endParaRPr lang="en-US" altLang="ko-KR" b="0" dirty="0">
+              <a:solidFill>
+                <a:srgbClr val="008000"/>
+              </a:solidFill>
+              <a:effectLst/>
+              <a:latin typeface="Consolas" panose="020B0609020204030204" pitchFamily="49" charset="0"/>
+            </a:endParaRPr>
+          </a:p>
+          <a:p>
+            <a:pPr>
+              <a:lnSpc>
+                <a:spcPts val="1425"/>
+              </a:lnSpc>
+              <a:buNone/>
+            </a:pPr>
             <a:endParaRPr lang="ko-KR" altLang="ko-KR" b="0" dirty="0">
               <a:solidFill>
                 <a:srgbClr val="000000"/>
@@ -12767,6 +14441,13 @@
               </a:rPr>
               <a:t>])</a:t>
             </a:r>
+            <a:endParaRPr lang="en-US" altLang="ko-KR" b="0" dirty="0">
+              <a:solidFill>
+                <a:srgbClr val="000000"/>
+              </a:solidFill>
+              <a:effectLst/>
+              <a:latin typeface="Consolas" panose="020B0609020204030204" pitchFamily="49" charset="0"/>
+            </a:endParaRPr>
           </a:p>
           <a:p>
             <a:pPr>
@@ -12775,342 +14456,6 @@
               </a:lnSpc>
               <a:buNone/>
             </a:pPr>
-            <a:r>
-              <a:rPr lang="ko-KR" altLang="ko-KR" b="0" dirty="0">
-                <a:solidFill>
-                  <a:srgbClr val="000000"/>
-                </a:solidFill>
-                <a:effectLst/>
-                <a:latin typeface="Consolas" panose="020B0609020204030204" pitchFamily="49" charset="0"/>
-              </a:rPr>
-              <a:t>    </a:t>
-            </a:r>
-            <a:r>
-              <a:rPr lang="ko-KR" altLang="ko-KR" b="0" dirty="0" err="1">
-                <a:solidFill>
-                  <a:srgbClr val="000000"/>
-                </a:solidFill>
-                <a:effectLst/>
-                <a:latin typeface="Consolas" panose="020B0609020204030204" pitchFamily="49" charset="0"/>
-              </a:rPr>
-              <a:t>iqr</a:t>
-            </a:r>
-            <a:r>
-              <a:rPr lang="ko-KR" altLang="ko-KR" b="0" dirty="0">
-                <a:solidFill>
-                  <a:srgbClr val="000000"/>
-                </a:solidFill>
-                <a:effectLst/>
-                <a:latin typeface="Consolas" panose="020B0609020204030204" pitchFamily="49" charset="0"/>
-              </a:rPr>
-              <a:t> = Q3 - Q1</a:t>
-            </a:r>
-          </a:p>
-          <a:p>
-            <a:pPr>
-              <a:lnSpc>
-                <a:spcPts val="1425"/>
-              </a:lnSpc>
-              <a:buNone/>
-            </a:pPr>
-            <a:r>
-              <a:rPr lang="ko-KR" altLang="ko-KR" b="0" dirty="0">
-                <a:solidFill>
-                  <a:srgbClr val="000000"/>
-                </a:solidFill>
-                <a:effectLst/>
-                <a:latin typeface="Consolas" panose="020B0609020204030204" pitchFamily="49" charset="0"/>
-              </a:rPr>
-              <a:t>    </a:t>
-            </a:r>
-            <a:r>
-              <a:rPr lang="ko-KR" altLang="ko-KR" b="0" dirty="0" err="1">
-                <a:solidFill>
-                  <a:srgbClr val="000000"/>
-                </a:solidFill>
-                <a:effectLst/>
-                <a:latin typeface="Consolas" panose="020B0609020204030204" pitchFamily="49" charset="0"/>
-              </a:rPr>
-              <a:t>df</a:t>
-            </a:r>
-            <a:r>
-              <a:rPr lang="ko-KR" altLang="ko-KR" b="0" dirty="0">
-                <a:solidFill>
-                  <a:srgbClr val="000000"/>
-                </a:solidFill>
-                <a:effectLst/>
-                <a:latin typeface="Consolas" panose="020B0609020204030204" pitchFamily="49" charset="0"/>
-              </a:rPr>
-              <a:t> = </a:t>
-            </a:r>
-            <a:r>
-              <a:rPr lang="ko-KR" altLang="ko-KR" b="0" dirty="0" err="1">
-                <a:solidFill>
-                  <a:srgbClr val="000000"/>
-                </a:solidFill>
-                <a:effectLst/>
-                <a:latin typeface="Consolas" panose="020B0609020204030204" pitchFamily="49" charset="0"/>
-              </a:rPr>
-              <a:t>df</a:t>
-            </a:r>
-            <a:r>
-              <a:rPr lang="ko-KR" altLang="ko-KR" b="0" dirty="0">
-                <a:solidFill>
-                  <a:srgbClr val="000000"/>
-                </a:solidFill>
-                <a:effectLst/>
-                <a:latin typeface="Consolas" panose="020B0609020204030204" pitchFamily="49" charset="0"/>
-              </a:rPr>
-              <a:t>[(</a:t>
-            </a:r>
-            <a:r>
-              <a:rPr lang="ko-KR" altLang="ko-KR" b="0" dirty="0" err="1">
-                <a:solidFill>
-                  <a:srgbClr val="000000"/>
-                </a:solidFill>
-                <a:effectLst/>
-                <a:latin typeface="Consolas" panose="020B0609020204030204" pitchFamily="49" charset="0"/>
-              </a:rPr>
-              <a:t>df</a:t>
-            </a:r>
-            <a:r>
-              <a:rPr lang="ko-KR" altLang="ko-KR" b="0" dirty="0">
-                <a:solidFill>
-                  <a:srgbClr val="000000"/>
-                </a:solidFill>
-                <a:effectLst/>
-                <a:latin typeface="Consolas" panose="020B0609020204030204" pitchFamily="49" charset="0"/>
-              </a:rPr>
-              <a:t>[</a:t>
-            </a:r>
-            <a:r>
-              <a:rPr lang="ko-KR" altLang="ko-KR" b="0" dirty="0">
-                <a:solidFill>
-                  <a:srgbClr val="A31515"/>
-                </a:solidFill>
-                <a:effectLst/>
-                <a:latin typeface="Consolas" panose="020B0609020204030204" pitchFamily="49" charset="0"/>
-              </a:rPr>
-              <a:t>'</a:t>
-            </a:r>
-            <a:r>
-              <a:rPr lang="ko-KR" altLang="ko-KR" b="0" dirty="0" err="1">
-                <a:solidFill>
-                  <a:srgbClr val="A31515"/>
-                </a:solidFill>
-                <a:effectLst/>
-                <a:latin typeface="Consolas" panose="020B0609020204030204" pitchFamily="49" charset="0"/>
-              </a:rPr>
-              <a:t>temperature_c</a:t>
-            </a:r>
-            <a:r>
-              <a:rPr lang="ko-KR" altLang="ko-KR" b="0" dirty="0">
-                <a:solidFill>
-                  <a:srgbClr val="A31515"/>
-                </a:solidFill>
-                <a:effectLst/>
-                <a:latin typeface="Consolas" panose="020B0609020204030204" pitchFamily="49" charset="0"/>
-              </a:rPr>
-              <a:t>'</a:t>
-            </a:r>
-            <a:r>
-              <a:rPr lang="ko-KR" altLang="ko-KR" b="0" dirty="0">
-                <a:solidFill>
-                  <a:srgbClr val="000000"/>
-                </a:solidFill>
-                <a:effectLst/>
-                <a:latin typeface="Consolas" panose="020B0609020204030204" pitchFamily="49" charset="0"/>
-              </a:rPr>
-              <a:t>] &gt;= Q1 - </a:t>
-            </a:r>
-            <a:r>
-              <a:rPr lang="ko-KR" altLang="ko-KR" b="0" dirty="0">
-                <a:solidFill>
-                  <a:srgbClr val="098658"/>
-                </a:solidFill>
-                <a:effectLst/>
-                <a:latin typeface="Consolas" panose="020B0609020204030204" pitchFamily="49" charset="0"/>
-              </a:rPr>
-              <a:t>1.5</a:t>
-            </a:r>
-            <a:r>
-              <a:rPr lang="ko-KR" altLang="ko-KR" b="0" dirty="0">
-                <a:solidFill>
-                  <a:srgbClr val="000000"/>
-                </a:solidFill>
-                <a:effectLst/>
-                <a:latin typeface="Consolas" panose="020B0609020204030204" pitchFamily="49" charset="0"/>
-              </a:rPr>
-              <a:t>*</a:t>
-            </a:r>
-            <a:r>
-              <a:rPr lang="ko-KR" altLang="ko-KR" b="0" dirty="0" err="1">
-                <a:solidFill>
-                  <a:srgbClr val="000000"/>
-                </a:solidFill>
-                <a:effectLst/>
-                <a:latin typeface="Consolas" panose="020B0609020204030204" pitchFamily="49" charset="0"/>
-              </a:rPr>
-              <a:t>iqr</a:t>
-            </a:r>
-            <a:r>
-              <a:rPr lang="ko-KR" altLang="ko-KR" b="0" dirty="0">
-                <a:solidFill>
-                  <a:srgbClr val="000000"/>
-                </a:solidFill>
-                <a:effectLst/>
-                <a:latin typeface="Consolas" panose="020B0609020204030204" pitchFamily="49" charset="0"/>
-              </a:rPr>
-              <a:t>) &amp; (</a:t>
-            </a:r>
-            <a:r>
-              <a:rPr lang="ko-KR" altLang="ko-KR" b="0" dirty="0" err="1">
-                <a:solidFill>
-                  <a:srgbClr val="000000"/>
-                </a:solidFill>
-                <a:effectLst/>
-                <a:latin typeface="Consolas" panose="020B0609020204030204" pitchFamily="49" charset="0"/>
-              </a:rPr>
-              <a:t>df</a:t>
-            </a:r>
-            <a:r>
-              <a:rPr lang="ko-KR" altLang="ko-KR" b="0" dirty="0">
-                <a:solidFill>
-                  <a:srgbClr val="000000"/>
-                </a:solidFill>
-                <a:effectLst/>
-                <a:latin typeface="Consolas" panose="020B0609020204030204" pitchFamily="49" charset="0"/>
-              </a:rPr>
-              <a:t>[</a:t>
-            </a:r>
-            <a:r>
-              <a:rPr lang="ko-KR" altLang="ko-KR" b="0" dirty="0">
-                <a:solidFill>
-                  <a:srgbClr val="A31515"/>
-                </a:solidFill>
-                <a:effectLst/>
-                <a:latin typeface="Consolas" panose="020B0609020204030204" pitchFamily="49" charset="0"/>
-              </a:rPr>
-              <a:t>'</a:t>
-            </a:r>
-            <a:r>
-              <a:rPr lang="ko-KR" altLang="ko-KR" b="0" dirty="0" err="1">
-                <a:solidFill>
-                  <a:srgbClr val="A31515"/>
-                </a:solidFill>
-                <a:effectLst/>
-                <a:latin typeface="Consolas" panose="020B0609020204030204" pitchFamily="49" charset="0"/>
-              </a:rPr>
-              <a:t>temperature_c</a:t>
-            </a:r>
-            <a:r>
-              <a:rPr lang="ko-KR" altLang="ko-KR" b="0" dirty="0">
-                <a:solidFill>
-                  <a:srgbClr val="A31515"/>
-                </a:solidFill>
-                <a:effectLst/>
-                <a:latin typeface="Consolas" panose="020B0609020204030204" pitchFamily="49" charset="0"/>
-              </a:rPr>
-              <a:t>'</a:t>
-            </a:r>
-            <a:r>
-              <a:rPr lang="ko-KR" altLang="ko-KR" b="0" dirty="0">
-                <a:solidFill>
-                  <a:srgbClr val="000000"/>
-                </a:solidFill>
-                <a:effectLst/>
-                <a:latin typeface="Consolas" panose="020B0609020204030204" pitchFamily="49" charset="0"/>
-              </a:rPr>
-              <a:t>] &lt;= Q3 + </a:t>
-            </a:r>
-            <a:r>
-              <a:rPr lang="ko-KR" altLang="ko-KR" b="0" dirty="0">
-                <a:solidFill>
-                  <a:srgbClr val="098658"/>
-                </a:solidFill>
-                <a:effectLst/>
-                <a:latin typeface="Consolas" panose="020B0609020204030204" pitchFamily="49" charset="0"/>
-              </a:rPr>
-              <a:t>1.5</a:t>
-            </a:r>
-            <a:r>
-              <a:rPr lang="ko-KR" altLang="ko-KR" b="0" dirty="0">
-                <a:solidFill>
-                  <a:srgbClr val="000000"/>
-                </a:solidFill>
-                <a:effectLst/>
-                <a:latin typeface="Consolas" panose="020B0609020204030204" pitchFamily="49" charset="0"/>
-              </a:rPr>
-              <a:t>*</a:t>
-            </a:r>
-            <a:r>
-              <a:rPr lang="ko-KR" altLang="ko-KR" b="0" dirty="0" err="1">
-                <a:solidFill>
-                  <a:srgbClr val="000000"/>
-                </a:solidFill>
-                <a:effectLst/>
-                <a:latin typeface="Consolas" panose="020B0609020204030204" pitchFamily="49" charset="0"/>
-              </a:rPr>
-              <a:t>iqr</a:t>
-            </a:r>
-            <a:r>
-              <a:rPr lang="ko-KR" altLang="ko-KR" b="0" dirty="0">
-                <a:solidFill>
-                  <a:srgbClr val="000000"/>
-                </a:solidFill>
-                <a:effectLst/>
-                <a:latin typeface="Consolas" panose="020B0609020204030204" pitchFamily="49" charset="0"/>
-              </a:rPr>
-              <a:t>)]</a:t>
-            </a:r>
-          </a:p>
-          <a:p>
-            <a:pPr>
-              <a:lnSpc>
-                <a:spcPts val="1425"/>
-              </a:lnSpc>
-              <a:buNone/>
-            </a:pPr>
-            <a:r>
-              <a:rPr lang="ko-KR" altLang="ko-KR" b="0" dirty="0">
-                <a:solidFill>
-                  <a:srgbClr val="000000"/>
-                </a:solidFill>
-                <a:effectLst/>
-                <a:latin typeface="Consolas" panose="020B0609020204030204" pitchFamily="49" charset="0"/>
-              </a:rPr>
-              <a:t>    </a:t>
-            </a:r>
-            <a:r>
-              <a:rPr lang="ko-KR" altLang="ko-KR" b="0" dirty="0">
-                <a:solidFill>
-                  <a:srgbClr val="008000"/>
-                </a:solidFill>
-                <a:effectLst/>
-                <a:latin typeface="Consolas" panose="020B0609020204030204" pitchFamily="49" charset="0"/>
-              </a:rPr>
-              <a:t># 4)</a:t>
-            </a:r>
-            <a:r>
-              <a:rPr lang="ko-KR" altLang="ko-KR" b="0" dirty="0" err="1">
-                <a:solidFill>
-                  <a:srgbClr val="008000"/>
-                </a:solidFill>
-                <a:effectLst/>
-                <a:latin typeface="Consolas" panose="020B0609020204030204" pitchFamily="49" charset="0"/>
-              </a:rPr>
-              <a:t>결측치</a:t>
-            </a:r>
-            <a:r>
-              <a:rPr lang="ko-KR" altLang="ko-KR" b="0" dirty="0">
-                <a:solidFill>
-                  <a:srgbClr val="008000"/>
-                </a:solidFill>
-                <a:effectLst/>
-                <a:latin typeface="Consolas" panose="020B0609020204030204" pitchFamily="49" charset="0"/>
-              </a:rPr>
-              <a:t> 처리 : 중앙값으로 대체   </a:t>
-            </a:r>
             <a:endParaRPr lang="ko-KR" altLang="ko-KR" b="0" dirty="0">
               <a:solidFill>
                 <a:srgbClr val="000000"/>
@@ -13144,217 +14489,17 @@
                 <a:effectLst/>
                 <a:latin typeface="Consolas" panose="020B0609020204030204" pitchFamily="49" charset="0"/>
               </a:rPr>
-              <a:t>df</a:t>
-            </a:r>
-            <a:r>
-              <a:rPr lang="ko-KR" altLang="ko-KR" b="0" dirty="0">
-                <a:solidFill>
-                  <a:srgbClr val="000000"/>
-                </a:solidFill>
-                <a:effectLst/>
-                <a:latin typeface="Consolas" panose="020B0609020204030204" pitchFamily="49" charset="0"/>
-              </a:rPr>
-              <a:t>[</a:t>
-            </a:r>
-            <a:r>
-              <a:rPr lang="ko-KR" altLang="ko-KR" b="0" dirty="0">
-                <a:solidFill>
-                  <a:srgbClr val="A31515"/>
-                </a:solidFill>
-                <a:effectLst/>
-                <a:latin typeface="Consolas" panose="020B0609020204030204" pitchFamily="49" charset="0"/>
-              </a:rPr>
-              <a:t>'</a:t>
-            </a:r>
-            <a:r>
-              <a:rPr lang="ko-KR" altLang="ko-KR" b="0" dirty="0" err="1">
-                <a:solidFill>
-                  <a:srgbClr val="A31515"/>
-                </a:solidFill>
-                <a:effectLst/>
-                <a:latin typeface="Consolas" panose="020B0609020204030204" pitchFamily="49" charset="0"/>
-              </a:rPr>
-              <a:t>humidity_percent</a:t>
-            </a:r>
-            <a:r>
-              <a:rPr lang="ko-KR" altLang="ko-KR" b="0" dirty="0">
-                <a:solidFill>
-                  <a:srgbClr val="A31515"/>
-                </a:solidFill>
-                <a:effectLst/>
-                <a:latin typeface="Consolas" panose="020B0609020204030204" pitchFamily="49" charset="0"/>
-              </a:rPr>
-              <a:t>'</a:t>
-            </a:r>
-            <a:r>
-              <a:rPr lang="ko-KR" altLang="ko-KR" b="0" dirty="0">
-                <a:solidFill>
-                  <a:srgbClr val="000000"/>
-                </a:solidFill>
-                <a:effectLst/>
-                <a:latin typeface="Consolas" panose="020B0609020204030204" pitchFamily="49" charset="0"/>
-              </a:rPr>
-              <a:t>] = </a:t>
-            </a:r>
-            <a:r>
-              <a:rPr lang="ko-KR" altLang="ko-KR" b="0" dirty="0" err="1">
-                <a:solidFill>
-                  <a:srgbClr val="000000"/>
-                </a:solidFill>
-                <a:effectLst/>
-                <a:latin typeface="Consolas" panose="020B0609020204030204" pitchFamily="49" charset="0"/>
-              </a:rPr>
-              <a:t>df</a:t>
-            </a:r>
-            <a:r>
-              <a:rPr lang="ko-KR" altLang="ko-KR" b="0" dirty="0">
-                <a:solidFill>
-                  <a:srgbClr val="000000"/>
-                </a:solidFill>
-                <a:effectLst/>
-                <a:latin typeface="Consolas" panose="020B0609020204030204" pitchFamily="49" charset="0"/>
-              </a:rPr>
-              <a:t>[</a:t>
-            </a:r>
-            <a:r>
-              <a:rPr lang="ko-KR" altLang="ko-KR" b="0" dirty="0">
-                <a:solidFill>
-                  <a:srgbClr val="A31515"/>
-                </a:solidFill>
-                <a:effectLst/>
-                <a:latin typeface="Consolas" panose="020B0609020204030204" pitchFamily="49" charset="0"/>
-              </a:rPr>
-              <a:t>'</a:t>
-            </a:r>
-            <a:r>
-              <a:rPr lang="ko-KR" altLang="ko-KR" b="0" dirty="0" err="1">
-                <a:solidFill>
-                  <a:srgbClr val="A31515"/>
-                </a:solidFill>
-                <a:effectLst/>
-                <a:latin typeface="Consolas" panose="020B0609020204030204" pitchFamily="49" charset="0"/>
-              </a:rPr>
-              <a:t>humidity_percent</a:t>
-            </a:r>
-            <a:r>
-              <a:rPr lang="ko-KR" altLang="ko-KR" b="0" dirty="0">
-                <a:solidFill>
-                  <a:srgbClr val="A31515"/>
-                </a:solidFill>
-                <a:effectLst/>
-                <a:latin typeface="Consolas" panose="020B0609020204030204" pitchFamily="49" charset="0"/>
-              </a:rPr>
-              <a:t>'</a:t>
-            </a:r>
-            <a:r>
-              <a:rPr lang="ko-KR" altLang="ko-KR" b="0" dirty="0">
-                <a:solidFill>
-                  <a:srgbClr val="000000"/>
-                </a:solidFill>
-                <a:effectLst/>
-                <a:latin typeface="Consolas" panose="020B0609020204030204" pitchFamily="49" charset="0"/>
-              </a:rPr>
-              <a:t>].</a:t>
-            </a:r>
-            <a:r>
-              <a:rPr lang="ko-KR" altLang="ko-KR" b="0" dirty="0" err="1">
-                <a:solidFill>
-                  <a:srgbClr val="000000"/>
-                </a:solidFill>
-                <a:effectLst/>
-                <a:latin typeface="Consolas" panose="020B0609020204030204" pitchFamily="49" charset="0"/>
-              </a:rPr>
-              <a:t>fillna</a:t>
-            </a:r>
-            <a:r>
-              <a:rPr lang="ko-KR" altLang="ko-KR" b="0" dirty="0">
-                <a:solidFill>
-                  <a:srgbClr val="000000"/>
-                </a:solidFill>
-                <a:effectLst/>
-                <a:latin typeface="Consolas" panose="020B0609020204030204" pitchFamily="49" charset="0"/>
-              </a:rPr>
-              <a:t>(</a:t>
-            </a:r>
-            <a:r>
-              <a:rPr lang="ko-KR" altLang="ko-KR" b="0" dirty="0" err="1">
-                <a:solidFill>
-                  <a:srgbClr val="000000"/>
-                </a:solidFill>
-                <a:effectLst/>
-                <a:latin typeface="Consolas" panose="020B0609020204030204" pitchFamily="49" charset="0"/>
-              </a:rPr>
-              <a:t>df</a:t>
-            </a:r>
-            <a:r>
-              <a:rPr lang="ko-KR" altLang="ko-KR" b="0" dirty="0">
-                <a:solidFill>
-                  <a:srgbClr val="000000"/>
-                </a:solidFill>
-                <a:effectLst/>
-                <a:latin typeface="Consolas" panose="020B0609020204030204" pitchFamily="49" charset="0"/>
-              </a:rPr>
-              <a:t>[</a:t>
-            </a:r>
-            <a:r>
-              <a:rPr lang="ko-KR" altLang="ko-KR" b="0" dirty="0">
-                <a:solidFill>
-                  <a:srgbClr val="A31515"/>
-                </a:solidFill>
-                <a:effectLst/>
-                <a:latin typeface="Consolas" panose="020B0609020204030204" pitchFamily="49" charset="0"/>
-              </a:rPr>
-              <a:t>'</a:t>
-            </a:r>
-            <a:r>
-              <a:rPr lang="ko-KR" altLang="ko-KR" b="0" dirty="0" err="1">
-                <a:solidFill>
-                  <a:srgbClr val="A31515"/>
-                </a:solidFill>
-                <a:effectLst/>
-                <a:latin typeface="Consolas" panose="020B0609020204030204" pitchFamily="49" charset="0"/>
-              </a:rPr>
-              <a:t>humidity_percent</a:t>
-            </a:r>
-            <a:r>
-              <a:rPr lang="ko-KR" altLang="ko-KR" b="0" dirty="0">
-                <a:solidFill>
-                  <a:srgbClr val="A31515"/>
-                </a:solidFill>
-                <a:effectLst/>
-                <a:latin typeface="Consolas" panose="020B0609020204030204" pitchFamily="49" charset="0"/>
-              </a:rPr>
-              <a:t>'</a:t>
-            </a:r>
-            <a:r>
-              <a:rPr lang="ko-KR" altLang="ko-KR" b="0" dirty="0">
-                <a:solidFill>
-                  <a:srgbClr val="000000"/>
-                </a:solidFill>
-                <a:effectLst/>
-                <a:latin typeface="Consolas" panose="020B0609020204030204" pitchFamily="49" charset="0"/>
-              </a:rPr>
-              <a:t>].</a:t>
-            </a:r>
-            <a:r>
-              <a:rPr lang="ko-KR" altLang="ko-KR" b="0" dirty="0" err="1">
-                <a:solidFill>
-                  <a:srgbClr val="000000"/>
-                </a:solidFill>
-                <a:effectLst/>
-                <a:latin typeface="Consolas" panose="020B0609020204030204" pitchFamily="49" charset="0"/>
-              </a:rPr>
-              <a:t>median</a:t>
-            </a:r>
-            <a:r>
-              <a:rPr lang="ko-KR" altLang="ko-KR" b="0" dirty="0">
-                <a:solidFill>
-                  <a:srgbClr val="000000"/>
-                </a:solidFill>
-                <a:effectLst/>
-                <a:latin typeface="Consolas" panose="020B0609020204030204" pitchFamily="49" charset="0"/>
-              </a:rPr>
-              <a:t>())</a:t>
+              <a:t>iqr</a:t>
+            </a:r>
+            <a:r>
+              <a:rPr lang="ko-KR" altLang="ko-KR" b="0" dirty="0">
+                <a:solidFill>
+                  <a:srgbClr val="000000"/>
+                </a:solidFill>
+                <a:effectLst/>
+                <a:latin typeface="Consolas" panose="020B0609020204030204" pitchFamily="49" charset="0"/>
+              </a:rPr>
+              <a:t> = Q3 - Q1</a:t>
             </a:r>
           </a:p>
           <a:p>
@@ -13382,6 +14527,640 @@
                 <a:effectLst/>
                 <a:latin typeface="Consolas" panose="020B0609020204030204" pitchFamily="49" charset="0"/>
               </a:rPr>
+              <a:t>df</a:t>
+            </a:r>
+            <a:r>
+              <a:rPr lang="ko-KR" altLang="ko-KR" b="0" dirty="0">
+                <a:solidFill>
+                  <a:srgbClr val="000000"/>
+                </a:solidFill>
+                <a:effectLst/>
+                <a:latin typeface="Consolas" panose="020B0609020204030204" pitchFamily="49" charset="0"/>
+              </a:rPr>
+              <a:t> = </a:t>
+            </a:r>
+            <a:r>
+              <a:rPr lang="ko-KR" altLang="ko-KR" b="0" dirty="0" err="1">
+                <a:solidFill>
+                  <a:srgbClr val="000000"/>
+                </a:solidFill>
+                <a:effectLst/>
+                <a:latin typeface="Consolas" panose="020B0609020204030204" pitchFamily="49" charset="0"/>
+              </a:rPr>
+              <a:t>df</a:t>
+            </a:r>
+            <a:r>
+              <a:rPr lang="ko-KR" altLang="ko-KR" b="0" dirty="0">
+                <a:solidFill>
+                  <a:srgbClr val="000000"/>
+                </a:solidFill>
+                <a:effectLst/>
+                <a:latin typeface="Consolas" panose="020B0609020204030204" pitchFamily="49" charset="0"/>
+              </a:rPr>
+              <a:t>[(</a:t>
+            </a:r>
+            <a:r>
+              <a:rPr lang="ko-KR" altLang="ko-KR" b="0" dirty="0" err="1">
+                <a:solidFill>
+                  <a:srgbClr val="000000"/>
+                </a:solidFill>
+                <a:effectLst/>
+                <a:latin typeface="Consolas" panose="020B0609020204030204" pitchFamily="49" charset="0"/>
+              </a:rPr>
+              <a:t>df</a:t>
+            </a:r>
+            <a:r>
+              <a:rPr lang="ko-KR" altLang="ko-KR" b="0" dirty="0">
+                <a:solidFill>
+                  <a:srgbClr val="000000"/>
+                </a:solidFill>
+                <a:effectLst/>
+                <a:latin typeface="Consolas" panose="020B0609020204030204" pitchFamily="49" charset="0"/>
+              </a:rPr>
+              <a:t>[</a:t>
+            </a:r>
+            <a:r>
+              <a:rPr lang="ko-KR" altLang="ko-KR" b="0" dirty="0">
+                <a:solidFill>
+                  <a:srgbClr val="A31515"/>
+                </a:solidFill>
+                <a:effectLst/>
+                <a:latin typeface="Consolas" panose="020B0609020204030204" pitchFamily="49" charset="0"/>
+              </a:rPr>
+              <a:t>'</a:t>
+            </a:r>
+            <a:r>
+              <a:rPr lang="ko-KR" altLang="ko-KR" b="0" dirty="0" err="1">
+                <a:solidFill>
+                  <a:srgbClr val="A31515"/>
+                </a:solidFill>
+                <a:effectLst/>
+                <a:latin typeface="Consolas" panose="020B0609020204030204" pitchFamily="49" charset="0"/>
+              </a:rPr>
+              <a:t>temperature_c</a:t>
+            </a:r>
+            <a:r>
+              <a:rPr lang="ko-KR" altLang="ko-KR" b="0" dirty="0">
+                <a:solidFill>
+                  <a:srgbClr val="A31515"/>
+                </a:solidFill>
+                <a:effectLst/>
+                <a:latin typeface="Consolas" panose="020B0609020204030204" pitchFamily="49" charset="0"/>
+              </a:rPr>
+              <a:t>'</a:t>
+            </a:r>
+            <a:r>
+              <a:rPr lang="ko-KR" altLang="ko-KR" b="0" dirty="0">
+                <a:solidFill>
+                  <a:srgbClr val="000000"/>
+                </a:solidFill>
+                <a:effectLst/>
+                <a:latin typeface="Consolas" panose="020B0609020204030204" pitchFamily="49" charset="0"/>
+              </a:rPr>
+              <a:t>] &gt;= Q1 - </a:t>
+            </a:r>
+            <a:r>
+              <a:rPr lang="ko-KR" altLang="ko-KR" b="0" dirty="0">
+                <a:solidFill>
+                  <a:srgbClr val="098658"/>
+                </a:solidFill>
+                <a:effectLst/>
+                <a:latin typeface="Consolas" panose="020B0609020204030204" pitchFamily="49" charset="0"/>
+              </a:rPr>
+              <a:t>1.5</a:t>
+            </a:r>
+            <a:r>
+              <a:rPr lang="ko-KR" altLang="ko-KR" b="0" dirty="0">
+                <a:solidFill>
+                  <a:srgbClr val="000000"/>
+                </a:solidFill>
+                <a:effectLst/>
+                <a:latin typeface="Consolas" panose="020B0609020204030204" pitchFamily="49" charset="0"/>
+              </a:rPr>
+              <a:t>*</a:t>
+            </a:r>
+            <a:r>
+              <a:rPr lang="ko-KR" altLang="ko-KR" b="0" dirty="0" err="1">
+                <a:solidFill>
+                  <a:srgbClr val="000000"/>
+                </a:solidFill>
+                <a:effectLst/>
+                <a:latin typeface="Consolas" panose="020B0609020204030204" pitchFamily="49" charset="0"/>
+              </a:rPr>
+              <a:t>iqr</a:t>
+            </a:r>
+            <a:r>
+              <a:rPr lang="ko-KR" altLang="ko-KR" b="0" dirty="0">
+                <a:solidFill>
+                  <a:srgbClr val="000000"/>
+                </a:solidFill>
+                <a:effectLst/>
+                <a:latin typeface="Consolas" panose="020B0609020204030204" pitchFamily="49" charset="0"/>
+              </a:rPr>
+              <a:t>) &amp; (</a:t>
+            </a:r>
+            <a:r>
+              <a:rPr lang="ko-KR" altLang="ko-KR" b="0" dirty="0" err="1">
+                <a:solidFill>
+                  <a:srgbClr val="000000"/>
+                </a:solidFill>
+                <a:effectLst/>
+                <a:latin typeface="Consolas" panose="020B0609020204030204" pitchFamily="49" charset="0"/>
+              </a:rPr>
+              <a:t>df</a:t>
+            </a:r>
+            <a:r>
+              <a:rPr lang="ko-KR" altLang="ko-KR" b="0" dirty="0">
+                <a:solidFill>
+                  <a:srgbClr val="000000"/>
+                </a:solidFill>
+                <a:effectLst/>
+                <a:latin typeface="Consolas" panose="020B0609020204030204" pitchFamily="49" charset="0"/>
+              </a:rPr>
+              <a:t>[</a:t>
+            </a:r>
+            <a:r>
+              <a:rPr lang="ko-KR" altLang="ko-KR" b="0" dirty="0">
+                <a:solidFill>
+                  <a:srgbClr val="A31515"/>
+                </a:solidFill>
+                <a:effectLst/>
+                <a:latin typeface="Consolas" panose="020B0609020204030204" pitchFamily="49" charset="0"/>
+              </a:rPr>
+              <a:t>'</a:t>
+            </a:r>
+            <a:r>
+              <a:rPr lang="ko-KR" altLang="ko-KR" b="0" dirty="0" err="1">
+                <a:solidFill>
+                  <a:srgbClr val="A31515"/>
+                </a:solidFill>
+                <a:effectLst/>
+                <a:latin typeface="Consolas" panose="020B0609020204030204" pitchFamily="49" charset="0"/>
+              </a:rPr>
+              <a:t>temperature_c</a:t>
+            </a:r>
+            <a:r>
+              <a:rPr lang="ko-KR" altLang="ko-KR" b="0" dirty="0">
+                <a:solidFill>
+                  <a:srgbClr val="A31515"/>
+                </a:solidFill>
+                <a:effectLst/>
+                <a:latin typeface="Consolas" panose="020B0609020204030204" pitchFamily="49" charset="0"/>
+              </a:rPr>
+              <a:t>'</a:t>
+            </a:r>
+            <a:r>
+              <a:rPr lang="ko-KR" altLang="ko-KR" b="0" dirty="0">
+                <a:solidFill>
+                  <a:srgbClr val="000000"/>
+                </a:solidFill>
+                <a:effectLst/>
+                <a:latin typeface="Consolas" panose="020B0609020204030204" pitchFamily="49" charset="0"/>
+              </a:rPr>
+              <a:t>] &lt;= Q3 + </a:t>
+            </a:r>
+            <a:r>
+              <a:rPr lang="ko-KR" altLang="ko-KR" b="0" dirty="0">
+                <a:solidFill>
+                  <a:srgbClr val="098658"/>
+                </a:solidFill>
+                <a:effectLst/>
+                <a:latin typeface="Consolas" panose="020B0609020204030204" pitchFamily="49" charset="0"/>
+              </a:rPr>
+              <a:t>1.5</a:t>
+            </a:r>
+            <a:r>
+              <a:rPr lang="ko-KR" altLang="ko-KR" b="0" dirty="0">
+                <a:solidFill>
+                  <a:srgbClr val="000000"/>
+                </a:solidFill>
+                <a:effectLst/>
+                <a:latin typeface="Consolas" panose="020B0609020204030204" pitchFamily="49" charset="0"/>
+              </a:rPr>
+              <a:t>*</a:t>
+            </a:r>
+            <a:r>
+              <a:rPr lang="ko-KR" altLang="ko-KR" b="0" dirty="0" err="1">
+                <a:solidFill>
+                  <a:srgbClr val="000000"/>
+                </a:solidFill>
+                <a:effectLst/>
+                <a:latin typeface="Consolas" panose="020B0609020204030204" pitchFamily="49" charset="0"/>
+              </a:rPr>
+              <a:t>iqr</a:t>
+            </a:r>
+            <a:r>
+              <a:rPr lang="ko-KR" altLang="ko-KR" b="0" dirty="0">
+                <a:solidFill>
+                  <a:srgbClr val="000000"/>
+                </a:solidFill>
+                <a:effectLst/>
+                <a:latin typeface="Consolas" panose="020B0609020204030204" pitchFamily="49" charset="0"/>
+              </a:rPr>
+              <a:t>)]</a:t>
+            </a:r>
+            <a:endParaRPr lang="en-US" altLang="ko-KR" b="0" dirty="0">
+              <a:solidFill>
+                <a:srgbClr val="000000"/>
+              </a:solidFill>
+              <a:effectLst/>
+              <a:latin typeface="Consolas" panose="020B0609020204030204" pitchFamily="49" charset="0"/>
+            </a:endParaRPr>
+          </a:p>
+          <a:p>
+            <a:pPr>
+              <a:lnSpc>
+                <a:spcPts val="1425"/>
+              </a:lnSpc>
+              <a:buNone/>
+            </a:pPr>
+            <a:endParaRPr lang="en-US" altLang="ko-KR" dirty="0">
+              <a:solidFill>
+                <a:srgbClr val="000000"/>
+              </a:solidFill>
+              <a:latin typeface="Consolas" panose="020B0609020204030204" pitchFamily="49" charset="0"/>
+            </a:endParaRPr>
+          </a:p>
+          <a:p>
+            <a:pPr>
+              <a:lnSpc>
+                <a:spcPts val="1425"/>
+              </a:lnSpc>
+              <a:buNone/>
+            </a:pPr>
+            <a:endParaRPr lang="ko-KR" altLang="ko-KR" b="0" dirty="0">
+              <a:solidFill>
+                <a:srgbClr val="000000"/>
+              </a:solidFill>
+              <a:effectLst/>
+              <a:latin typeface="Consolas" panose="020B0609020204030204" pitchFamily="49" charset="0"/>
+            </a:endParaRPr>
+          </a:p>
+          <a:p>
+            <a:pPr>
+              <a:lnSpc>
+                <a:spcPts val="1425"/>
+              </a:lnSpc>
+              <a:buNone/>
+            </a:pPr>
+            <a:r>
+              <a:rPr lang="ko-KR" altLang="ko-KR" b="0" dirty="0">
+                <a:solidFill>
+                  <a:srgbClr val="000000"/>
+                </a:solidFill>
+                <a:effectLst/>
+                <a:latin typeface="Consolas" panose="020B0609020204030204" pitchFamily="49" charset="0"/>
+              </a:rPr>
+              <a:t>    </a:t>
+            </a:r>
+            <a:r>
+              <a:rPr lang="ko-KR" altLang="ko-KR" b="0" dirty="0">
+                <a:solidFill>
+                  <a:srgbClr val="008000"/>
+                </a:solidFill>
+                <a:effectLst/>
+                <a:latin typeface="Consolas" panose="020B0609020204030204" pitchFamily="49" charset="0"/>
+              </a:rPr>
+              <a:t># 4)</a:t>
+            </a:r>
+            <a:r>
+              <a:rPr lang="ko-KR" altLang="ko-KR" b="0" dirty="0" err="1">
+                <a:solidFill>
+                  <a:srgbClr val="008000"/>
+                </a:solidFill>
+                <a:effectLst/>
+                <a:latin typeface="Consolas" panose="020B0609020204030204" pitchFamily="49" charset="0"/>
+              </a:rPr>
+              <a:t>결측치</a:t>
+            </a:r>
+            <a:r>
+              <a:rPr lang="ko-KR" altLang="ko-KR" b="0" dirty="0">
+                <a:solidFill>
+                  <a:srgbClr val="008000"/>
+                </a:solidFill>
+                <a:effectLst/>
+                <a:latin typeface="Consolas" panose="020B0609020204030204" pitchFamily="49" charset="0"/>
+              </a:rPr>
+              <a:t> 처리 : 중앙값으로 대체  </a:t>
+            </a:r>
+            <a:endParaRPr lang="en-US" altLang="ko-KR" b="0" dirty="0">
+              <a:solidFill>
+                <a:srgbClr val="008000"/>
+              </a:solidFill>
+              <a:effectLst/>
+              <a:latin typeface="Consolas" panose="020B0609020204030204" pitchFamily="49" charset="0"/>
+            </a:endParaRPr>
+          </a:p>
+          <a:p>
+            <a:pPr>
+              <a:lnSpc>
+                <a:spcPts val="1425"/>
+              </a:lnSpc>
+              <a:buNone/>
+            </a:pPr>
+            <a:r>
+              <a:rPr lang="ko-KR" altLang="ko-KR" b="0" dirty="0">
+                <a:solidFill>
+                  <a:srgbClr val="008000"/>
+                </a:solidFill>
+                <a:effectLst/>
+                <a:latin typeface="Consolas" panose="020B0609020204030204" pitchFamily="49" charset="0"/>
+              </a:rPr>
+              <a:t> </a:t>
+            </a:r>
+            <a:endParaRPr lang="ko-KR" altLang="ko-KR" b="0" dirty="0">
+              <a:solidFill>
+                <a:srgbClr val="000000"/>
+              </a:solidFill>
+              <a:effectLst/>
+              <a:latin typeface="Consolas" panose="020B0609020204030204" pitchFamily="49" charset="0"/>
+            </a:endParaRPr>
+          </a:p>
+          <a:p>
+            <a:pPr>
+              <a:lnSpc>
+                <a:spcPts val="1425"/>
+              </a:lnSpc>
+              <a:buNone/>
+            </a:pPr>
+            <a:r>
+              <a:rPr lang="ko-KR" altLang="ko-KR" b="0" dirty="0">
+                <a:solidFill>
+                  <a:srgbClr val="000000"/>
+                </a:solidFill>
+                <a:effectLst/>
+                <a:latin typeface="Consolas" panose="020B0609020204030204" pitchFamily="49" charset="0"/>
+              </a:rPr>
+              <a:t>    </a:t>
+            </a:r>
+            <a:r>
+              <a:rPr lang="ko-KR" altLang="ko-KR" b="0" dirty="0" err="1">
+                <a:solidFill>
+                  <a:srgbClr val="000000"/>
+                </a:solidFill>
+                <a:effectLst/>
+                <a:latin typeface="Consolas" panose="020B0609020204030204" pitchFamily="49" charset="0"/>
+              </a:rPr>
+              <a:t>df</a:t>
+            </a:r>
+            <a:r>
+              <a:rPr lang="ko-KR" altLang="ko-KR" b="0" dirty="0">
+                <a:solidFill>
+                  <a:srgbClr val="000000"/>
+                </a:solidFill>
+                <a:effectLst/>
+                <a:latin typeface="Consolas" panose="020B0609020204030204" pitchFamily="49" charset="0"/>
+              </a:rPr>
+              <a:t>[</a:t>
+            </a:r>
+            <a:r>
+              <a:rPr lang="ko-KR" altLang="ko-KR" b="0" dirty="0">
+                <a:solidFill>
+                  <a:srgbClr val="A31515"/>
+                </a:solidFill>
+                <a:effectLst/>
+                <a:latin typeface="Consolas" panose="020B0609020204030204" pitchFamily="49" charset="0"/>
+              </a:rPr>
+              <a:t>'</a:t>
+            </a:r>
+            <a:r>
+              <a:rPr lang="ko-KR" altLang="ko-KR" b="0" dirty="0" err="1">
+                <a:solidFill>
+                  <a:srgbClr val="A31515"/>
+                </a:solidFill>
+                <a:effectLst/>
+                <a:latin typeface="Consolas" panose="020B0609020204030204" pitchFamily="49" charset="0"/>
+              </a:rPr>
+              <a:t>humidity_percent</a:t>
+            </a:r>
+            <a:r>
+              <a:rPr lang="ko-KR" altLang="ko-KR" b="0" dirty="0">
+                <a:solidFill>
+                  <a:srgbClr val="A31515"/>
+                </a:solidFill>
+                <a:effectLst/>
+                <a:latin typeface="Consolas" panose="020B0609020204030204" pitchFamily="49" charset="0"/>
+              </a:rPr>
+              <a:t>'</a:t>
+            </a:r>
+            <a:r>
+              <a:rPr lang="ko-KR" altLang="ko-KR" b="0" dirty="0">
+                <a:solidFill>
+                  <a:srgbClr val="000000"/>
+                </a:solidFill>
+                <a:effectLst/>
+                <a:latin typeface="Consolas" panose="020B0609020204030204" pitchFamily="49" charset="0"/>
+              </a:rPr>
+              <a:t>] = </a:t>
+            </a:r>
+            <a:r>
+              <a:rPr lang="ko-KR" altLang="ko-KR" b="0" dirty="0" err="1">
+                <a:solidFill>
+                  <a:srgbClr val="000000"/>
+                </a:solidFill>
+                <a:effectLst/>
+                <a:latin typeface="Consolas" panose="020B0609020204030204" pitchFamily="49" charset="0"/>
+              </a:rPr>
+              <a:t>df</a:t>
+            </a:r>
+            <a:r>
+              <a:rPr lang="ko-KR" altLang="ko-KR" b="0" dirty="0">
+                <a:solidFill>
+                  <a:srgbClr val="000000"/>
+                </a:solidFill>
+                <a:effectLst/>
+                <a:latin typeface="Consolas" panose="020B0609020204030204" pitchFamily="49" charset="0"/>
+              </a:rPr>
+              <a:t>[</a:t>
+            </a:r>
+            <a:r>
+              <a:rPr lang="ko-KR" altLang="ko-KR" b="0" dirty="0">
+                <a:solidFill>
+                  <a:srgbClr val="A31515"/>
+                </a:solidFill>
+                <a:effectLst/>
+                <a:latin typeface="Consolas" panose="020B0609020204030204" pitchFamily="49" charset="0"/>
+              </a:rPr>
+              <a:t>'</a:t>
+            </a:r>
+            <a:r>
+              <a:rPr lang="ko-KR" altLang="ko-KR" b="0" dirty="0" err="1">
+                <a:solidFill>
+                  <a:srgbClr val="A31515"/>
+                </a:solidFill>
+                <a:effectLst/>
+                <a:latin typeface="Consolas" panose="020B0609020204030204" pitchFamily="49" charset="0"/>
+              </a:rPr>
+              <a:t>humidity_percent</a:t>
+            </a:r>
+            <a:r>
+              <a:rPr lang="ko-KR" altLang="ko-KR" b="0" dirty="0">
+                <a:solidFill>
+                  <a:srgbClr val="A31515"/>
+                </a:solidFill>
+                <a:effectLst/>
+                <a:latin typeface="Consolas" panose="020B0609020204030204" pitchFamily="49" charset="0"/>
+              </a:rPr>
+              <a:t>'</a:t>
+            </a:r>
+            <a:r>
+              <a:rPr lang="ko-KR" altLang="ko-KR" b="0" dirty="0">
+                <a:solidFill>
+                  <a:srgbClr val="000000"/>
+                </a:solidFill>
+                <a:effectLst/>
+                <a:latin typeface="Consolas" panose="020B0609020204030204" pitchFamily="49" charset="0"/>
+              </a:rPr>
+              <a:t>].</a:t>
+            </a:r>
+            <a:r>
+              <a:rPr lang="ko-KR" altLang="ko-KR" b="0" dirty="0" err="1">
+                <a:solidFill>
+                  <a:srgbClr val="000000"/>
+                </a:solidFill>
+                <a:effectLst/>
+                <a:latin typeface="Consolas" panose="020B0609020204030204" pitchFamily="49" charset="0"/>
+              </a:rPr>
+              <a:t>fillna</a:t>
+            </a:r>
+            <a:r>
+              <a:rPr lang="ko-KR" altLang="ko-KR" b="0" dirty="0">
+                <a:solidFill>
+                  <a:srgbClr val="000000"/>
+                </a:solidFill>
+                <a:effectLst/>
+                <a:latin typeface="Consolas" panose="020B0609020204030204" pitchFamily="49" charset="0"/>
+              </a:rPr>
+              <a:t>(</a:t>
+            </a:r>
+            <a:r>
+              <a:rPr lang="ko-KR" altLang="ko-KR" b="0" dirty="0" err="1">
+                <a:solidFill>
+                  <a:srgbClr val="000000"/>
+                </a:solidFill>
+                <a:effectLst/>
+                <a:latin typeface="Consolas" panose="020B0609020204030204" pitchFamily="49" charset="0"/>
+              </a:rPr>
+              <a:t>df</a:t>
+            </a:r>
+            <a:r>
+              <a:rPr lang="ko-KR" altLang="ko-KR" b="0" dirty="0">
+                <a:solidFill>
+                  <a:srgbClr val="000000"/>
+                </a:solidFill>
+                <a:effectLst/>
+                <a:latin typeface="Consolas" panose="020B0609020204030204" pitchFamily="49" charset="0"/>
+              </a:rPr>
+              <a:t>[</a:t>
+            </a:r>
+            <a:r>
+              <a:rPr lang="ko-KR" altLang="ko-KR" b="0" dirty="0">
+                <a:solidFill>
+                  <a:srgbClr val="A31515"/>
+                </a:solidFill>
+                <a:effectLst/>
+                <a:latin typeface="Consolas" panose="020B0609020204030204" pitchFamily="49" charset="0"/>
+              </a:rPr>
+              <a:t>'</a:t>
+            </a:r>
+            <a:r>
+              <a:rPr lang="ko-KR" altLang="ko-KR" b="0" dirty="0" err="1">
+                <a:solidFill>
+                  <a:srgbClr val="A31515"/>
+                </a:solidFill>
+                <a:effectLst/>
+                <a:latin typeface="Consolas" panose="020B0609020204030204" pitchFamily="49" charset="0"/>
+              </a:rPr>
+              <a:t>humidity_percent</a:t>
+            </a:r>
+            <a:r>
+              <a:rPr lang="ko-KR" altLang="ko-KR" b="0" dirty="0">
+                <a:solidFill>
+                  <a:srgbClr val="A31515"/>
+                </a:solidFill>
+                <a:effectLst/>
+                <a:latin typeface="Consolas" panose="020B0609020204030204" pitchFamily="49" charset="0"/>
+              </a:rPr>
+              <a:t>'</a:t>
+            </a:r>
+            <a:r>
+              <a:rPr lang="ko-KR" altLang="ko-KR" b="0" dirty="0">
+                <a:solidFill>
+                  <a:srgbClr val="000000"/>
+                </a:solidFill>
+                <a:effectLst/>
+                <a:latin typeface="Consolas" panose="020B0609020204030204" pitchFamily="49" charset="0"/>
+              </a:rPr>
+              <a:t>].</a:t>
+            </a:r>
+            <a:r>
+              <a:rPr lang="ko-KR" altLang="ko-KR" b="0" dirty="0" err="1">
+                <a:solidFill>
+                  <a:srgbClr val="000000"/>
+                </a:solidFill>
+                <a:effectLst/>
+                <a:latin typeface="Consolas" panose="020B0609020204030204" pitchFamily="49" charset="0"/>
+              </a:rPr>
+              <a:t>median</a:t>
+            </a:r>
+            <a:r>
+              <a:rPr lang="ko-KR" altLang="ko-KR" b="0" dirty="0">
+                <a:solidFill>
+                  <a:srgbClr val="000000"/>
+                </a:solidFill>
+                <a:effectLst/>
+                <a:latin typeface="Consolas" panose="020B0609020204030204" pitchFamily="49" charset="0"/>
+              </a:rPr>
+              <a:t>())</a:t>
+            </a:r>
+            <a:endParaRPr lang="en-US" altLang="ko-KR" b="0" dirty="0">
+              <a:solidFill>
+                <a:srgbClr val="000000"/>
+              </a:solidFill>
+              <a:effectLst/>
+              <a:latin typeface="Consolas" panose="020B0609020204030204" pitchFamily="49" charset="0"/>
+            </a:endParaRPr>
+          </a:p>
+          <a:p>
+            <a:pPr>
+              <a:lnSpc>
+                <a:spcPts val="1425"/>
+              </a:lnSpc>
+              <a:buNone/>
+            </a:pPr>
+            <a:endParaRPr lang="ko-KR" altLang="ko-KR" b="0" dirty="0">
+              <a:solidFill>
+                <a:srgbClr val="000000"/>
+              </a:solidFill>
+              <a:effectLst/>
+              <a:latin typeface="Consolas" panose="020B0609020204030204" pitchFamily="49" charset="0"/>
+            </a:endParaRPr>
+          </a:p>
+          <a:p>
+            <a:pPr>
+              <a:lnSpc>
+                <a:spcPts val="1425"/>
+              </a:lnSpc>
+              <a:buNone/>
+            </a:pPr>
+            <a:r>
+              <a:rPr lang="ko-KR" altLang="ko-KR" b="0" dirty="0">
+                <a:solidFill>
+                  <a:srgbClr val="000000"/>
+                </a:solidFill>
+                <a:effectLst/>
+                <a:latin typeface="Consolas" panose="020B0609020204030204" pitchFamily="49" charset="0"/>
+              </a:rPr>
+              <a:t>    </a:t>
+            </a:r>
+            <a:r>
+              <a:rPr lang="ko-KR" altLang="ko-KR" b="0" dirty="0" err="1">
+                <a:solidFill>
+                  <a:srgbClr val="000000"/>
+                </a:solidFill>
+                <a:effectLst/>
+                <a:latin typeface="Consolas" panose="020B0609020204030204" pitchFamily="49" charset="0"/>
+              </a:rPr>
               <a:t>df.to_csv</a:t>
             </a:r>
             <a:r>
@@ -13474,6 +15253,28 @@
               </a:rPr>
               <a:t>)</a:t>
             </a:r>
+            <a:endParaRPr lang="en-US" altLang="ko-KR" b="0" dirty="0">
+              <a:solidFill>
+                <a:srgbClr val="000000"/>
+              </a:solidFill>
+              <a:effectLst/>
+              <a:latin typeface="Consolas" panose="020B0609020204030204" pitchFamily="49" charset="0"/>
+            </a:endParaRPr>
+          </a:p>
+          <a:p>
+            <a:pPr>
+              <a:lnSpc>
+                <a:spcPts val="1425"/>
+              </a:lnSpc>
+              <a:buNone/>
+            </a:pPr>
+            <a:endParaRPr lang="ko-KR" altLang="ko-KR" b="0" dirty="0">
+              <a:solidFill>
+                <a:srgbClr val="000000"/>
+              </a:solidFill>
+              <a:effectLst/>
+              <a:latin typeface="Consolas" panose="020B0609020204030204" pitchFamily="49" charset="0"/>
+            </a:endParaRPr>
           </a:p>
           <a:p>
             <a:pPr>
@@ -13569,7 +15370,898 @@
 </p:sld>
 </file>
 
-<file path=ppt/slides/slide19.xml><?xml version="1.0" encoding="utf-8"?>
+<file path=ppt/slides/slide2.xml><?xml version="1.0" encoding="utf-8"?>
+<p:sld xmlns:a="http://schemas.openxmlformats.org/drawingml/2006/main" xmlns:r="http://schemas.openxmlformats.org/officeDocument/2006/relationships" xmlns:p="http://schemas.openxmlformats.org/presentationml/2006/main">
+  <p:cSld>
+    <p:spTree>
+      <p:nvGrpSpPr>
+        <p:cNvPr id="1" name=""/>
+        <p:cNvGrpSpPr/>
+        <p:nvPr/>
+      </p:nvGrpSpPr>
+      <p:grpSpPr>
+        <a:xfrm>
+          <a:off x="0" y="0"/>
+          <a:ext cx="0" cy="0"/>
+          <a:chOff x="0" y="0"/>
+          <a:chExt cx="0" cy="0"/>
+        </a:xfrm>
+      </p:grpSpPr>
+      <p:sp>
+        <p:nvSpPr>
+          <p:cNvPr id="4" name="TextBox 3">
+            <a:extLst>
+              <a:ext uri="{FF2B5EF4-FFF2-40B4-BE49-F238E27FC236}">
+                <a16:creationId xmlns:a16="http://schemas.microsoft.com/office/drawing/2014/main" id="{4C80C73C-400D-EE16-834E-78720F65B16A}"/>
+              </a:ext>
+            </a:extLst>
+          </p:cNvPr>
+          <p:cNvSpPr txBox="1"/>
+          <p:nvPr/>
+        </p:nvSpPr>
+        <p:spPr>
+          <a:xfrm>
+            <a:off x="1524000" y="796413"/>
+            <a:ext cx="9478297" cy="246221"/>
+          </a:xfrm>
+          <a:prstGeom prst="rect">
+            <a:avLst/>
+          </a:prstGeom>
+          <a:noFill/>
+        </p:spPr>
+        <p:txBody>
+          <a:bodyPr wrap="square" rtlCol="0">
+            <a:spAutoFit/>
+          </a:bodyPr>
+          <a:lstStyle/>
+          <a:p>
+            <a:endParaRPr lang="ko-KR" altLang="en-US" sz="1000" dirty="0"/>
+          </a:p>
+        </p:txBody>
+      </p:sp>
+      <p:sp>
+        <p:nvSpPr>
+          <p:cNvPr id="6" name="TextBox 5">
+            <a:extLst>
+              <a:ext uri="{FF2B5EF4-FFF2-40B4-BE49-F238E27FC236}">
+                <a16:creationId xmlns:a16="http://schemas.microsoft.com/office/drawing/2014/main" id="{DB3F5348-EB3A-F591-D50E-A0E9BDD0E50E}"/>
+              </a:ext>
+            </a:extLst>
+          </p:cNvPr>
+          <p:cNvSpPr txBox="1"/>
+          <p:nvPr/>
+        </p:nvSpPr>
+        <p:spPr>
+          <a:xfrm>
+            <a:off x="619432" y="353961"/>
+            <a:ext cx="10933471" cy="6140142"/>
+          </a:xfrm>
+          <a:prstGeom prst="rect">
+            <a:avLst/>
+          </a:prstGeom>
+          <a:noFill/>
+        </p:spPr>
+        <p:txBody>
+          <a:bodyPr wrap="square" rtlCol="0">
+            <a:spAutoFit/>
+          </a:bodyPr>
+          <a:lstStyle/>
+          <a:p>
+            <a:r>
+              <a:rPr lang="ko-KR" altLang="ko-KR" sz="1200" dirty="0" err="1"/>
+              <a:t>import</a:t>
+            </a:r>
+            <a:r>
+              <a:rPr lang="ko-KR" altLang="ko-KR" sz="1200" dirty="0"/>
+              <a:t> </a:t>
+            </a:r>
+            <a:r>
+              <a:rPr lang="ko-KR" altLang="ko-KR" sz="1200" dirty="0" err="1"/>
+              <a:t>pandas</a:t>
+            </a:r>
+            <a:r>
+              <a:rPr lang="ko-KR" altLang="ko-KR" sz="1200" dirty="0"/>
+              <a:t> </a:t>
+            </a:r>
+            <a:r>
+              <a:rPr lang="ko-KR" altLang="ko-KR" sz="1200" dirty="0" err="1"/>
+              <a:t>as</a:t>
+            </a:r>
+            <a:r>
+              <a:rPr lang="ko-KR" altLang="ko-KR" sz="1200" dirty="0"/>
+              <a:t> </a:t>
+            </a:r>
+            <a:r>
+              <a:rPr lang="ko-KR" altLang="ko-KR" sz="1200" dirty="0" err="1"/>
+              <a:t>pd</a:t>
+            </a:r>
+            <a:endParaRPr lang="ko-KR" altLang="ko-KR" sz="1200" dirty="0"/>
+          </a:p>
+          <a:p>
+            <a:r>
+              <a:rPr lang="ko-KR" altLang="ko-KR" sz="1200" dirty="0" err="1"/>
+              <a:t>import</a:t>
+            </a:r>
+            <a:r>
+              <a:rPr lang="ko-KR" altLang="ko-KR" sz="1200" dirty="0"/>
+              <a:t> </a:t>
+            </a:r>
+            <a:r>
+              <a:rPr lang="ko-KR" altLang="ko-KR" sz="1200" dirty="0" err="1"/>
+              <a:t>numpy</a:t>
+            </a:r>
+            <a:r>
+              <a:rPr lang="ko-KR" altLang="ko-KR" sz="1200" dirty="0"/>
+              <a:t> </a:t>
+            </a:r>
+            <a:r>
+              <a:rPr lang="ko-KR" altLang="ko-KR" sz="1200" dirty="0" err="1"/>
+              <a:t>as</a:t>
+            </a:r>
+            <a:r>
+              <a:rPr lang="ko-KR" altLang="ko-KR" sz="1200" dirty="0"/>
+              <a:t> </a:t>
+            </a:r>
+            <a:r>
+              <a:rPr lang="ko-KR" altLang="ko-KR" sz="1200" dirty="0" err="1"/>
+              <a:t>np</a:t>
+            </a:r>
+            <a:endParaRPr lang="ko-KR" altLang="ko-KR" sz="1200" dirty="0"/>
+          </a:p>
+          <a:p>
+            <a:br>
+              <a:rPr lang="ko-KR" altLang="ko-KR" sz="1200" dirty="0"/>
+            </a:br>
+            <a:endParaRPr lang="ko-KR" altLang="ko-KR" sz="1200" dirty="0"/>
+          </a:p>
+          <a:p>
+            <a:r>
+              <a:rPr lang="ko-KR" altLang="ko-KR" sz="1200" dirty="0" err="1"/>
+              <a:t>n</a:t>
+            </a:r>
+            <a:r>
+              <a:rPr lang="ko-KR" altLang="ko-KR" sz="1200" dirty="0"/>
+              <a:t> = 500 # 500줄</a:t>
+            </a:r>
+          </a:p>
+          <a:p>
+            <a:r>
+              <a:rPr lang="ko-KR" altLang="ko-KR" sz="1200" dirty="0" err="1"/>
+              <a:t>np.random.seed</a:t>
+            </a:r>
+            <a:r>
+              <a:rPr lang="ko-KR" altLang="ko-KR" sz="1200" dirty="0"/>
+              <a:t>(42) # 랜덤 시작 점 42상태에서 난수 생성</a:t>
+            </a:r>
+          </a:p>
+          <a:p>
+            <a:br>
+              <a:rPr lang="ko-KR" altLang="ko-KR" sz="1200" dirty="0"/>
+            </a:br>
+            <a:endParaRPr lang="ko-KR" altLang="ko-KR" sz="1200" dirty="0"/>
+          </a:p>
+          <a:p>
+            <a:r>
+              <a:rPr lang="ko-KR" altLang="ko-KR" sz="1200" dirty="0" err="1"/>
+              <a:t>df</a:t>
+            </a:r>
+            <a:r>
+              <a:rPr lang="ko-KR" altLang="ko-KR" sz="1200" dirty="0"/>
+              <a:t> = </a:t>
+            </a:r>
+            <a:r>
+              <a:rPr lang="ko-KR" altLang="ko-KR" sz="1200" dirty="0" err="1"/>
+              <a:t>pd.DataFrame</a:t>
+            </a:r>
+            <a:r>
+              <a:rPr lang="ko-KR" altLang="ko-KR" sz="1200" dirty="0"/>
+              <a:t>({</a:t>
+            </a:r>
+          </a:p>
+          <a:p>
+            <a:br>
+              <a:rPr lang="ko-KR" altLang="ko-KR" sz="1200" dirty="0"/>
+            </a:br>
+            <a:endParaRPr lang="ko-KR" altLang="ko-KR" sz="1200" dirty="0"/>
+          </a:p>
+          <a:p>
+            <a:r>
+              <a:rPr lang="ko-KR" altLang="ko-KR" sz="1200" dirty="0"/>
+              <a:t>    # 시간: 1시간 간격의 데이터 생성</a:t>
+            </a:r>
+          </a:p>
+          <a:p>
+            <a:r>
+              <a:rPr lang="ko-KR" altLang="ko-KR" sz="1200" dirty="0"/>
+              <a:t>    '</a:t>
+            </a:r>
+            <a:r>
+              <a:rPr lang="ko-KR" altLang="ko-KR" sz="1200" dirty="0" err="1"/>
+              <a:t>time</a:t>
+            </a:r>
+            <a:r>
+              <a:rPr lang="ko-KR" altLang="ko-KR" sz="1200" dirty="0"/>
+              <a:t>': </a:t>
+            </a:r>
+            <a:r>
+              <a:rPr lang="ko-KR" altLang="ko-KR" sz="1200" dirty="0" err="1"/>
+              <a:t>pd.date_range</a:t>
+            </a:r>
+            <a:r>
+              <a:rPr lang="ko-KR" altLang="ko-KR" sz="1200" dirty="0"/>
+              <a:t>('2026-06-08', </a:t>
+            </a:r>
+            <a:r>
+              <a:rPr lang="ko-KR" altLang="ko-KR" sz="1200" dirty="0" err="1"/>
+              <a:t>periods</a:t>
+            </a:r>
+            <a:r>
+              <a:rPr lang="ko-KR" altLang="ko-KR" sz="1200" dirty="0"/>
+              <a:t>=</a:t>
+            </a:r>
+            <a:r>
+              <a:rPr lang="ko-KR" altLang="ko-KR" sz="1200" dirty="0" err="1"/>
+              <a:t>n</a:t>
+            </a:r>
+            <a:r>
+              <a:rPr lang="ko-KR" altLang="ko-KR" sz="1200" dirty="0"/>
+              <a:t>, </a:t>
+            </a:r>
+            <a:r>
+              <a:rPr lang="ko-KR" altLang="ko-KR" sz="1200" dirty="0" err="1"/>
+              <a:t>freq</a:t>
+            </a:r>
+            <a:r>
+              <a:rPr lang="ko-KR" altLang="ko-KR" sz="1200" dirty="0"/>
+              <a:t>='</a:t>
+            </a:r>
+            <a:r>
+              <a:rPr lang="ko-KR" altLang="ko-KR" sz="1200" dirty="0" err="1"/>
+              <a:t>h</a:t>
+            </a:r>
+            <a:r>
+              <a:rPr lang="ko-KR" altLang="ko-KR" sz="1200" dirty="0"/>
+              <a:t>’),</a:t>
+            </a:r>
+            <a:endParaRPr lang="en-US" altLang="ko-KR" sz="1200" dirty="0"/>
+          </a:p>
+          <a:p>
+            <a:endParaRPr lang="ko-KR" altLang="ko-KR" sz="1200" dirty="0"/>
+          </a:p>
+          <a:p>
+            <a:r>
+              <a:rPr lang="ko-KR" altLang="ko-KR" sz="1200" dirty="0"/>
+              <a:t>    </a:t>
+            </a:r>
+          </a:p>
+          <a:p>
+            <a:r>
+              <a:rPr lang="ko-KR" altLang="ko-KR" sz="1200" dirty="0"/>
+              <a:t>    # 온도(섭씨): 25도 전후 (초여름 날씨 가정)</a:t>
+            </a:r>
+          </a:p>
+          <a:p>
+            <a:r>
+              <a:rPr lang="ko-KR" altLang="ko-KR" sz="1200" dirty="0"/>
+              <a:t>    '</a:t>
+            </a:r>
+            <a:r>
+              <a:rPr lang="ko-KR" altLang="ko-KR" sz="1200" dirty="0" err="1"/>
+              <a:t>temperature_c</a:t>
+            </a:r>
+            <a:r>
+              <a:rPr lang="ko-KR" altLang="ko-KR" sz="1200" dirty="0"/>
+              <a:t>': </a:t>
+            </a:r>
+            <a:r>
+              <a:rPr lang="ko-KR" altLang="ko-KR" sz="1200" dirty="0" err="1"/>
+              <a:t>np.random.normal</a:t>
+            </a:r>
+            <a:r>
+              <a:rPr lang="ko-KR" altLang="ko-KR" sz="1200" dirty="0"/>
+              <a:t>(25, 3, </a:t>
+            </a:r>
+            <a:r>
+              <a:rPr lang="ko-KR" altLang="ko-KR" sz="1200" dirty="0" err="1"/>
+              <a:t>n</a:t>
+            </a:r>
+            <a:r>
+              <a:rPr lang="ko-KR" altLang="ko-KR" sz="1200" dirty="0"/>
+              <a:t>), </a:t>
+            </a:r>
+          </a:p>
+          <a:p>
+            <a:r>
+              <a:rPr lang="ko-KR" altLang="ko-KR" sz="1200" dirty="0"/>
+              <a:t>    </a:t>
+            </a:r>
+          </a:p>
+          <a:p>
+            <a:r>
+              <a:rPr lang="ko-KR" altLang="ko-KR" sz="1200" dirty="0"/>
+              <a:t>    # 습도(%): 60% 전후 (일반적인 습도)</a:t>
+            </a:r>
+          </a:p>
+          <a:p>
+            <a:r>
+              <a:rPr lang="ko-KR" altLang="ko-KR" sz="1200" dirty="0"/>
+              <a:t>    '</a:t>
+            </a:r>
+            <a:r>
+              <a:rPr lang="ko-KR" altLang="ko-KR" sz="1200" dirty="0" err="1"/>
+              <a:t>humidity_percent</a:t>
+            </a:r>
+            <a:r>
+              <a:rPr lang="ko-KR" altLang="ko-KR" sz="1200" dirty="0"/>
+              <a:t>': </a:t>
+            </a:r>
+            <a:r>
+              <a:rPr lang="ko-KR" altLang="ko-KR" sz="1200" dirty="0" err="1"/>
+              <a:t>np.random.normal</a:t>
+            </a:r>
+            <a:r>
+              <a:rPr lang="ko-KR" altLang="ko-KR" sz="1200" dirty="0"/>
+              <a:t>(60, 10, </a:t>
+            </a:r>
+            <a:r>
+              <a:rPr lang="ko-KR" altLang="ko-KR" sz="1200" dirty="0" err="1"/>
+              <a:t>n</a:t>
+            </a:r>
+            <a:r>
+              <a:rPr lang="ko-KR" altLang="ko-KR" sz="1200" dirty="0"/>
+              <a:t>), </a:t>
+            </a:r>
+          </a:p>
+          <a:p>
+            <a:r>
+              <a:rPr lang="ko-KR" altLang="ko-KR" sz="1200" dirty="0"/>
+              <a:t>    </a:t>
+            </a:r>
+          </a:p>
+          <a:p>
+            <a:r>
+              <a:rPr lang="ko-KR" altLang="ko-KR" sz="1200" dirty="0"/>
+              <a:t>    # 풍속(</a:t>
+            </a:r>
+            <a:r>
+              <a:rPr lang="ko-KR" altLang="ko-KR" sz="1200" dirty="0" err="1"/>
+              <a:t>m</a:t>
+            </a:r>
+            <a:r>
+              <a:rPr lang="ko-KR" altLang="ko-KR" sz="1200" dirty="0"/>
+              <a:t>/</a:t>
+            </a:r>
+            <a:r>
+              <a:rPr lang="ko-KR" altLang="ko-KR" sz="1200" dirty="0" err="1"/>
+              <a:t>s</a:t>
+            </a:r>
+            <a:r>
+              <a:rPr lang="ko-KR" altLang="ko-KR" sz="1200" dirty="0"/>
+              <a:t>): 3m/</a:t>
+            </a:r>
+            <a:r>
+              <a:rPr lang="ko-KR" altLang="ko-KR" sz="1200" dirty="0" err="1"/>
+              <a:t>s</a:t>
+            </a:r>
+            <a:r>
+              <a:rPr lang="ko-KR" altLang="ko-KR" sz="1200" dirty="0"/>
+              <a:t> 전후 (나뭇잎이 흔들리는 가벼운 바람 수준)</a:t>
+            </a:r>
+          </a:p>
+          <a:p>
+            <a:r>
+              <a:rPr lang="ko-KR" altLang="ko-KR" sz="1200" dirty="0"/>
+              <a:t>    '</a:t>
+            </a:r>
+            <a:r>
+              <a:rPr lang="ko-KR" altLang="ko-KR" sz="1200" dirty="0" err="1"/>
+              <a:t>wind_speed_ms</a:t>
+            </a:r>
+            <a:r>
+              <a:rPr lang="ko-KR" altLang="ko-KR" sz="1200" dirty="0"/>
+              <a:t>': </a:t>
+            </a:r>
+            <a:r>
+              <a:rPr lang="ko-KR" altLang="ko-KR" sz="1200" dirty="0" err="1"/>
+              <a:t>np.random.normal</a:t>
+            </a:r>
+            <a:r>
+              <a:rPr lang="ko-KR" altLang="ko-KR" sz="1200" dirty="0"/>
+              <a:t>(3, 1.5, </a:t>
+            </a:r>
+            <a:r>
+              <a:rPr lang="ko-KR" altLang="ko-KR" sz="1200" dirty="0" err="1"/>
+              <a:t>n</a:t>
+            </a:r>
+            <a:r>
+              <a:rPr lang="ko-KR" altLang="ko-KR" sz="1200" dirty="0"/>
+              <a:t>)</a:t>
+            </a:r>
+          </a:p>
+          <a:p>
+            <a:br>
+              <a:rPr lang="ko-KR" altLang="ko-KR" sz="1200" dirty="0"/>
+            </a:br>
+            <a:endParaRPr lang="ko-KR" altLang="ko-KR" sz="1200" dirty="0"/>
+          </a:p>
+          <a:p>
+            <a:r>
+              <a:rPr lang="ko-KR" altLang="ko-KR" sz="1200" dirty="0"/>
+              <a:t>    </a:t>
+            </a:r>
+          </a:p>
+          <a:p>
+            <a:r>
+              <a:rPr lang="ko-KR" altLang="ko-KR" sz="1200" dirty="0"/>
+              <a:t>})</a:t>
+            </a:r>
+          </a:p>
+          <a:p>
+            <a:br>
+              <a:rPr lang="ko-KR" altLang="ko-KR" sz="1200" dirty="0"/>
+            </a:br>
+            <a:endParaRPr lang="ko-KR" altLang="ko-KR" sz="1200" dirty="0"/>
+          </a:p>
+          <a:p>
+            <a:r>
+              <a:rPr lang="ko-KR" altLang="ko-KR" sz="1200" dirty="0" err="1"/>
+              <a:t>df</a:t>
+            </a:r>
+            <a:endParaRPr lang="ko-KR" altLang="ko-KR" sz="1200" dirty="0"/>
+          </a:p>
+          <a:p>
+            <a:r>
+              <a:rPr lang="ko-KR" altLang="ko-KR" sz="1200" dirty="0" err="1"/>
+              <a:t>print</a:t>
+            </a:r>
+            <a:r>
+              <a:rPr lang="ko-KR" altLang="ko-KR" sz="1200" dirty="0"/>
+              <a:t>(</a:t>
+            </a:r>
+            <a:r>
+              <a:rPr lang="ko-KR" altLang="ko-KR" sz="1200" dirty="0" err="1"/>
+              <a:t>df.shape</a:t>
+            </a:r>
+            <a:r>
+              <a:rPr lang="ko-KR" altLang="ko-KR" sz="1200" dirty="0"/>
+              <a:t>)</a:t>
+            </a:r>
+          </a:p>
+          <a:p>
+            <a:r>
+              <a:rPr lang="ko-KR" altLang="ko-KR" sz="1200" dirty="0" err="1"/>
+              <a:t>df</a:t>
+            </a:r>
+            <a:endParaRPr lang="ko-KR" altLang="ko-KR" sz="1200" dirty="0"/>
+          </a:p>
+          <a:p>
+            <a:endParaRPr lang="ko-KR" altLang="en-US" sz="900" dirty="0"/>
+          </a:p>
+        </p:txBody>
+      </p:sp>
+      <p:sp>
+        <p:nvSpPr>
+          <p:cNvPr id="2" name="TextBox 1">
+            <a:extLst>
+              <a:ext uri="{FF2B5EF4-FFF2-40B4-BE49-F238E27FC236}">
+                <a16:creationId xmlns:a16="http://schemas.microsoft.com/office/drawing/2014/main" id="{9CF369D3-23A5-8355-9791-7AA6BD7CD28C}"/>
+              </a:ext>
+            </a:extLst>
+          </p:cNvPr>
+          <p:cNvSpPr txBox="1"/>
+          <p:nvPr/>
+        </p:nvSpPr>
+        <p:spPr>
+          <a:xfrm>
+            <a:off x="5279923" y="1042634"/>
+            <a:ext cx="5043948" cy="5078313"/>
+          </a:xfrm>
+          <a:prstGeom prst="rect">
+            <a:avLst/>
+          </a:prstGeom>
+          <a:noFill/>
+        </p:spPr>
+        <p:txBody>
+          <a:bodyPr wrap="square" rtlCol="0">
+            <a:spAutoFit/>
+          </a:bodyPr>
+          <a:lstStyle/>
+          <a:p>
+            <a:r>
+              <a:rPr lang="ko-KR" altLang="en-US" dirty="0">
+                <a:solidFill>
+                  <a:srgbClr val="FF0000"/>
+                </a:solidFill>
+              </a:rPr>
+              <a:t>주제 </a:t>
+            </a:r>
+            <a:r>
+              <a:rPr lang="en-US" altLang="ko-KR" dirty="0">
+                <a:solidFill>
+                  <a:srgbClr val="FF0000"/>
+                </a:solidFill>
+              </a:rPr>
+              <a:t>:  </a:t>
+            </a:r>
+            <a:r>
+              <a:rPr lang="ko-KR" altLang="en-US" dirty="0">
+                <a:solidFill>
+                  <a:srgbClr val="FF0000"/>
+                </a:solidFill>
+              </a:rPr>
+              <a:t>초여름 날씨 데이터</a:t>
+            </a:r>
+            <a:endParaRPr lang="en-US" altLang="ko-KR" dirty="0">
+              <a:solidFill>
+                <a:srgbClr val="FF0000"/>
+              </a:solidFill>
+            </a:endParaRPr>
+          </a:p>
+          <a:p>
+            <a:endParaRPr lang="en-US" altLang="ko-KR" dirty="0">
+              <a:solidFill>
+                <a:srgbClr val="FF0000"/>
+              </a:solidFill>
+            </a:endParaRPr>
+          </a:p>
+          <a:p>
+            <a:r>
+              <a:rPr lang="ko-KR" altLang="en-US" dirty="0">
+                <a:solidFill>
+                  <a:srgbClr val="FF0000"/>
+                </a:solidFill>
+              </a:rPr>
+              <a:t>시간</a:t>
+            </a:r>
+            <a:r>
+              <a:rPr lang="en-US" altLang="ko-KR" dirty="0">
+                <a:solidFill>
+                  <a:srgbClr val="FF0000"/>
+                </a:solidFill>
+              </a:rPr>
+              <a:t>, </a:t>
+            </a:r>
+            <a:r>
+              <a:rPr lang="ko-KR" altLang="en-US" dirty="0">
+                <a:solidFill>
+                  <a:srgbClr val="FF0000"/>
+                </a:solidFill>
+              </a:rPr>
+              <a:t>온도</a:t>
+            </a:r>
+            <a:r>
+              <a:rPr lang="en-US" altLang="ko-KR" dirty="0">
+                <a:solidFill>
+                  <a:srgbClr val="FF0000"/>
+                </a:solidFill>
+              </a:rPr>
+              <a:t>, </a:t>
+            </a:r>
+            <a:r>
+              <a:rPr lang="ko-KR" altLang="en-US" dirty="0">
+                <a:solidFill>
+                  <a:srgbClr val="FF0000"/>
+                </a:solidFill>
+              </a:rPr>
+              <a:t>습도</a:t>
+            </a:r>
+            <a:r>
+              <a:rPr lang="en-US" altLang="ko-KR" dirty="0">
+                <a:solidFill>
+                  <a:srgbClr val="FF0000"/>
+                </a:solidFill>
+              </a:rPr>
+              <a:t>, </a:t>
+            </a:r>
+            <a:r>
+              <a:rPr lang="ko-KR" altLang="en-US" dirty="0">
+                <a:solidFill>
+                  <a:srgbClr val="FF0000"/>
+                </a:solidFill>
+              </a:rPr>
+              <a:t>풍속</a:t>
+            </a:r>
+            <a:endParaRPr lang="en-US" altLang="ko-KR" dirty="0">
+              <a:solidFill>
+                <a:srgbClr val="FF0000"/>
+              </a:solidFill>
+            </a:endParaRPr>
+          </a:p>
+          <a:p>
+            <a:endParaRPr lang="en-US" altLang="ko-KR" dirty="0">
+              <a:solidFill>
+                <a:srgbClr val="FF0000"/>
+              </a:solidFill>
+            </a:endParaRPr>
+          </a:p>
+          <a:p>
+            <a:r>
+              <a:rPr lang="en-US" altLang="ko-KR" dirty="0">
+                <a:solidFill>
+                  <a:srgbClr val="FF0000"/>
+                </a:solidFill>
+              </a:rPr>
+              <a:t>500</a:t>
+            </a:r>
+            <a:r>
+              <a:rPr lang="ko-KR" altLang="en-US" dirty="0">
+                <a:solidFill>
+                  <a:srgbClr val="FF0000"/>
+                </a:solidFill>
+              </a:rPr>
+              <a:t>줄 까지 </a:t>
+            </a:r>
+            <a:endParaRPr lang="en-US" altLang="ko-KR" dirty="0">
+              <a:solidFill>
+                <a:srgbClr val="FF0000"/>
+              </a:solidFill>
+            </a:endParaRPr>
+          </a:p>
+          <a:p>
+            <a:endParaRPr lang="en-US" altLang="ko-KR" dirty="0">
+              <a:solidFill>
+                <a:srgbClr val="FF0000"/>
+              </a:solidFill>
+            </a:endParaRPr>
+          </a:p>
+          <a:p>
+            <a:r>
+              <a:rPr lang="en-US" altLang="ko-KR" dirty="0" err="1">
+                <a:solidFill>
+                  <a:srgbClr val="FF0000"/>
+                </a:solidFill>
+              </a:rPr>
+              <a:t>Random.normal</a:t>
+            </a:r>
+            <a:r>
+              <a:rPr lang="en-US" altLang="ko-KR" dirty="0">
+                <a:solidFill>
+                  <a:srgbClr val="FF0000"/>
+                </a:solidFill>
+              </a:rPr>
+              <a:t>(loc, scale, size) </a:t>
+            </a:r>
+          </a:p>
+          <a:p>
+            <a:endParaRPr lang="en-US" altLang="ko-KR" dirty="0">
+              <a:solidFill>
+                <a:srgbClr val="FF0000"/>
+              </a:solidFill>
+            </a:endParaRPr>
+          </a:p>
+          <a:p>
+            <a:r>
+              <a:rPr lang="en-US" altLang="ko-KR" dirty="0">
+                <a:solidFill>
+                  <a:srgbClr val="FF0000"/>
+                </a:solidFill>
+              </a:rPr>
+              <a:t>Loc / </a:t>
+            </a:r>
+            <a:r>
+              <a:rPr lang="ko-KR" altLang="en-US" dirty="0">
+                <a:solidFill>
+                  <a:srgbClr val="FF0000"/>
+                </a:solidFill>
+              </a:rPr>
+              <a:t>평균</a:t>
+            </a:r>
+            <a:endParaRPr lang="en-US" altLang="ko-KR" dirty="0">
+              <a:solidFill>
+                <a:srgbClr val="FF0000"/>
+              </a:solidFill>
+            </a:endParaRPr>
+          </a:p>
+          <a:p>
+            <a:r>
+              <a:rPr lang="en-US" altLang="ko-KR" dirty="0">
+                <a:solidFill>
+                  <a:srgbClr val="FF0000"/>
+                </a:solidFill>
+              </a:rPr>
+              <a:t>Scale / </a:t>
+            </a:r>
+            <a:r>
+              <a:rPr lang="ko-KR" altLang="en-US" dirty="0">
+                <a:solidFill>
+                  <a:srgbClr val="FF0000"/>
+                </a:solidFill>
+              </a:rPr>
+              <a:t>표준 편차 </a:t>
+            </a:r>
+            <a:endParaRPr lang="en-US" altLang="ko-KR" dirty="0">
+              <a:solidFill>
+                <a:srgbClr val="FF0000"/>
+              </a:solidFill>
+            </a:endParaRPr>
+          </a:p>
+          <a:p>
+            <a:r>
+              <a:rPr lang="en-US" altLang="ko-KR" dirty="0">
+                <a:solidFill>
+                  <a:srgbClr val="FF0000"/>
+                </a:solidFill>
+              </a:rPr>
+              <a:t>n/ </a:t>
+            </a:r>
+            <a:r>
+              <a:rPr lang="ko-KR" altLang="en-US" dirty="0">
+                <a:solidFill>
+                  <a:srgbClr val="FF0000"/>
+                </a:solidFill>
+              </a:rPr>
+              <a:t>개수</a:t>
+            </a:r>
+            <a:endParaRPr lang="en-US" altLang="ko-KR" dirty="0">
+              <a:solidFill>
+                <a:srgbClr val="FF0000"/>
+              </a:solidFill>
+            </a:endParaRPr>
+          </a:p>
+          <a:p>
+            <a:r>
+              <a:rPr lang="ko-KR" altLang="en-US" dirty="0">
+                <a:solidFill>
+                  <a:srgbClr val="FF0000"/>
+                </a:solidFill>
+              </a:rPr>
+              <a:t>랜덤하게 데이터 생성함 </a:t>
+            </a:r>
+            <a:endParaRPr lang="en-US" altLang="ko-KR" dirty="0">
+              <a:solidFill>
+                <a:srgbClr val="FF0000"/>
+              </a:solidFill>
+            </a:endParaRPr>
+          </a:p>
+          <a:p>
+            <a:endParaRPr lang="en-US" altLang="ko-KR" dirty="0">
+              <a:solidFill>
+                <a:srgbClr val="FF0000"/>
+              </a:solidFill>
+            </a:endParaRPr>
+          </a:p>
+          <a:p>
+            <a:endParaRPr lang="en-US" altLang="ko-KR" dirty="0">
+              <a:solidFill>
+                <a:srgbClr val="FF0000"/>
+              </a:solidFill>
+            </a:endParaRPr>
+          </a:p>
+          <a:p>
+            <a:r>
+              <a:rPr lang="en-US" altLang="ko-KR" dirty="0" err="1">
+                <a:solidFill>
+                  <a:srgbClr val="FF0000"/>
+                </a:solidFill>
+              </a:rPr>
+              <a:t>date_range</a:t>
+            </a:r>
+            <a:r>
+              <a:rPr lang="en-US" altLang="ko-KR" dirty="0">
+                <a:solidFill>
+                  <a:srgbClr val="FF0000"/>
+                </a:solidFill>
+              </a:rPr>
+              <a:t>()</a:t>
+            </a:r>
+            <a:r>
+              <a:rPr lang="ko-KR" altLang="en-US" dirty="0">
+                <a:solidFill>
+                  <a:srgbClr val="FF0000"/>
+                </a:solidFill>
+              </a:rPr>
+              <a:t>날짜</a:t>
+            </a:r>
+            <a:r>
+              <a:rPr lang="en-US" altLang="ko-KR" dirty="0">
+                <a:solidFill>
+                  <a:srgbClr val="FF0000"/>
+                </a:solidFill>
+              </a:rPr>
+              <a:t> </a:t>
+            </a:r>
+            <a:r>
+              <a:rPr lang="ko-KR" altLang="en-US" dirty="0">
+                <a:solidFill>
+                  <a:srgbClr val="FF0000"/>
+                </a:solidFill>
+              </a:rPr>
+              <a:t>범위를 만드는 함수</a:t>
+            </a:r>
+            <a:endParaRPr lang="en-US" altLang="ko-KR" dirty="0">
+              <a:solidFill>
+                <a:srgbClr val="FF0000"/>
+              </a:solidFill>
+            </a:endParaRPr>
+          </a:p>
+          <a:p>
+            <a:r>
+              <a:rPr lang="en-US" altLang="ko-KR" dirty="0">
+                <a:solidFill>
+                  <a:srgbClr val="FF0000"/>
+                </a:solidFill>
+              </a:rPr>
+              <a:t>2026-00-00 </a:t>
+            </a:r>
+            <a:r>
+              <a:rPr lang="ko-KR" altLang="en-US" dirty="0">
+                <a:solidFill>
+                  <a:srgbClr val="FF0000"/>
+                </a:solidFill>
+              </a:rPr>
+              <a:t>시작 날짜 </a:t>
+            </a:r>
+            <a:endParaRPr lang="en-US" altLang="ko-KR" dirty="0">
+              <a:solidFill>
+                <a:srgbClr val="FF0000"/>
+              </a:solidFill>
+            </a:endParaRPr>
+          </a:p>
+          <a:p>
+            <a:r>
+              <a:rPr lang="en-US" altLang="ko-KR" dirty="0">
+                <a:solidFill>
+                  <a:srgbClr val="FF0000"/>
+                </a:solidFill>
+              </a:rPr>
+              <a:t>Periods = n </a:t>
+            </a:r>
+            <a:r>
+              <a:rPr lang="ko-KR" altLang="en-US" dirty="0" err="1">
+                <a:solidFill>
+                  <a:srgbClr val="FF0000"/>
+                </a:solidFill>
+              </a:rPr>
+              <a:t>몇개이터</a:t>
+            </a:r>
+            <a:r>
+              <a:rPr lang="ko-KR" altLang="en-US" dirty="0">
+                <a:solidFill>
+                  <a:srgbClr val="FF0000"/>
+                </a:solidFill>
+              </a:rPr>
+              <a:t> 생성할지 </a:t>
+            </a:r>
+            <a:endParaRPr lang="en-US" altLang="ko-KR" dirty="0">
+              <a:solidFill>
+                <a:srgbClr val="FF0000"/>
+              </a:solidFill>
+            </a:endParaRPr>
+          </a:p>
+          <a:p>
+            <a:r>
+              <a:rPr lang="en-US" altLang="ko-KR" dirty="0">
+                <a:solidFill>
+                  <a:srgbClr val="FF0000"/>
+                </a:solidFill>
+              </a:rPr>
+              <a:t>Freq= ‘h’’ 1</a:t>
+            </a:r>
+            <a:r>
+              <a:rPr lang="ko-KR" altLang="en-US" dirty="0">
+                <a:solidFill>
+                  <a:srgbClr val="FF0000"/>
+                </a:solidFill>
+              </a:rPr>
+              <a:t>시간 간격으로 생성</a:t>
+            </a:r>
+          </a:p>
+        </p:txBody>
+      </p:sp>
+    </p:spTree>
+    <p:extLst>
+      <p:ext uri="{BB962C8B-B14F-4D97-AF65-F5344CB8AC3E}">
+        <p14:creationId xmlns:p14="http://schemas.microsoft.com/office/powerpoint/2010/main" val="108057784"/>
+      </p:ext>
+    </p:extLst>
+  </p:cSld>
+  <p:clrMapOvr>
+    <a:masterClrMapping/>
+  </p:clrMapOvr>
+</p:sld>
+</file>
+
+<file path=ppt/slides/slide20.xml><?xml version="1.0" encoding="utf-8"?>
 <p:sld xmlns:a="http://schemas.openxmlformats.org/drawingml/2006/main" xmlns:r="http://schemas.openxmlformats.org/officeDocument/2006/relationships" xmlns:p="http://schemas.openxmlformats.org/presentationml/2006/main">
   <p:cSld>
     <p:spTree>
@@ -14107,7 +16799,209 @@
 </p:sld>
 </file>
 
-<file path=ppt/slides/slide2.xml><?xml version="1.0" encoding="utf-8"?>
+<file path=ppt/slides/slide21.xml><?xml version="1.0" encoding="utf-8"?>
+<p:sld xmlns:a="http://schemas.openxmlformats.org/drawingml/2006/main" xmlns:r="http://schemas.openxmlformats.org/officeDocument/2006/relationships" xmlns:p="http://schemas.openxmlformats.org/presentationml/2006/main">
+  <p:cSld>
+    <p:spTree>
+      <p:nvGrpSpPr>
+        <p:cNvPr id="1" name=""/>
+        <p:cNvGrpSpPr/>
+        <p:nvPr/>
+      </p:nvGrpSpPr>
+      <p:grpSpPr>
+        <a:xfrm>
+          <a:off x="0" y="0"/>
+          <a:ext cx="0" cy="0"/>
+          <a:chOff x="0" y="0"/>
+          <a:chExt cx="0" cy="0"/>
+        </a:xfrm>
+      </p:grpSpPr>
+      <p:pic>
+        <p:nvPicPr>
+          <p:cNvPr id="3" name="그림 2">
+            <a:extLst>
+              <a:ext uri="{FF2B5EF4-FFF2-40B4-BE49-F238E27FC236}">
+                <a16:creationId xmlns:a16="http://schemas.microsoft.com/office/drawing/2014/main" id="{5DD9B149-E5AE-97D5-12CF-14F9D31C6095}"/>
+              </a:ext>
+            </a:extLst>
+          </p:cNvPr>
+          <p:cNvPicPr>
+            <a:picLocks noChangeAspect="1"/>
+          </p:cNvPicPr>
+          <p:nvPr/>
+        </p:nvPicPr>
+        <p:blipFill>
+          <a:blip r:embed="rId2"/>
+          <a:stretch>
+            <a:fillRect/>
+          </a:stretch>
+        </p:blipFill>
+        <p:spPr>
+          <a:xfrm>
+            <a:off x="0" y="566751"/>
+            <a:ext cx="12192000" cy="5724498"/>
+          </a:xfrm>
+          <a:prstGeom prst="rect">
+            <a:avLst/>
+          </a:prstGeom>
+        </p:spPr>
+      </p:pic>
+    </p:spTree>
+    <p:extLst>
+      <p:ext uri="{BB962C8B-B14F-4D97-AF65-F5344CB8AC3E}">
+        <p14:creationId xmlns:p14="http://schemas.microsoft.com/office/powerpoint/2010/main" val="903195754"/>
+      </p:ext>
+    </p:extLst>
+  </p:cSld>
+  <p:clrMapOvr>
+    <a:masterClrMapping/>
+  </p:clrMapOvr>
+</p:sld>
+</file>
+
+<file path=ppt/slides/slide22.xml><?xml version="1.0" encoding="utf-8"?>
+<p:sld xmlns:a="http://schemas.openxmlformats.org/drawingml/2006/main" xmlns:r="http://schemas.openxmlformats.org/officeDocument/2006/relationships" xmlns:p="http://schemas.openxmlformats.org/presentationml/2006/main">
+  <p:cSld>
+    <p:spTree>
+      <p:nvGrpSpPr>
+        <p:cNvPr id="1" name=""/>
+        <p:cNvGrpSpPr/>
+        <p:nvPr/>
+      </p:nvGrpSpPr>
+      <p:grpSpPr>
+        <a:xfrm>
+          <a:off x="0" y="0"/>
+          <a:ext cx="0" cy="0"/>
+          <a:chOff x="0" y="0"/>
+          <a:chExt cx="0" cy="0"/>
+        </a:xfrm>
+      </p:grpSpPr>
+      <p:pic>
+        <p:nvPicPr>
+          <p:cNvPr id="3" name="그림 2">
+            <a:extLst>
+              <a:ext uri="{FF2B5EF4-FFF2-40B4-BE49-F238E27FC236}">
+                <a16:creationId xmlns:a16="http://schemas.microsoft.com/office/drawing/2014/main" id="{F5A021A3-C422-B553-FFEF-47D4EFFB9E2D}"/>
+              </a:ext>
+            </a:extLst>
+          </p:cNvPr>
+          <p:cNvPicPr>
+            <a:picLocks noChangeAspect="1"/>
+          </p:cNvPicPr>
+          <p:nvPr/>
+        </p:nvPicPr>
+        <p:blipFill>
+          <a:blip r:embed="rId2">
+            <a:extLst>
+              <a:ext uri="{28A0092B-C50C-407E-A947-70E740481C1C}">
+                <a14:useLocalDpi xmlns:a14="http://schemas.microsoft.com/office/drawing/2010/main" val="0"/>
+              </a:ext>
+            </a:extLst>
+          </a:blip>
+          <a:stretch>
+            <a:fillRect/>
+          </a:stretch>
+        </p:blipFill>
+        <p:spPr>
+          <a:xfrm>
+            <a:off x="1027487" y="3983562"/>
+            <a:ext cx="2954309" cy="2066284"/>
+          </a:xfrm>
+          <a:prstGeom prst="rect">
+            <a:avLst/>
+          </a:prstGeom>
+        </p:spPr>
+      </p:pic>
+      <p:sp>
+        <p:nvSpPr>
+          <p:cNvPr id="4" name="TextBox 3">
+            <a:extLst>
+              <a:ext uri="{FF2B5EF4-FFF2-40B4-BE49-F238E27FC236}">
+                <a16:creationId xmlns:a16="http://schemas.microsoft.com/office/drawing/2014/main" id="{EE62C93C-5645-2298-F5E3-5C3CF968B9D6}"/>
+              </a:ext>
+            </a:extLst>
+          </p:cNvPr>
+          <p:cNvSpPr txBox="1"/>
+          <p:nvPr/>
+        </p:nvSpPr>
+        <p:spPr>
+          <a:xfrm>
+            <a:off x="1853738" y="1487978"/>
+            <a:ext cx="9459884" cy="1446550"/>
+          </a:xfrm>
+          <a:prstGeom prst="rect">
+            <a:avLst/>
+          </a:prstGeom>
+          <a:noFill/>
+        </p:spPr>
+        <p:txBody>
+          <a:bodyPr wrap="square" rtlCol="0">
+            <a:spAutoFit/>
+          </a:bodyPr>
+          <a:lstStyle/>
+          <a:p>
+            <a:pPr algn="ctr"/>
+            <a:r>
+              <a:rPr lang="en-US" altLang="ko-KR" sz="8800" dirty="0"/>
+              <a:t>Q &amp; A</a:t>
+            </a:r>
+            <a:endParaRPr lang="ko-KR" altLang="en-US" sz="8800" dirty="0"/>
+          </a:p>
+        </p:txBody>
+      </p:sp>
+      <p:sp>
+        <p:nvSpPr>
+          <p:cNvPr id="5" name="TextBox 4">
+            <a:extLst>
+              <a:ext uri="{FF2B5EF4-FFF2-40B4-BE49-F238E27FC236}">
+                <a16:creationId xmlns:a16="http://schemas.microsoft.com/office/drawing/2014/main" id="{36B08F52-AC93-BCC9-BB44-22DB16656353}"/>
+              </a:ext>
+            </a:extLst>
+          </p:cNvPr>
+          <p:cNvSpPr txBox="1"/>
+          <p:nvPr/>
+        </p:nvSpPr>
+        <p:spPr>
+          <a:xfrm>
+            <a:off x="3649288" y="5511338"/>
+            <a:ext cx="2003368" cy="246221"/>
+          </a:xfrm>
+          <a:prstGeom prst="rect">
+            <a:avLst/>
+          </a:prstGeom>
+          <a:noFill/>
+        </p:spPr>
+        <p:txBody>
+          <a:bodyPr wrap="square" rtlCol="0">
+            <a:spAutoFit/>
+          </a:bodyPr>
+          <a:lstStyle/>
+          <a:p>
+            <a:r>
+              <a:rPr lang="ko-KR" altLang="en-US" sz="1000" dirty="0" err="1"/>
+              <a:t>폴리텍</a:t>
+            </a:r>
+            <a:r>
+              <a:rPr lang="ko-KR" altLang="en-US" sz="1000" dirty="0"/>
+              <a:t> 고양이</a:t>
+            </a:r>
+          </a:p>
+        </p:txBody>
+      </p:sp>
+    </p:spTree>
+    <p:extLst>
+      <p:ext uri="{BB962C8B-B14F-4D97-AF65-F5344CB8AC3E}">
+        <p14:creationId xmlns:p14="http://schemas.microsoft.com/office/powerpoint/2010/main" val="1247774694"/>
+      </p:ext>
+    </p:extLst>
+  </p:cSld>
+  <p:clrMapOvr>
+    <a:masterClrMapping/>
+  </p:clrMapOvr>
+</p:sld>
+</file>
+
+<file path=ppt/slides/slide3.xml><?xml version="1.0" encoding="utf-8"?>
 <p:sld xmlns:a="http://schemas.openxmlformats.org/drawingml/2006/main" xmlns:r="http://schemas.openxmlformats.org/officeDocument/2006/relationships" xmlns:p="http://schemas.openxmlformats.org/presentationml/2006/main">
   <p:cSld>
     <p:spTree>
@@ -16385,67 +19279,7 @@
 </p:sld>
 </file>
 
-<file path=ppt/slides/slide20.xml><?xml version="1.0" encoding="utf-8"?>
-<p:sld xmlns:a="http://schemas.openxmlformats.org/drawingml/2006/main" xmlns:r="http://schemas.openxmlformats.org/officeDocument/2006/relationships" xmlns:p="http://schemas.openxmlformats.org/presentationml/2006/main">
-  <p:cSld>
-    <p:spTree>
-      <p:nvGrpSpPr>
-        <p:cNvPr id="1" name=""/>
-        <p:cNvGrpSpPr/>
-        <p:nvPr/>
-      </p:nvGrpSpPr>
-      <p:grpSpPr>
-        <a:xfrm>
-          <a:off x="0" y="0"/>
-          <a:ext cx="0" cy="0"/>
-          <a:chOff x="0" y="0"/>
-          <a:chExt cx="0" cy="0"/>
-        </a:xfrm>
-      </p:grpSpPr>
-      <p:pic>
-        <p:nvPicPr>
-          <p:cNvPr id="3" name="그림 2">
-            <a:extLst>
-              <a:ext uri="{FF2B5EF4-FFF2-40B4-BE49-F238E27FC236}">
-                <a16:creationId xmlns:a16="http://schemas.microsoft.com/office/drawing/2014/main" id="{5DD9B149-E5AE-97D5-12CF-14F9D31C6095}"/>
-              </a:ext>
-            </a:extLst>
-          </p:cNvPr>
-          <p:cNvPicPr>
-            <a:picLocks noChangeAspect="1"/>
-          </p:cNvPicPr>
-          <p:nvPr/>
-        </p:nvPicPr>
-        <p:blipFill>
-          <a:blip r:embed="rId2"/>
-          <a:stretch>
-            <a:fillRect/>
-          </a:stretch>
-        </p:blipFill>
-        <p:spPr>
-          <a:xfrm>
-            <a:off x="0" y="566751"/>
-            <a:ext cx="12192000" cy="5724498"/>
-          </a:xfrm>
-          <a:prstGeom prst="rect">
-            <a:avLst/>
-          </a:prstGeom>
-        </p:spPr>
-      </p:pic>
-    </p:spTree>
-    <p:extLst>
-      <p:ext uri="{BB962C8B-B14F-4D97-AF65-F5344CB8AC3E}">
-        <p14:creationId xmlns:p14="http://schemas.microsoft.com/office/powerpoint/2010/main" val="903195754"/>
-      </p:ext>
-    </p:extLst>
-  </p:cSld>
-  <p:clrMapOvr>
-    <a:masterClrMapping/>
-  </p:clrMapOvr>
-</p:sld>
-</file>
-
-<file path=ppt/slides/slide3.xml><?xml version="1.0" encoding="utf-8"?>
+<file path=ppt/slides/slide4.xml><?xml version="1.0" encoding="utf-8"?>
 <p:sld xmlns:a="http://schemas.openxmlformats.org/drawingml/2006/main" xmlns:r="http://schemas.openxmlformats.org/officeDocument/2006/relationships" xmlns:p="http://schemas.openxmlformats.org/presentationml/2006/main">
   <p:cSld>
     <p:spTree>
@@ -16838,7 +19672,7 @@
         <p:spPr>
           <a:xfrm>
             <a:off x="7944465" y="353961"/>
-            <a:ext cx="3972231" cy="3970318"/>
+            <a:ext cx="3972231" cy="6463308"/>
           </a:xfrm>
           <a:prstGeom prst="rect">
             <a:avLst/>
@@ -17189,6 +20023,162 @@
               </a:rPr>
               <a:t> </a:t>
             </a:r>
+            <a:endParaRPr lang="en-US" altLang="ko-KR" dirty="0">
+              <a:solidFill>
+                <a:srgbClr val="FF0000"/>
+              </a:solidFill>
+            </a:endParaRPr>
+          </a:p>
+          <a:p>
+            <a:endParaRPr lang="en-US" altLang="ko-KR" dirty="0">
+              <a:solidFill>
+                <a:srgbClr val="FF0000"/>
+              </a:solidFill>
+            </a:endParaRPr>
+          </a:p>
+          <a:p>
+            <a:r>
+              <a:rPr lang="en-US" altLang="ko-KR" dirty="0" err="1">
+                <a:solidFill>
+                  <a:srgbClr val="FF0000"/>
+                </a:solidFill>
+              </a:rPr>
+              <a:t>Ignore_index</a:t>
+            </a:r>
+            <a:r>
+              <a:rPr lang="ko-KR" altLang="en-US" dirty="0">
+                <a:solidFill>
+                  <a:srgbClr val="FF0000"/>
+                </a:solidFill>
+              </a:rPr>
+              <a:t> </a:t>
+            </a:r>
+            <a:r>
+              <a:rPr lang="en-US" altLang="ko-KR" dirty="0">
+                <a:solidFill>
+                  <a:srgbClr val="FF0000"/>
+                </a:solidFill>
+              </a:rPr>
+              <a:t>=</a:t>
+            </a:r>
+            <a:r>
+              <a:rPr lang="ko-KR" altLang="en-US" dirty="0">
+                <a:solidFill>
+                  <a:srgbClr val="FF0000"/>
+                </a:solidFill>
+              </a:rPr>
+              <a:t> </a:t>
+            </a:r>
+            <a:r>
+              <a:rPr lang="en-US" altLang="ko-KR" dirty="0">
+                <a:solidFill>
+                  <a:srgbClr val="FF0000"/>
+                </a:solidFill>
+              </a:rPr>
+              <a:t>True </a:t>
+            </a:r>
+            <a:r>
+              <a:rPr lang="ko-KR" altLang="en-US" dirty="0">
+                <a:solidFill>
+                  <a:srgbClr val="FF0000"/>
+                </a:solidFill>
+              </a:rPr>
+              <a:t>새롭게 인덱스 번호 부여 </a:t>
+            </a:r>
+            <a:r>
+              <a:rPr lang="en-US" altLang="ko-KR" dirty="0">
+                <a:solidFill>
+                  <a:srgbClr val="FF0000"/>
+                </a:solidFill>
+              </a:rPr>
+              <a:t>1, 2, 3, </a:t>
+            </a:r>
+          </a:p>
+          <a:p>
+            <a:endParaRPr lang="en-US" altLang="ko-KR" dirty="0">
+              <a:solidFill>
+                <a:srgbClr val="FF0000"/>
+              </a:solidFill>
+            </a:endParaRPr>
+          </a:p>
+          <a:p>
+            <a:r>
+              <a:rPr lang="ko-KR" altLang="ko-KR" dirty="0">
+                <a:solidFill>
+                  <a:srgbClr val="FF0000"/>
+                </a:solidFill>
+              </a:rPr>
+              <a:t>'</a:t>
+            </a:r>
+            <a:r>
+              <a:rPr lang="ko-KR" altLang="ko-KR" dirty="0" err="1">
+                <a:solidFill>
+                  <a:srgbClr val="FF0000"/>
+                </a:solidFill>
+              </a:rPr>
+              <a:t>astype</a:t>
+            </a:r>
+            <a:r>
+              <a:rPr lang="ko-KR" altLang="ko-KR" dirty="0">
+                <a:solidFill>
+                  <a:srgbClr val="FF0000"/>
+                </a:solidFill>
+              </a:rPr>
+              <a:t>(</a:t>
+            </a:r>
+            <a:r>
+              <a:rPr lang="ko-KR" altLang="ko-KR" dirty="0" err="1">
+                <a:solidFill>
+                  <a:srgbClr val="FF0000"/>
+                </a:solidFill>
+              </a:rPr>
+              <a:t>str</a:t>
+            </a:r>
+            <a:r>
+              <a:rPr lang="ko-KR" altLang="ko-KR" dirty="0">
+                <a:solidFill>
+                  <a:srgbClr val="FF0000"/>
+                </a:solidFill>
+              </a:rPr>
+              <a:t>)</a:t>
+            </a:r>
+            <a:r>
+              <a:rPr lang="en-US" altLang="ko-KR" dirty="0">
+                <a:solidFill>
+                  <a:srgbClr val="FF0000"/>
+                </a:solidFill>
+              </a:rPr>
+              <a:t> </a:t>
+            </a:r>
+            <a:r>
+              <a:rPr lang="ko-KR" altLang="en-US" dirty="0">
+                <a:solidFill>
+                  <a:srgbClr val="FF0000"/>
+                </a:solidFill>
+              </a:rPr>
+              <a:t>숫자 데이터를 문자 데이 데이터로</a:t>
+            </a:r>
+            <a:endParaRPr lang="en-US" altLang="ko-KR" dirty="0">
+              <a:solidFill>
+                <a:srgbClr val="FF0000"/>
+              </a:solidFill>
+            </a:endParaRPr>
+          </a:p>
+          <a:p>
+            <a:endParaRPr lang="en-US" altLang="ko-KR" dirty="0">
+              <a:solidFill>
+                <a:srgbClr val="FF0000"/>
+              </a:solidFill>
+            </a:endParaRPr>
+          </a:p>
+          <a:p>
+            <a:endParaRPr lang="en-US" altLang="ko-KR" dirty="0">
+              <a:solidFill>
+                <a:srgbClr val="FF0000"/>
+              </a:solidFill>
+            </a:endParaRPr>
+          </a:p>
+          <a:p>
             <a:endParaRPr lang="en-US" altLang="ko-KR" dirty="0">
               <a:solidFill>
                 <a:srgbClr val="FF0000"/>
@@ -17217,7 +20207,7 @@
 </p:sld>
 </file>
 
-<file path=ppt/slides/slide4.xml><?xml version="1.0" encoding="utf-8"?>
+<file path=ppt/slides/slide5.xml><?xml version="1.0" encoding="utf-8"?>
 <p:sld xmlns:a="http://schemas.openxmlformats.org/drawingml/2006/main" xmlns:r="http://schemas.openxmlformats.org/officeDocument/2006/relationships" xmlns:p="http://schemas.openxmlformats.org/presentationml/2006/main">
   <p:cSld>
     <p:spTree>
@@ -17315,7 +20305,7 @@
 </p:sld>
 </file>
 
-<file path=ppt/slides/slide5.xml><?xml version="1.0" encoding="utf-8"?>
+<file path=ppt/slides/slide6.xml><?xml version="1.0" encoding="utf-8"?>
 <p:sld xmlns:a="http://schemas.openxmlformats.org/drawingml/2006/main" xmlns:r="http://schemas.openxmlformats.org/officeDocument/2006/relationships" xmlns:p="http://schemas.openxmlformats.org/presentationml/2006/main">
   <p:cSld>
     <p:spTree>
@@ -17413,7 +20403,7 @@
 </p:sld>
 </file>
 
-<file path=ppt/slides/slide6.xml><?xml version="1.0" encoding="utf-8"?>
+<file path=ppt/slides/slide7.xml><?xml version="1.0" encoding="utf-8"?>
 <p:sld xmlns:a="http://schemas.openxmlformats.org/drawingml/2006/main" xmlns:r="http://schemas.openxmlformats.org/officeDocument/2006/relationships" xmlns:p="http://schemas.openxmlformats.org/presentationml/2006/main">
   <p:cSld>
     <p:spTree>
@@ -17610,7 +20600,7 @@
 </p:sld>
 </file>
 
-<file path=ppt/slides/slide7.xml><?xml version="1.0" encoding="utf-8"?>
+<file path=ppt/slides/slide8.xml><?xml version="1.0" encoding="utf-8"?>
 <p:sld xmlns:a="http://schemas.openxmlformats.org/drawingml/2006/main" xmlns:r="http://schemas.openxmlformats.org/officeDocument/2006/relationships" xmlns:p="http://schemas.openxmlformats.org/presentationml/2006/main">
   <p:cSld>
     <p:spTree>
@@ -18002,7 +20992,7 @@
 </p:sld>
 </file>
 
-<file path=ppt/slides/slide8.xml><?xml version="1.0" encoding="utf-8"?>
+<file path=ppt/slides/slide9.xml><?xml version="1.0" encoding="utf-8"?>
 <p:sld xmlns:a="http://schemas.openxmlformats.org/drawingml/2006/main" xmlns:r="http://schemas.openxmlformats.org/officeDocument/2006/relationships" xmlns:p="http://schemas.openxmlformats.org/presentationml/2006/main">
   <p:cSld>
     <p:spTree>
@@ -18737,7 +21727,7 @@
         </p:nvSpPr>
         <p:spPr>
           <a:xfrm>
-            <a:off x="7285703" y="589935"/>
+            <a:off x="7452851" y="576368"/>
             <a:ext cx="3844413" cy="6806992"/>
           </a:xfrm>
           <a:prstGeom prst="rect">
@@ -19284,1025 +22274,6 @@
     <p:extLst>
       <p:ext uri="{BB962C8B-B14F-4D97-AF65-F5344CB8AC3E}">
         <p14:creationId xmlns:p14="http://schemas.microsoft.com/office/powerpoint/2010/main" val="2822577550"/>
-      </p:ext>
-    </p:extLst>
-  </p:cSld>
-  <p:clrMapOvr>
-    <a:masterClrMapping/>
-  </p:clrMapOvr>
-</p:sld>
-</file>
-
-<file path=ppt/slides/slide9.xml><?xml version="1.0" encoding="utf-8"?>
-<p:sld xmlns:a="http://schemas.openxmlformats.org/drawingml/2006/main" xmlns:r="http://schemas.openxmlformats.org/officeDocument/2006/relationships" xmlns:p="http://schemas.openxmlformats.org/presentationml/2006/main">
-  <p:cSld>
-    <p:spTree>
-      <p:nvGrpSpPr>
-        <p:cNvPr id="1" name="">
-          <a:extLst>
-            <a:ext uri="{FF2B5EF4-FFF2-40B4-BE49-F238E27FC236}">
-              <a16:creationId xmlns:a16="http://schemas.microsoft.com/office/drawing/2014/main" id="{2A7CF1ED-66FF-6CA2-72BD-465B398409A9}"/>
-            </a:ext>
-          </a:extLst>
-        </p:cNvPr>
-        <p:cNvGrpSpPr/>
-        <p:nvPr/>
-      </p:nvGrpSpPr>
-      <p:grpSpPr>
-        <a:xfrm>
-          <a:off x="0" y="0"/>
-          <a:ext cx="0" cy="0"/>
-          <a:chOff x="0" y="0"/>
-          <a:chExt cx="0" cy="0"/>
-        </a:xfrm>
-      </p:grpSpPr>
-      <p:sp>
-        <p:nvSpPr>
-          <p:cNvPr id="4" name="TextBox 3">
-            <a:extLst>
-              <a:ext uri="{FF2B5EF4-FFF2-40B4-BE49-F238E27FC236}">
-                <a16:creationId xmlns:a16="http://schemas.microsoft.com/office/drawing/2014/main" id="{4983514F-B59D-5BF0-B369-7963DADF9F48}"/>
-              </a:ext>
-            </a:extLst>
-          </p:cNvPr>
-          <p:cNvSpPr txBox="1"/>
-          <p:nvPr/>
-        </p:nvSpPr>
-        <p:spPr>
-          <a:xfrm>
-            <a:off x="1524000" y="796413"/>
-            <a:ext cx="9478297" cy="246221"/>
-          </a:xfrm>
-          <a:prstGeom prst="rect">
-            <a:avLst/>
-          </a:prstGeom>
-          <a:noFill/>
-        </p:spPr>
-        <p:txBody>
-          <a:bodyPr wrap="square" rtlCol="0">
-            <a:spAutoFit/>
-          </a:bodyPr>
-          <a:lstStyle/>
-          <a:p>
-            <a:endParaRPr lang="ko-KR" altLang="en-US" sz="1000" dirty="0"/>
-          </a:p>
-        </p:txBody>
-      </p:sp>
-      <p:sp>
-        <p:nvSpPr>
-          <p:cNvPr id="3" name="TextBox 2">
-            <a:extLst>
-              <a:ext uri="{FF2B5EF4-FFF2-40B4-BE49-F238E27FC236}">
-                <a16:creationId xmlns:a16="http://schemas.microsoft.com/office/drawing/2014/main" id="{8293579E-9E90-1226-D546-C95C78935586}"/>
-              </a:ext>
-            </a:extLst>
-          </p:cNvPr>
-          <p:cNvSpPr txBox="1"/>
-          <p:nvPr/>
-        </p:nvSpPr>
-        <p:spPr>
-          <a:xfrm>
-            <a:off x="1209368" y="1762219"/>
-            <a:ext cx="10284542" cy="3338478"/>
-          </a:xfrm>
-          <a:prstGeom prst="rect">
-            <a:avLst/>
-          </a:prstGeom>
-          <a:noFill/>
-        </p:spPr>
-        <p:txBody>
-          <a:bodyPr wrap="square">
-            <a:spAutoFit/>
-          </a:bodyPr>
-          <a:lstStyle/>
-          <a:p>
-            <a:pPr>
-              <a:lnSpc>
-                <a:spcPts val="1425"/>
-              </a:lnSpc>
-              <a:buNone/>
-            </a:pPr>
-            <a:r>
-              <a:rPr lang="ko-KR" altLang="ko-KR" b="0" dirty="0">
-                <a:solidFill>
-                  <a:srgbClr val="008000"/>
-                </a:solidFill>
-                <a:effectLst/>
-                <a:latin typeface="Consolas" panose="020B0609020204030204" pitchFamily="49" charset="0"/>
-              </a:rPr>
-              <a:t># 평균값으로 채우기</a:t>
-            </a:r>
-            <a:endParaRPr lang="ko-KR" altLang="ko-KR" b="0" dirty="0">
-              <a:solidFill>
-                <a:srgbClr val="000000"/>
-              </a:solidFill>
-              <a:effectLst/>
-              <a:latin typeface="Consolas" panose="020B0609020204030204" pitchFamily="49" charset="0"/>
-            </a:endParaRPr>
-          </a:p>
-          <a:p>
-            <a:pPr>
-              <a:lnSpc>
-                <a:spcPts val="1425"/>
-              </a:lnSpc>
-              <a:buNone/>
-            </a:pPr>
-            <a:r>
-              <a:rPr lang="ko-KR" altLang="ko-KR" b="0" dirty="0" err="1">
-                <a:solidFill>
-                  <a:srgbClr val="000000"/>
-                </a:solidFill>
-                <a:effectLst/>
-                <a:latin typeface="Consolas" panose="020B0609020204030204" pitchFamily="49" charset="0"/>
-              </a:rPr>
-              <a:t>df_mean</a:t>
-            </a:r>
-            <a:r>
-              <a:rPr lang="ko-KR" altLang="ko-KR" b="0" dirty="0">
-                <a:solidFill>
-                  <a:srgbClr val="000000"/>
-                </a:solidFill>
-                <a:effectLst/>
-                <a:latin typeface="Consolas" panose="020B0609020204030204" pitchFamily="49" charset="0"/>
-              </a:rPr>
-              <a:t> = </a:t>
-            </a:r>
-            <a:r>
-              <a:rPr lang="ko-KR" altLang="ko-KR" b="0" dirty="0" err="1">
-                <a:solidFill>
-                  <a:srgbClr val="000000"/>
-                </a:solidFill>
-                <a:effectLst/>
-                <a:latin typeface="Consolas" panose="020B0609020204030204" pitchFamily="49" charset="0"/>
-              </a:rPr>
-              <a:t>df.copy</a:t>
-            </a:r>
-            <a:r>
-              <a:rPr lang="ko-KR" altLang="ko-KR" b="0" dirty="0">
-                <a:solidFill>
-                  <a:srgbClr val="000000"/>
-                </a:solidFill>
-                <a:effectLst/>
-                <a:latin typeface="Consolas" panose="020B0609020204030204" pitchFamily="49" charset="0"/>
-              </a:rPr>
-              <a:t>()</a:t>
-            </a:r>
-          </a:p>
-          <a:p>
-            <a:pPr>
-              <a:lnSpc>
-                <a:spcPts val="1425"/>
-              </a:lnSpc>
-              <a:buNone/>
-            </a:pPr>
-            <a:r>
-              <a:rPr lang="ko-KR" altLang="ko-KR" b="0" dirty="0" err="1">
-                <a:solidFill>
-                  <a:srgbClr val="000000"/>
-                </a:solidFill>
-                <a:effectLst/>
-                <a:latin typeface="Consolas" panose="020B0609020204030204" pitchFamily="49" charset="0"/>
-              </a:rPr>
-              <a:t>df_mean</a:t>
-            </a:r>
-            <a:r>
-              <a:rPr lang="ko-KR" altLang="ko-KR" b="0" dirty="0">
-                <a:solidFill>
-                  <a:srgbClr val="000000"/>
-                </a:solidFill>
-                <a:effectLst/>
-                <a:latin typeface="Consolas" panose="020B0609020204030204" pitchFamily="49" charset="0"/>
-              </a:rPr>
-              <a:t>[</a:t>
-            </a:r>
-            <a:r>
-              <a:rPr lang="ko-KR" altLang="ko-KR" b="0" dirty="0">
-                <a:solidFill>
-                  <a:srgbClr val="A31515"/>
-                </a:solidFill>
-                <a:effectLst/>
-                <a:latin typeface="Consolas" panose="020B0609020204030204" pitchFamily="49" charset="0"/>
-              </a:rPr>
-              <a:t>'</a:t>
-            </a:r>
-            <a:r>
-              <a:rPr lang="ko-KR" altLang="ko-KR" b="0" dirty="0" err="1">
-                <a:solidFill>
-                  <a:srgbClr val="A31515"/>
-                </a:solidFill>
-                <a:effectLst/>
-                <a:latin typeface="Consolas" panose="020B0609020204030204" pitchFamily="49" charset="0"/>
-              </a:rPr>
-              <a:t>humidity_percent</a:t>
-            </a:r>
-            <a:r>
-              <a:rPr lang="ko-KR" altLang="ko-KR" b="0" dirty="0">
-                <a:solidFill>
-                  <a:srgbClr val="A31515"/>
-                </a:solidFill>
-                <a:effectLst/>
-                <a:latin typeface="Consolas" panose="020B0609020204030204" pitchFamily="49" charset="0"/>
-              </a:rPr>
-              <a:t>'</a:t>
-            </a:r>
-            <a:r>
-              <a:rPr lang="ko-KR" altLang="ko-KR" b="0" dirty="0">
-                <a:solidFill>
-                  <a:srgbClr val="000000"/>
-                </a:solidFill>
-                <a:effectLst/>
-                <a:latin typeface="Consolas" panose="020B0609020204030204" pitchFamily="49" charset="0"/>
-              </a:rPr>
-              <a:t>] = </a:t>
-            </a:r>
-            <a:r>
-              <a:rPr lang="ko-KR" altLang="ko-KR" b="0" dirty="0" err="1">
-                <a:solidFill>
-                  <a:srgbClr val="000000"/>
-                </a:solidFill>
-                <a:effectLst/>
-                <a:latin typeface="Consolas" panose="020B0609020204030204" pitchFamily="49" charset="0"/>
-              </a:rPr>
-              <a:t>df_mean</a:t>
-            </a:r>
-            <a:r>
-              <a:rPr lang="ko-KR" altLang="ko-KR" b="0" dirty="0">
-                <a:solidFill>
-                  <a:srgbClr val="000000"/>
-                </a:solidFill>
-                <a:effectLst/>
-                <a:latin typeface="Consolas" panose="020B0609020204030204" pitchFamily="49" charset="0"/>
-              </a:rPr>
-              <a:t>[</a:t>
-            </a:r>
-            <a:r>
-              <a:rPr lang="ko-KR" altLang="ko-KR" b="0" dirty="0">
-                <a:solidFill>
-                  <a:srgbClr val="A31515"/>
-                </a:solidFill>
-                <a:effectLst/>
-                <a:latin typeface="Consolas" panose="020B0609020204030204" pitchFamily="49" charset="0"/>
-              </a:rPr>
-              <a:t>'</a:t>
-            </a:r>
-            <a:r>
-              <a:rPr lang="ko-KR" altLang="ko-KR" b="0" dirty="0" err="1">
-                <a:solidFill>
-                  <a:srgbClr val="A31515"/>
-                </a:solidFill>
-                <a:effectLst/>
-                <a:latin typeface="Consolas" panose="020B0609020204030204" pitchFamily="49" charset="0"/>
-              </a:rPr>
-              <a:t>humidity_percent</a:t>
-            </a:r>
-            <a:r>
-              <a:rPr lang="ko-KR" altLang="ko-KR" b="0" dirty="0">
-                <a:solidFill>
-                  <a:srgbClr val="A31515"/>
-                </a:solidFill>
-                <a:effectLst/>
-                <a:latin typeface="Consolas" panose="020B0609020204030204" pitchFamily="49" charset="0"/>
-              </a:rPr>
-              <a:t>'</a:t>
-            </a:r>
-            <a:r>
-              <a:rPr lang="ko-KR" altLang="ko-KR" b="0" dirty="0">
-                <a:solidFill>
-                  <a:srgbClr val="000000"/>
-                </a:solidFill>
-                <a:effectLst/>
-                <a:latin typeface="Consolas" panose="020B0609020204030204" pitchFamily="49" charset="0"/>
-              </a:rPr>
-              <a:t>].</a:t>
-            </a:r>
-            <a:r>
-              <a:rPr lang="ko-KR" altLang="ko-KR" b="0" dirty="0" err="1">
-                <a:solidFill>
-                  <a:srgbClr val="000000"/>
-                </a:solidFill>
-                <a:effectLst/>
-                <a:latin typeface="Consolas" panose="020B0609020204030204" pitchFamily="49" charset="0"/>
-              </a:rPr>
-              <a:t>fillna</a:t>
-            </a:r>
-            <a:r>
-              <a:rPr lang="ko-KR" altLang="ko-KR" b="0" dirty="0">
-                <a:solidFill>
-                  <a:srgbClr val="000000"/>
-                </a:solidFill>
-                <a:effectLst/>
-                <a:latin typeface="Consolas" panose="020B0609020204030204" pitchFamily="49" charset="0"/>
-              </a:rPr>
-              <a:t>(</a:t>
-            </a:r>
-            <a:r>
-              <a:rPr lang="ko-KR" altLang="ko-KR" b="0" dirty="0" err="1">
-                <a:solidFill>
-                  <a:srgbClr val="000000"/>
-                </a:solidFill>
-                <a:effectLst/>
-                <a:latin typeface="Consolas" panose="020B0609020204030204" pitchFamily="49" charset="0"/>
-              </a:rPr>
-              <a:t>df_mean</a:t>
-            </a:r>
-            <a:r>
-              <a:rPr lang="ko-KR" altLang="ko-KR" b="0" dirty="0">
-                <a:solidFill>
-                  <a:srgbClr val="000000"/>
-                </a:solidFill>
-                <a:effectLst/>
-                <a:latin typeface="Consolas" panose="020B0609020204030204" pitchFamily="49" charset="0"/>
-              </a:rPr>
-              <a:t>[</a:t>
-            </a:r>
-            <a:r>
-              <a:rPr lang="ko-KR" altLang="ko-KR" b="0" dirty="0">
-                <a:solidFill>
-                  <a:srgbClr val="A31515"/>
-                </a:solidFill>
-                <a:effectLst/>
-                <a:latin typeface="Consolas" panose="020B0609020204030204" pitchFamily="49" charset="0"/>
-              </a:rPr>
-              <a:t>'</a:t>
-            </a:r>
-            <a:r>
-              <a:rPr lang="ko-KR" altLang="ko-KR" b="0" dirty="0" err="1">
-                <a:solidFill>
-                  <a:srgbClr val="A31515"/>
-                </a:solidFill>
-                <a:effectLst/>
-                <a:latin typeface="Consolas" panose="020B0609020204030204" pitchFamily="49" charset="0"/>
-              </a:rPr>
-              <a:t>humidity_percent</a:t>
-            </a:r>
-            <a:r>
-              <a:rPr lang="ko-KR" altLang="ko-KR" b="0" dirty="0">
-                <a:solidFill>
-                  <a:srgbClr val="A31515"/>
-                </a:solidFill>
-                <a:effectLst/>
-                <a:latin typeface="Consolas" panose="020B0609020204030204" pitchFamily="49" charset="0"/>
-              </a:rPr>
-              <a:t>'</a:t>
-            </a:r>
-            <a:r>
-              <a:rPr lang="ko-KR" altLang="ko-KR" b="0" dirty="0">
-                <a:solidFill>
-                  <a:srgbClr val="000000"/>
-                </a:solidFill>
-                <a:effectLst/>
-                <a:latin typeface="Consolas" panose="020B0609020204030204" pitchFamily="49" charset="0"/>
-              </a:rPr>
-              <a:t>].</a:t>
-            </a:r>
-            <a:r>
-              <a:rPr lang="ko-KR" altLang="ko-KR" b="0" dirty="0" err="1">
-                <a:solidFill>
-                  <a:srgbClr val="000000"/>
-                </a:solidFill>
-                <a:effectLst/>
-                <a:latin typeface="Consolas" panose="020B0609020204030204" pitchFamily="49" charset="0"/>
-              </a:rPr>
-              <a:t>mean</a:t>
-            </a:r>
-            <a:r>
-              <a:rPr lang="ko-KR" altLang="ko-KR" b="0" dirty="0">
-                <a:solidFill>
-                  <a:srgbClr val="000000"/>
-                </a:solidFill>
-                <a:effectLst/>
-                <a:latin typeface="Consolas" panose="020B0609020204030204" pitchFamily="49" charset="0"/>
-              </a:rPr>
-              <a:t>())</a:t>
-            </a:r>
-            <a:endParaRPr lang="en-US" altLang="ko-KR" b="0" dirty="0">
-              <a:solidFill>
-                <a:srgbClr val="000000"/>
-              </a:solidFill>
-              <a:effectLst/>
-              <a:latin typeface="Consolas" panose="020B0609020204030204" pitchFamily="49" charset="0"/>
-            </a:endParaRPr>
-          </a:p>
-          <a:p>
-            <a:pPr>
-              <a:lnSpc>
-                <a:spcPts val="1425"/>
-              </a:lnSpc>
-              <a:buNone/>
-            </a:pPr>
-            <a:endParaRPr lang="en-US" altLang="ko-KR" dirty="0">
-              <a:solidFill>
-                <a:srgbClr val="000000"/>
-              </a:solidFill>
-              <a:latin typeface="Consolas" panose="020B0609020204030204" pitchFamily="49" charset="0"/>
-            </a:endParaRPr>
-          </a:p>
-          <a:p>
-            <a:pPr>
-              <a:lnSpc>
-                <a:spcPts val="1425"/>
-              </a:lnSpc>
-              <a:buNone/>
-            </a:pPr>
-            <a:endParaRPr lang="en-US" altLang="ko-KR" b="0" dirty="0">
-              <a:solidFill>
-                <a:srgbClr val="000000"/>
-              </a:solidFill>
-              <a:effectLst/>
-              <a:latin typeface="Consolas" panose="020B0609020204030204" pitchFamily="49" charset="0"/>
-            </a:endParaRPr>
-          </a:p>
-          <a:p>
-            <a:pPr>
-              <a:lnSpc>
-                <a:spcPts val="1425"/>
-              </a:lnSpc>
-              <a:buNone/>
-            </a:pPr>
-            <a:endParaRPr lang="ko-KR" altLang="ko-KR" b="0" dirty="0">
-              <a:solidFill>
-                <a:srgbClr val="000000"/>
-              </a:solidFill>
-              <a:effectLst/>
-              <a:latin typeface="Consolas" panose="020B0609020204030204" pitchFamily="49" charset="0"/>
-            </a:endParaRPr>
-          </a:p>
-          <a:p>
-            <a:pPr>
-              <a:lnSpc>
-                <a:spcPts val="1425"/>
-              </a:lnSpc>
-              <a:buNone/>
-            </a:pPr>
-            <a:br>
-              <a:rPr lang="ko-KR" altLang="ko-KR" b="0" dirty="0">
-                <a:solidFill>
-                  <a:srgbClr val="000000"/>
-                </a:solidFill>
-                <a:effectLst/>
-                <a:latin typeface="Consolas" panose="020B0609020204030204" pitchFamily="49" charset="0"/>
-              </a:rPr>
-            </a:br>
-            <a:endParaRPr lang="ko-KR" altLang="ko-KR" b="0" dirty="0">
-              <a:solidFill>
-                <a:srgbClr val="000000"/>
-              </a:solidFill>
-              <a:effectLst/>
-              <a:latin typeface="Consolas" panose="020B0609020204030204" pitchFamily="49" charset="0"/>
-            </a:endParaRPr>
-          </a:p>
-          <a:p>
-            <a:pPr>
-              <a:lnSpc>
-                <a:spcPts val="1425"/>
-              </a:lnSpc>
-              <a:buNone/>
-            </a:pPr>
-            <a:r>
-              <a:rPr lang="ko-KR" altLang="ko-KR" b="0" dirty="0">
-                <a:solidFill>
-                  <a:srgbClr val="008000"/>
-                </a:solidFill>
-                <a:effectLst/>
-                <a:latin typeface="Consolas" panose="020B0609020204030204" pitchFamily="49" charset="0"/>
-              </a:rPr>
-              <a:t># 중앙값으로 채우기 </a:t>
-            </a:r>
-            <a:endParaRPr lang="ko-KR" altLang="ko-KR" b="0" dirty="0">
-              <a:solidFill>
-                <a:srgbClr val="000000"/>
-              </a:solidFill>
-              <a:effectLst/>
-              <a:latin typeface="Consolas" panose="020B0609020204030204" pitchFamily="49" charset="0"/>
-            </a:endParaRPr>
-          </a:p>
-          <a:p>
-            <a:pPr>
-              <a:lnSpc>
-                <a:spcPts val="1425"/>
-              </a:lnSpc>
-              <a:buNone/>
-            </a:pPr>
-            <a:r>
-              <a:rPr lang="ko-KR" altLang="ko-KR" b="0" dirty="0" err="1">
-                <a:solidFill>
-                  <a:srgbClr val="000000"/>
-                </a:solidFill>
-                <a:effectLst/>
-                <a:latin typeface="Consolas" panose="020B0609020204030204" pitchFamily="49" charset="0"/>
-              </a:rPr>
-              <a:t>df_median</a:t>
-            </a:r>
-            <a:r>
-              <a:rPr lang="ko-KR" altLang="ko-KR" b="0" dirty="0">
-                <a:solidFill>
-                  <a:srgbClr val="000000"/>
-                </a:solidFill>
-                <a:effectLst/>
-                <a:latin typeface="Consolas" panose="020B0609020204030204" pitchFamily="49" charset="0"/>
-              </a:rPr>
-              <a:t> = </a:t>
-            </a:r>
-            <a:r>
-              <a:rPr lang="ko-KR" altLang="ko-KR" b="0" dirty="0" err="1">
-                <a:solidFill>
-                  <a:srgbClr val="000000"/>
-                </a:solidFill>
-                <a:effectLst/>
-                <a:latin typeface="Consolas" panose="020B0609020204030204" pitchFamily="49" charset="0"/>
-              </a:rPr>
-              <a:t>df.copy</a:t>
-            </a:r>
-            <a:r>
-              <a:rPr lang="ko-KR" altLang="ko-KR" b="0" dirty="0">
-                <a:solidFill>
-                  <a:srgbClr val="000000"/>
-                </a:solidFill>
-                <a:effectLst/>
-                <a:latin typeface="Consolas" panose="020B0609020204030204" pitchFamily="49" charset="0"/>
-              </a:rPr>
-              <a:t>()</a:t>
-            </a:r>
-          </a:p>
-          <a:p>
-            <a:pPr>
-              <a:lnSpc>
-                <a:spcPts val="1425"/>
-              </a:lnSpc>
-              <a:buNone/>
-            </a:pPr>
-            <a:r>
-              <a:rPr lang="ko-KR" altLang="ko-KR" b="0" dirty="0" err="1">
-                <a:solidFill>
-                  <a:srgbClr val="000000"/>
-                </a:solidFill>
-                <a:effectLst/>
-                <a:latin typeface="Consolas" panose="020B0609020204030204" pitchFamily="49" charset="0"/>
-              </a:rPr>
-              <a:t>df_median</a:t>
-            </a:r>
-            <a:r>
-              <a:rPr lang="ko-KR" altLang="ko-KR" b="0" dirty="0">
-                <a:solidFill>
-                  <a:srgbClr val="000000"/>
-                </a:solidFill>
-                <a:effectLst/>
-                <a:latin typeface="Consolas" panose="020B0609020204030204" pitchFamily="49" charset="0"/>
-              </a:rPr>
-              <a:t>[</a:t>
-            </a:r>
-            <a:r>
-              <a:rPr lang="ko-KR" altLang="ko-KR" b="0" dirty="0">
-                <a:solidFill>
-                  <a:srgbClr val="A31515"/>
-                </a:solidFill>
-                <a:effectLst/>
-                <a:latin typeface="Consolas" panose="020B0609020204030204" pitchFamily="49" charset="0"/>
-              </a:rPr>
-              <a:t>'</a:t>
-            </a:r>
-            <a:r>
-              <a:rPr lang="ko-KR" altLang="ko-KR" b="0" dirty="0" err="1">
-                <a:solidFill>
-                  <a:srgbClr val="A31515"/>
-                </a:solidFill>
-                <a:effectLst/>
-                <a:latin typeface="Consolas" panose="020B0609020204030204" pitchFamily="49" charset="0"/>
-              </a:rPr>
-              <a:t>humidity_percent</a:t>
-            </a:r>
-            <a:r>
-              <a:rPr lang="ko-KR" altLang="ko-KR" b="0" dirty="0">
-                <a:solidFill>
-                  <a:srgbClr val="A31515"/>
-                </a:solidFill>
-                <a:effectLst/>
-                <a:latin typeface="Consolas" panose="020B0609020204030204" pitchFamily="49" charset="0"/>
-              </a:rPr>
-              <a:t>'</a:t>
-            </a:r>
-            <a:r>
-              <a:rPr lang="ko-KR" altLang="ko-KR" b="0" dirty="0">
-                <a:solidFill>
-                  <a:srgbClr val="000000"/>
-                </a:solidFill>
-                <a:effectLst/>
-                <a:latin typeface="Consolas" panose="020B0609020204030204" pitchFamily="49" charset="0"/>
-              </a:rPr>
-              <a:t>] = </a:t>
-            </a:r>
-            <a:r>
-              <a:rPr lang="ko-KR" altLang="ko-KR" b="0" dirty="0" err="1">
-                <a:solidFill>
-                  <a:srgbClr val="000000"/>
-                </a:solidFill>
-                <a:effectLst/>
-                <a:latin typeface="Consolas" panose="020B0609020204030204" pitchFamily="49" charset="0"/>
-              </a:rPr>
-              <a:t>df_median</a:t>
-            </a:r>
-            <a:r>
-              <a:rPr lang="ko-KR" altLang="ko-KR" b="0" dirty="0">
-                <a:solidFill>
-                  <a:srgbClr val="000000"/>
-                </a:solidFill>
-                <a:effectLst/>
-                <a:latin typeface="Consolas" panose="020B0609020204030204" pitchFamily="49" charset="0"/>
-              </a:rPr>
-              <a:t>[</a:t>
-            </a:r>
-            <a:r>
-              <a:rPr lang="ko-KR" altLang="ko-KR" b="0" dirty="0">
-                <a:solidFill>
-                  <a:srgbClr val="A31515"/>
-                </a:solidFill>
-                <a:effectLst/>
-                <a:latin typeface="Consolas" panose="020B0609020204030204" pitchFamily="49" charset="0"/>
-              </a:rPr>
-              <a:t>'</a:t>
-            </a:r>
-            <a:r>
-              <a:rPr lang="ko-KR" altLang="ko-KR" b="0" dirty="0" err="1">
-                <a:solidFill>
-                  <a:srgbClr val="A31515"/>
-                </a:solidFill>
-                <a:effectLst/>
-                <a:latin typeface="Consolas" panose="020B0609020204030204" pitchFamily="49" charset="0"/>
-              </a:rPr>
-              <a:t>humidity_percent</a:t>
-            </a:r>
-            <a:r>
-              <a:rPr lang="ko-KR" altLang="ko-KR" b="0" dirty="0">
-                <a:solidFill>
-                  <a:srgbClr val="A31515"/>
-                </a:solidFill>
-                <a:effectLst/>
-                <a:latin typeface="Consolas" panose="020B0609020204030204" pitchFamily="49" charset="0"/>
-              </a:rPr>
-              <a:t>'</a:t>
-            </a:r>
-            <a:r>
-              <a:rPr lang="ko-KR" altLang="ko-KR" b="0" dirty="0">
-                <a:solidFill>
-                  <a:srgbClr val="000000"/>
-                </a:solidFill>
-                <a:effectLst/>
-                <a:latin typeface="Consolas" panose="020B0609020204030204" pitchFamily="49" charset="0"/>
-              </a:rPr>
-              <a:t>].</a:t>
-            </a:r>
-            <a:r>
-              <a:rPr lang="ko-KR" altLang="ko-KR" b="0" dirty="0" err="1">
-                <a:solidFill>
-                  <a:srgbClr val="000000"/>
-                </a:solidFill>
-                <a:effectLst/>
-                <a:latin typeface="Consolas" panose="020B0609020204030204" pitchFamily="49" charset="0"/>
-              </a:rPr>
-              <a:t>fillna</a:t>
-            </a:r>
-            <a:r>
-              <a:rPr lang="ko-KR" altLang="ko-KR" b="0" dirty="0">
-                <a:solidFill>
-                  <a:srgbClr val="000000"/>
-                </a:solidFill>
-                <a:effectLst/>
-                <a:latin typeface="Consolas" panose="020B0609020204030204" pitchFamily="49" charset="0"/>
-              </a:rPr>
-              <a:t>(</a:t>
-            </a:r>
-            <a:r>
-              <a:rPr lang="ko-KR" altLang="ko-KR" b="0" dirty="0" err="1">
-                <a:solidFill>
-                  <a:srgbClr val="000000"/>
-                </a:solidFill>
-                <a:effectLst/>
-                <a:latin typeface="Consolas" panose="020B0609020204030204" pitchFamily="49" charset="0"/>
-              </a:rPr>
-              <a:t>df_median</a:t>
-            </a:r>
-            <a:r>
-              <a:rPr lang="ko-KR" altLang="ko-KR" b="0" dirty="0">
-                <a:solidFill>
-                  <a:srgbClr val="000000"/>
-                </a:solidFill>
-                <a:effectLst/>
-                <a:latin typeface="Consolas" panose="020B0609020204030204" pitchFamily="49" charset="0"/>
-              </a:rPr>
-              <a:t>[</a:t>
-            </a:r>
-            <a:r>
-              <a:rPr lang="ko-KR" altLang="ko-KR" b="0" dirty="0">
-                <a:solidFill>
-                  <a:srgbClr val="A31515"/>
-                </a:solidFill>
-                <a:effectLst/>
-                <a:latin typeface="Consolas" panose="020B0609020204030204" pitchFamily="49" charset="0"/>
-              </a:rPr>
-              <a:t>'</a:t>
-            </a:r>
-            <a:r>
-              <a:rPr lang="ko-KR" altLang="ko-KR" b="0" dirty="0" err="1">
-                <a:solidFill>
-                  <a:srgbClr val="A31515"/>
-                </a:solidFill>
-                <a:effectLst/>
-                <a:latin typeface="Consolas" panose="020B0609020204030204" pitchFamily="49" charset="0"/>
-              </a:rPr>
-              <a:t>humidity_percent</a:t>
-            </a:r>
-            <a:r>
-              <a:rPr lang="ko-KR" altLang="ko-KR" b="0" dirty="0">
-                <a:solidFill>
-                  <a:srgbClr val="A31515"/>
-                </a:solidFill>
-                <a:effectLst/>
-                <a:latin typeface="Consolas" panose="020B0609020204030204" pitchFamily="49" charset="0"/>
-              </a:rPr>
-              <a:t>'</a:t>
-            </a:r>
-            <a:r>
-              <a:rPr lang="ko-KR" altLang="ko-KR" b="0" dirty="0">
-                <a:solidFill>
-                  <a:srgbClr val="000000"/>
-                </a:solidFill>
-                <a:effectLst/>
-                <a:latin typeface="Consolas" panose="020B0609020204030204" pitchFamily="49" charset="0"/>
-              </a:rPr>
-              <a:t>].</a:t>
-            </a:r>
-            <a:r>
-              <a:rPr lang="ko-KR" altLang="ko-KR" b="0" dirty="0" err="1">
-                <a:solidFill>
-                  <a:srgbClr val="000000"/>
-                </a:solidFill>
-                <a:effectLst/>
-                <a:latin typeface="Consolas" panose="020B0609020204030204" pitchFamily="49" charset="0"/>
-              </a:rPr>
-              <a:t>median</a:t>
-            </a:r>
-            <a:r>
-              <a:rPr lang="ko-KR" altLang="ko-KR" b="0" dirty="0">
-                <a:solidFill>
-                  <a:srgbClr val="000000"/>
-                </a:solidFill>
-                <a:effectLst/>
-                <a:latin typeface="Consolas" panose="020B0609020204030204" pitchFamily="49" charset="0"/>
-              </a:rPr>
-              <a:t>())</a:t>
-            </a:r>
-          </a:p>
-          <a:p>
-            <a:pPr>
-              <a:lnSpc>
-                <a:spcPts val="1425"/>
-              </a:lnSpc>
-              <a:buNone/>
-            </a:pPr>
-            <a:br>
-              <a:rPr lang="ko-KR" altLang="ko-KR" b="0" dirty="0">
-                <a:solidFill>
-                  <a:srgbClr val="000000"/>
-                </a:solidFill>
-                <a:effectLst/>
-                <a:latin typeface="Consolas" panose="020B0609020204030204" pitchFamily="49" charset="0"/>
-              </a:rPr>
-            </a:br>
-            <a:endParaRPr lang="ko-KR" altLang="ko-KR" b="0" dirty="0">
-              <a:solidFill>
-                <a:srgbClr val="000000"/>
-              </a:solidFill>
-              <a:effectLst/>
-              <a:latin typeface="Consolas" panose="020B0609020204030204" pitchFamily="49" charset="0"/>
-            </a:endParaRPr>
-          </a:p>
-          <a:p>
-            <a:pPr>
-              <a:lnSpc>
-                <a:spcPts val="1425"/>
-              </a:lnSpc>
-              <a:buNone/>
-            </a:pPr>
-            <a:r>
-              <a:rPr lang="ko-KR" altLang="ko-KR" b="0" dirty="0">
-                <a:solidFill>
-                  <a:srgbClr val="008000"/>
-                </a:solidFill>
-                <a:effectLst/>
-                <a:latin typeface="Consolas" panose="020B0609020204030204" pitchFamily="49" charset="0"/>
-              </a:rPr>
-              <a:t># 직전 값으로 채우기 </a:t>
-            </a:r>
-            <a:endParaRPr lang="ko-KR" altLang="ko-KR" b="0" dirty="0">
-              <a:solidFill>
-                <a:srgbClr val="000000"/>
-              </a:solidFill>
-              <a:effectLst/>
-              <a:latin typeface="Consolas" panose="020B0609020204030204" pitchFamily="49" charset="0"/>
-            </a:endParaRPr>
-          </a:p>
-          <a:p>
-            <a:pPr>
-              <a:lnSpc>
-                <a:spcPts val="1425"/>
-              </a:lnSpc>
-              <a:buNone/>
-            </a:pPr>
-            <a:r>
-              <a:rPr lang="ko-KR" altLang="ko-KR" b="0" dirty="0" err="1">
-                <a:solidFill>
-                  <a:srgbClr val="000000"/>
-                </a:solidFill>
-                <a:effectLst/>
-                <a:latin typeface="Consolas" panose="020B0609020204030204" pitchFamily="49" charset="0"/>
-              </a:rPr>
-              <a:t>df_ffill</a:t>
-            </a:r>
-            <a:r>
-              <a:rPr lang="ko-KR" altLang="ko-KR" b="0" dirty="0">
-                <a:solidFill>
-                  <a:srgbClr val="000000"/>
-                </a:solidFill>
-                <a:effectLst/>
-                <a:latin typeface="Consolas" panose="020B0609020204030204" pitchFamily="49" charset="0"/>
-              </a:rPr>
-              <a:t> = </a:t>
-            </a:r>
-            <a:r>
-              <a:rPr lang="ko-KR" altLang="ko-KR" b="0" dirty="0" err="1">
-                <a:solidFill>
-                  <a:srgbClr val="000000"/>
-                </a:solidFill>
-                <a:effectLst/>
-                <a:latin typeface="Consolas" panose="020B0609020204030204" pitchFamily="49" charset="0"/>
-              </a:rPr>
-              <a:t>df.copy</a:t>
-            </a:r>
-            <a:r>
-              <a:rPr lang="ko-KR" altLang="ko-KR" b="0" dirty="0">
-                <a:solidFill>
-                  <a:srgbClr val="000000"/>
-                </a:solidFill>
-                <a:effectLst/>
-                <a:latin typeface="Consolas" panose="020B0609020204030204" pitchFamily="49" charset="0"/>
-              </a:rPr>
-              <a:t>()</a:t>
-            </a:r>
-          </a:p>
-          <a:p>
-            <a:pPr>
-              <a:lnSpc>
-                <a:spcPts val="1425"/>
-              </a:lnSpc>
-              <a:buNone/>
-            </a:pPr>
-            <a:r>
-              <a:rPr lang="ko-KR" altLang="ko-KR" b="0" dirty="0" err="1">
-                <a:solidFill>
-                  <a:srgbClr val="000000"/>
-                </a:solidFill>
-                <a:effectLst/>
-                <a:latin typeface="Consolas" panose="020B0609020204030204" pitchFamily="49" charset="0"/>
-              </a:rPr>
-              <a:t>df_ffill</a:t>
-            </a:r>
-            <a:r>
-              <a:rPr lang="ko-KR" altLang="ko-KR" b="0" dirty="0">
-                <a:solidFill>
-                  <a:srgbClr val="000000"/>
-                </a:solidFill>
-                <a:effectLst/>
-                <a:latin typeface="Consolas" panose="020B0609020204030204" pitchFamily="49" charset="0"/>
-              </a:rPr>
-              <a:t>[</a:t>
-            </a:r>
-            <a:r>
-              <a:rPr lang="ko-KR" altLang="ko-KR" b="0" dirty="0">
-                <a:solidFill>
-                  <a:srgbClr val="A31515"/>
-                </a:solidFill>
-                <a:effectLst/>
-                <a:latin typeface="Consolas" panose="020B0609020204030204" pitchFamily="49" charset="0"/>
-              </a:rPr>
-              <a:t>'</a:t>
-            </a:r>
-            <a:r>
-              <a:rPr lang="ko-KR" altLang="ko-KR" b="0" dirty="0" err="1">
-                <a:solidFill>
-                  <a:srgbClr val="A31515"/>
-                </a:solidFill>
-                <a:effectLst/>
-                <a:latin typeface="Consolas" panose="020B0609020204030204" pitchFamily="49" charset="0"/>
-              </a:rPr>
-              <a:t>humidity_percent</a:t>
-            </a:r>
-            <a:r>
-              <a:rPr lang="ko-KR" altLang="ko-KR" b="0" dirty="0">
-                <a:solidFill>
-                  <a:srgbClr val="A31515"/>
-                </a:solidFill>
-                <a:effectLst/>
-                <a:latin typeface="Consolas" panose="020B0609020204030204" pitchFamily="49" charset="0"/>
-              </a:rPr>
-              <a:t>'</a:t>
-            </a:r>
-            <a:r>
-              <a:rPr lang="ko-KR" altLang="ko-KR" b="0" dirty="0">
-                <a:solidFill>
-                  <a:srgbClr val="000000"/>
-                </a:solidFill>
-                <a:effectLst/>
-                <a:latin typeface="Consolas" panose="020B0609020204030204" pitchFamily="49" charset="0"/>
-              </a:rPr>
-              <a:t>] = </a:t>
-            </a:r>
-            <a:r>
-              <a:rPr lang="ko-KR" altLang="ko-KR" b="0" dirty="0" err="1">
-                <a:solidFill>
-                  <a:srgbClr val="000000"/>
-                </a:solidFill>
-                <a:effectLst/>
-                <a:latin typeface="Consolas" panose="020B0609020204030204" pitchFamily="49" charset="0"/>
-              </a:rPr>
-              <a:t>df_ffill</a:t>
-            </a:r>
-            <a:r>
-              <a:rPr lang="ko-KR" altLang="ko-KR" b="0" dirty="0">
-                <a:solidFill>
-                  <a:srgbClr val="000000"/>
-                </a:solidFill>
-                <a:effectLst/>
-                <a:latin typeface="Consolas" panose="020B0609020204030204" pitchFamily="49" charset="0"/>
-              </a:rPr>
-              <a:t>[</a:t>
-            </a:r>
-            <a:r>
-              <a:rPr lang="ko-KR" altLang="ko-KR" b="0" dirty="0">
-                <a:solidFill>
-                  <a:srgbClr val="A31515"/>
-                </a:solidFill>
-                <a:effectLst/>
-                <a:latin typeface="Consolas" panose="020B0609020204030204" pitchFamily="49" charset="0"/>
-              </a:rPr>
-              <a:t>'</a:t>
-            </a:r>
-            <a:r>
-              <a:rPr lang="ko-KR" altLang="ko-KR" b="0" dirty="0" err="1">
-                <a:solidFill>
-                  <a:srgbClr val="A31515"/>
-                </a:solidFill>
-                <a:effectLst/>
-                <a:latin typeface="Consolas" panose="020B0609020204030204" pitchFamily="49" charset="0"/>
-              </a:rPr>
-              <a:t>humidity_percent</a:t>
-            </a:r>
-            <a:r>
-              <a:rPr lang="ko-KR" altLang="ko-KR" b="0" dirty="0">
-                <a:solidFill>
-                  <a:srgbClr val="A31515"/>
-                </a:solidFill>
-                <a:effectLst/>
-                <a:latin typeface="Consolas" panose="020B0609020204030204" pitchFamily="49" charset="0"/>
-              </a:rPr>
-              <a:t>'</a:t>
-            </a:r>
-            <a:r>
-              <a:rPr lang="ko-KR" altLang="ko-KR" b="0" dirty="0">
-                <a:solidFill>
-                  <a:srgbClr val="000000"/>
-                </a:solidFill>
-                <a:effectLst/>
-                <a:latin typeface="Consolas" panose="020B0609020204030204" pitchFamily="49" charset="0"/>
-              </a:rPr>
-              <a:t>].</a:t>
-            </a:r>
-            <a:r>
-              <a:rPr lang="ko-KR" altLang="ko-KR" b="0" dirty="0" err="1">
-                <a:solidFill>
-                  <a:srgbClr val="000000"/>
-                </a:solidFill>
-                <a:effectLst/>
-                <a:latin typeface="Consolas" panose="020B0609020204030204" pitchFamily="49" charset="0"/>
-              </a:rPr>
-              <a:t>ffill</a:t>
-            </a:r>
-            <a:r>
-              <a:rPr lang="ko-KR" altLang="ko-KR" b="0" dirty="0">
-                <a:solidFill>
-                  <a:srgbClr val="000000"/>
-                </a:solidFill>
-                <a:effectLst/>
-                <a:latin typeface="Consolas" panose="020B0609020204030204" pitchFamily="49" charset="0"/>
-              </a:rPr>
-              <a:t>()</a:t>
-            </a:r>
-          </a:p>
-        </p:txBody>
-      </p:sp>
-    </p:spTree>
-    <p:extLst>
-      <p:ext uri="{BB962C8B-B14F-4D97-AF65-F5344CB8AC3E}">
-        <p14:creationId xmlns:p14="http://schemas.microsoft.com/office/powerpoint/2010/main" val="3962146943"/>
       </p:ext>
     </p:extLst>
   </p:cSld>
